--- a/media/BladeDelta_professor_talk.pptx
+++ b/media/BladeDelta_professor_talk.pptx
@@ -10795,7 +10795,7 @@
           <a:lstStyle/>
           <a:p>
             <a:r>
-              <a:t>From sparse views and CAD: aero-engine blade inspection</a:t>
+              <a:t>For aero-engine blades, from CAD and a few views</a:t>
             </a:r>
           </a:p>
         </p:txBody>

--- a/media/BladeDelta_professor_talk.pptx
+++ b/media/BladeDelta_professor_talk.pptx
@@ -18,6 +18,13 @@
     <p:sldId id="270" r:id="rId21"/>
     <p:sldId id="271" r:id="rId22"/>
     <p:sldId id="272" r:id="rId23"/>
+    <p:sldId id="273" r:id="rId24"/>
+    <p:sldId id="274" r:id="rId25"/>
+    <p:sldId id="275" r:id="rId26"/>
+    <p:sldId id="276" r:id="rId27"/>
+    <p:sldId id="277" r:id="rId28"/>
+    <p:sldId id="278" r:id="rId29"/>
+    <p:sldId id="279" r:id="rId30"/>
     <p:sldId id="263" r:id="rId9"/>
   </p:sldIdLst>
   <p:sldSz cx="12192000" cy="6858000"/>
@@ -134,250 +141,6 @@
     </p:ext>
   </p:extLst>
 </p:presentation>
-</file>
-
-<file path=ppt/charts/chart1.xml><?xml version="1.0" encoding="utf-8"?>
-<c:chartSpace xmlns:c="http://schemas.openxmlformats.org/drawingml/2006/chart" xmlns:a="http://schemas.openxmlformats.org/drawingml/2006/main" xmlns:r="http://schemas.openxmlformats.org/officeDocument/2006/relationships">
-  <c:date1904 val="0"/>
-  <c:chart>
-    <c:autoTitleDeleted val="0"/>
-    <c:plotArea>
-      <c:barChart>
-        <c:barDir val="col"/>
-        <c:grouping val="clustered"/>
-        <c:ser>
-          <c:idx val="0"/>
-          <c:order val="0"/>
-          <c:tx>
-            <c:strRef>
-              <c:f>Sheet1!$B$1</c:f>
-              <c:strCache>
-                <c:ptCount val="1"/>
-                <c:pt idx="0">
-                  <c:v>Target false alarms (%)</c:v>
-                </c:pt>
-              </c:strCache>
-            </c:strRef>
-          </c:tx>
-          <c:spPr>
-            <a:solidFill>
-              <a:srgbClr val="5A6577"/>
-            </a:solidFill>
-          </c:spPr>
-          <c:dLbls>
-            <c:numFmt formatCode="0" sourceLinked="0"/>
-            <c:txPr>
-              <a:bodyPr/>
-              <a:lstStyle/>
-              <a:p>
-                <a:pPr>
-                  <a:defRPr sz="1400" b="1"/>
-                </a:pPr>
-              </a:p>
-            </c:txPr>
-            <c:dLblPos val="outEnd"/>
-            <c:showLegendKey val="0"/>
-            <c:showVal val="1"/>
-            <c:showCatName val="0"/>
-            <c:showSerName val="0"/>
-            <c:showPercent val="0"/>
-            <c:showBubbleSize val="0"/>
-            <c:showLeaderLines val="1"/>
-          </c:dLbls>
-          <c:cat>
-            <c:strRef>
-              <c:f>Sheet1!$A$2:$A$4</c:f>
-              <c:strCache>
-                <c:ptCount val="3"/>
-                <c:pt idx="0">
-                  <c:v>Ours (calibrated)</c:v>
-                </c:pt>
-                <c:pt idx="1">
-                  <c:v>Textbook χ²</c:v>
-                </c:pt>
-                <c:pt idx="2">
-                  <c:v>A-contrario</c:v>
-                </c:pt>
-              </c:strCache>
-            </c:strRef>
-          </c:cat>
-          <c:val>
-            <c:numRef>
-              <c:f>Sheet1!$B$2:$B$4</c:f>
-              <c:numCache>
-                <c:formatCode>General</c:formatCode>
-                <c:ptCount val="3"/>
-                <c:pt idx="0">
-                  <c:v>5</c:v>
-                </c:pt>
-                <c:pt idx="1">
-                  <c:v>1</c:v>
-                </c:pt>
-                <c:pt idx="2">
-                  <c:v>0</c:v>
-                </c:pt>
-              </c:numCache>
-            </c:numRef>
-          </c:val>
-        </c:ser>
-        <c:ser>
-          <c:idx val="1"/>
-          <c:order val="1"/>
-          <c:tx>
-            <c:strRef>
-              <c:f>Sheet1!$C$1</c:f>
-              <c:strCache>
-                <c:ptCount val="1"/>
-                <c:pt idx="0">
-                  <c:v>Actual false alarms (%)</c:v>
-                </c:pt>
-              </c:strCache>
-            </c:strRef>
-          </c:tx>
-          <c:spPr>
-            <a:solidFill>
-              <a:srgbClr val="C62828"/>
-            </a:solidFill>
-          </c:spPr>
-          <c:dLbls>
-            <c:numFmt formatCode="0" sourceLinked="0"/>
-            <c:txPr>
-              <a:bodyPr/>
-              <a:lstStyle/>
-              <a:p>
-                <a:pPr>
-                  <a:defRPr sz="1400" b="1"/>
-                </a:pPr>
-              </a:p>
-            </c:txPr>
-            <c:dLblPos val="outEnd"/>
-            <c:showLegendKey val="0"/>
-            <c:showVal val="1"/>
-            <c:showCatName val="0"/>
-            <c:showSerName val="0"/>
-            <c:showPercent val="0"/>
-            <c:showBubbleSize val="0"/>
-            <c:showLeaderLines val="1"/>
-          </c:dLbls>
-          <c:cat>
-            <c:strRef>
-              <c:f>Sheet1!$A$2:$A$4</c:f>
-              <c:strCache>
-                <c:ptCount val="3"/>
-                <c:pt idx="0">
-                  <c:v>Ours (calibrated)</c:v>
-                </c:pt>
-                <c:pt idx="1">
-                  <c:v>Textbook χ²</c:v>
-                </c:pt>
-                <c:pt idx="2">
-                  <c:v>A-contrario</c:v>
-                </c:pt>
-              </c:strCache>
-            </c:strRef>
-          </c:cat>
-          <c:val>
-            <c:numRef>
-              <c:f>Sheet1!$C$2:$C$4</c:f>
-              <c:numCache>
-                <c:formatCode>General</c:formatCode>
-                <c:ptCount val="3"/>
-                <c:pt idx="0">
-                  <c:v>10</c:v>
-                </c:pt>
-                <c:pt idx="1">
-                  <c:v>32</c:v>
-                </c:pt>
-                <c:pt idx="2">
-                  <c:v>96</c:v>
-                </c:pt>
-              </c:numCache>
-            </c:numRef>
-          </c:val>
-        </c:ser>
-        <c:gapWidth val="60"/>
-        <c:axId val="-2068027336"/>
-        <c:axId val="-2113994440"/>
-      </c:barChart>
-      <c:catAx>
-        <c:axId val="-2068027336"/>
-        <c:scaling>
-          <c:orientation val="minMax"/>
-        </c:scaling>
-        <c:delete val="0"/>
-        <c:axPos val="b"/>
-        <c:majorTickMark val="out"/>
-        <c:minorTickMark val="none"/>
-        <c:tickLblPos val="nextTo"/>
-        <c:txPr>
-          <a:bodyPr/>
-          <a:lstStyle/>
-          <a:p>
-            <a:pPr>
-              <a:defRPr sz="1400"/>
-            </a:pPr>
-          </a:p>
-        </c:txPr>
-        <c:crossAx val="-2113994440"/>
-        <c:crosses val="autoZero"/>
-        <c:auto val="1"/>
-        <c:lblAlgn val="ctr"/>
-        <c:lblOffset val="100"/>
-        <c:noMultiLvlLbl val="0"/>
-      </c:catAx>
-      <c:valAx>
-        <c:axId val="-2113994440"/>
-        <c:scaling>
-          <c:max val="105.0"/>
-          <c:min val="0.0"/>
-        </c:scaling>
-        <c:delete/>
-        <c:axPos val="l"/>
-        <c:majorTickMark val="out"/>
-        <c:minorTickMark val="none"/>
-        <c:tickLblPos val="nextTo"/>
-        <c:txPr>
-          <a:bodyPr/>
-          <a:lstStyle/>
-          <a:p>
-            <a:pPr>
-              <a:defRPr sz="1200"/>
-            </a:pPr>
-          </a:p>
-        </c:txPr>
-        <c:crossAx val="-2068027336"/>
-        <c:crosses val="autoZero"/>
-      </c:valAx>
-    </c:plotArea>
-    <c:legend>
-      <c:legendPos val="b"/>
-      <c:overlay val="0"/>
-      <c:txPr>
-        <a:bodyPr/>
-        <a:lstStyle/>
-        <a:p>
-          <a:pPr>
-            <a:defRPr sz="1400"/>
-          </a:pPr>
-        </a:p>
-      </c:txPr>
-    </c:legend>
-    <c:dispBlanksAs val="gap"/>
-  </c:chart>
-  <c:txPr>
-    <a:bodyPr/>
-    <a:lstStyle/>
-    <a:p>
-      <a:pPr>
-        <a:defRPr sz="1800"/>
-      </a:pPr>
-      <a:endParaRPr lang="en-US"/>
-    </a:p>
-  </c:txPr>
-  <c:externalData r:id="rId1">
-    <c:autoUpdate val="0"/>
-  </c:externalData>
-</c:chartSpace>
 </file>
 
 <file path=ppt/notesMasters/notesMaster1.xml><?xml version="1.0" encoding="utf-8"?>
@@ -774,7 +537,7 @@
           <a:lstStyle/>
           <a:p>
             <a:r>
-              <a:t>Title. Defect estimation on aero-engine blades from a CAD model and a few photos, with the ability to abstain.</a:t>
+              <a:t>This talk asks when a CAD model and a few calibrated photographs are sufficient to conclude that an aero-engine blade is physically damaged, and what a method should do when they are not.</a:t>
             </a:r>
           </a:p>
         </p:txBody>
@@ -844,7 +607,7 @@
           <a:lstStyle/>
           <a:p>
             <a:r>
-              <a:t>The next step is real metal blades with measured ground truth.</a:t>
+              <a:t>Calibration on real negatives is what makes false-alarm control work under mismatch.</a:t>
             </a:r>
           </a:p>
         </p:txBody>
@@ -914,7 +677,497 @@
           <a:lstStyle/>
           <a:p>
             <a:r>
-              <a:t>Thank you. Questions welcome.</a:t>
+              <a:t>Frozen v1 transferred poorly to new designs. Two causes were identified and fixed; held-out results shown.</a:t>
+            </a:r>
+          </a:p>
+        </p:txBody>
+      </p:sp>
+      <p:sp>
+        <p:nvSpPr>
+          <p:cNvPr id="4" name="Slide Number Placeholder 3"/>
+          <p:cNvSpPr>
+            <a:spLocks noGrp="1"/>
+          </p:cNvSpPr>
+          <p:nvPr>
+            <p:ph type="sldNum" idx="5" sz="quarter"/>
+          </p:nvPr>
+        </p:nvSpPr>
+        <p:spPr/>
+      </p:sp>
+    </p:spTree>
+  </p:cSld>
+  <p:clrMapOvr>
+    <a:masterClrMapping/>
+  </p:clrMapOvr>
+</p:notes>
+</file>
+
+<file path=ppt/notesSlides/notesSlide12.xml><?xml version="1.0" encoding="utf-8"?>
+<p:notes xmlns:a="http://schemas.openxmlformats.org/drawingml/2006/main" xmlns:p="http://schemas.openxmlformats.org/presentationml/2006/main" xmlns:r="http://schemas.openxmlformats.org/officeDocument/2006/relationships">
+  <p:cSld>
+    <p:spTree>
+      <p:nvGrpSpPr>
+        <p:cNvPr id="1" name=""/>
+        <p:cNvGrpSpPr/>
+        <p:nvPr/>
+      </p:nvGrpSpPr>
+      <p:grpSpPr>
+        <a:xfrm>
+          <a:off x="0" y="0"/>
+          <a:ext cx="0" cy="0"/>
+          <a:chOff x="0" y="0"/>
+          <a:chExt cx="0" cy="0"/>
+        </a:xfrm>
+      </p:grpSpPr>
+      <p:sp>
+        <p:nvSpPr>
+          <p:cNvPr id="2" name="Slide Image Placeholder 1"/>
+          <p:cNvSpPr>
+            <a:spLocks noGrp="1"/>
+          </p:cNvSpPr>
+          <p:nvPr>
+            <p:ph type="sldImg" idx="2"/>
+          </p:nvPr>
+        </p:nvSpPr>
+        <p:spPr/>
+      </p:sp>
+      <p:sp>
+        <p:nvSpPr>
+          <p:cNvPr id="3" name="Notes Placeholder 2"/>
+          <p:cNvSpPr>
+            <a:spLocks noGrp="1"/>
+          </p:cNvSpPr>
+          <p:nvPr>
+            <p:ph type="body" idx="3" sz="quarter"/>
+          </p:nvPr>
+        </p:nvSpPr>
+        <p:spPr/>
+        <p:txBody>
+          <a:bodyPr/>
+          <a:lstStyle/>
+          <a:p>
+            <a:r>
+              <a:t>Frozen detector, two views, no retuning. Nicks and cracks are not modelled by the detector but produce enough evidence. The elevated false-alarm rate is an honest weakness.</a:t>
+            </a:r>
+          </a:p>
+        </p:txBody>
+      </p:sp>
+      <p:sp>
+        <p:nvSpPr>
+          <p:cNvPr id="4" name="Slide Number Placeholder 3"/>
+          <p:cNvSpPr>
+            <a:spLocks noGrp="1"/>
+          </p:cNvSpPr>
+          <p:nvPr>
+            <p:ph type="sldNum" idx="5" sz="quarter"/>
+          </p:nvPr>
+        </p:nvSpPr>
+        <p:spPr/>
+      </p:sp>
+    </p:spTree>
+  </p:cSld>
+  <p:clrMapOvr>
+    <a:masterClrMapping/>
+  </p:clrMapOvr>
+</p:notes>
+</file>
+
+<file path=ppt/notesSlides/notesSlide13.xml><?xml version="1.0" encoding="utf-8"?>
+<p:notes xmlns:a="http://schemas.openxmlformats.org/drawingml/2006/main" xmlns:p="http://schemas.openxmlformats.org/presentationml/2006/main" xmlns:r="http://schemas.openxmlformats.org/officeDocument/2006/relationships">
+  <p:cSld>
+    <p:spTree>
+      <p:nvGrpSpPr>
+        <p:cNvPr id="1" name=""/>
+        <p:cNvGrpSpPr/>
+        <p:nvPr/>
+      </p:nvGrpSpPr>
+      <p:grpSpPr>
+        <a:xfrm>
+          <a:off x="0" y="0"/>
+          <a:ext cx="0" cy="0"/>
+          <a:chOff x="0" y="0"/>
+          <a:chExt cx="0" cy="0"/>
+        </a:xfrm>
+      </p:grpSpPr>
+      <p:sp>
+        <p:nvSpPr>
+          <p:cNvPr id="2" name="Slide Image Placeholder 1"/>
+          <p:cNvSpPr>
+            <a:spLocks noGrp="1"/>
+          </p:cNvSpPr>
+          <p:nvPr>
+            <p:ph type="sldImg" idx="2"/>
+          </p:nvPr>
+        </p:nvSpPr>
+        <p:spPr/>
+      </p:sp>
+      <p:sp>
+        <p:nvSpPr>
+          <p:cNvPr id="3" name="Notes Placeholder 2"/>
+          <p:cNvSpPr>
+            <a:spLocks noGrp="1"/>
+          </p:cNvSpPr>
+          <p:nvPr>
+            <p:ph type="body" idx="3" sz="quarter"/>
+          </p:nvPr>
+        </p:nvSpPr>
+        <p:spPr/>
+        <p:txBody>
+          <a:bodyPr/>
+          <a:lstStyle/>
+          <a:p>
+            <a:r>
+              <a:t>The first nick specialist was too smooth; a carved-notch model raised nick recognition from 2 to 9. Uncertain is preferred to a wrong label.</a:t>
+            </a:r>
+          </a:p>
+        </p:txBody>
+      </p:sp>
+      <p:sp>
+        <p:nvSpPr>
+          <p:cNvPr id="4" name="Slide Number Placeholder 3"/>
+          <p:cNvSpPr>
+            <a:spLocks noGrp="1"/>
+          </p:cNvSpPr>
+          <p:nvPr>
+            <p:ph type="sldNum" idx="5" sz="quarter"/>
+          </p:nvPr>
+        </p:nvSpPr>
+        <p:spPr/>
+      </p:sp>
+    </p:spTree>
+  </p:cSld>
+  <p:clrMapOvr>
+    <a:masterClrMapping/>
+  </p:clrMapOvr>
+</p:notes>
+</file>
+
+<file path=ppt/notesSlides/notesSlide14.xml><?xml version="1.0" encoding="utf-8"?>
+<p:notes xmlns:a="http://schemas.openxmlformats.org/drawingml/2006/main" xmlns:p="http://schemas.openxmlformats.org/presentationml/2006/main" xmlns:r="http://schemas.openxmlformats.org/officeDocument/2006/relationships">
+  <p:cSld>
+    <p:spTree>
+      <p:nvGrpSpPr>
+        <p:cNvPr id="1" name=""/>
+        <p:cNvGrpSpPr/>
+        <p:nvPr/>
+      </p:nvGrpSpPr>
+      <p:grpSpPr>
+        <a:xfrm>
+          <a:off x="0" y="0"/>
+          <a:ext cx="0" cy="0"/>
+          <a:chOff x="0" y="0"/>
+          <a:chExt cx="0" cy="0"/>
+        </a:xfrm>
+      </p:grpSpPr>
+      <p:sp>
+        <p:nvSpPr>
+          <p:cNvPr id="2" name="Slide Image Placeholder 1"/>
+          <p:cNvSpPr>
+            <a:spLocks noGrp="1"/>
+          </p:cNvSpPr>
+          <p:nvPr>
+            <p:ph type="sldImg" idx="2"/>
+          </p:nvPr>
+        </p:nvSpPr>
+        <p:spPr/>
+      </p:sp>
+      <p:sp>
+        <p:nvSpPr>
+          <p:cNvPr id="3" name="Notes Placeholder 2"/>
+          <p:cNvSpPr>
+            <a:spLocks noGrp="1"/>
+          </p:cNvSpPr>
+          <p:nvPr>
+            <p:ph type="body" idx="3" sz="quarter"/>
+          </p:nvPr>
+        </p:nvSpPr>
+        <p:spPr/>
+        <p:txBody>
+          <a:bodyPr/>
+          <a:lstStyle/>
+          <a:p>
+            <a:r>
+              <a:t>Several fixes were tested and failed, which locates the limitation in the information content of the capture and in the appearance model on new designs.</a:t>
+            </a:r>
+          </a:p>
+        </p:txBody>
+      </p:sp>
+      <p:sp>
+        <p:nvSpPr>
+          <p:cNvPr id="4" name="Slide Number Placeholder 3"/>
+          <p:cNvSpPr>
+            <a:spLocks noGrp="1"/>
+          </p:cNvSpPr>
+          <p:nvPr>
+            <p:ph type="sldNum" idx="5" sz="quarter"/>
+          </p:nvPr>
+        </p:nvSpPr>
+        <p:spPr/>
+      </p:sp>
+    </p:spTree>
+  </p:cSld>
+  <p:clrMapOvr>
+    <a:masterClrMapping/>
+  </p:clrMapOvr>
+</p:notes>
+</file>
+
+<file path=ppt/notesSlides/notesSlide15.xml><?xml version="1.0" encoding="utf-8"?>
+<p:notes xmlns:a="http://schemas.openxmlformats.org/drawingml/2006/main" xmlns:p="http://schemas.openxmlformats.org/presentationml/2006/main" xmlns:r="http://schemas.openxmlformats.org/officeDocument/2006/relationships">
+  <p:cSld>
+    <p:spTree>
+      <p:nvGrpSpPr>
+        <p:cNvPr id="1" name=""/>
+        <p:cNvGrpSpPr/>
+        <p:nvPr/>
+      </p:nvGrpSpPr>
+      <p:grpSpPr>
+        <a:xfrm>
+          <a:off x="0" y="0"/>
+          <a:ext cx="0" cy="0"/>
+          <a:chOff x="0" y="0"/>
+          <a:chExt cx="0" cy="0"/>
+        </a:xfrm>
+      </p:grpSpPr>
+      <p:sp>
+        <p:nvSpPr>
+          <p:cNvPr id="2" name="Slide Image Placeholder 1"/>
+          <p:cNvSpPr>
+            <a:spLocks noGrp="1"/>
+          </p:cNvSpPr>
+          <p:nvPr>
+            <p:ph type="sldImg" idx="2"/>
+          </p:nvPr>
+        </p:nvSpPr>
+        <p:spPr/>
+      </p:sp>
+      <p:sp>
+        <p:nvSpPr>
+          <p:cNvPr id="3" name="Notes Placeholder 2"/>
+          <p:cNvSpPr>
+            <a:spLocks noGrp="1"/>
+          </p:cNvSpPr>
+          <p:nvPr>
+            <p:ph type="body" idx="3" sz="quarter"/>
+          </p:nvPr>
+        </p:nvSpPr>
+        <p:spPr/>
+        <p:txBody>
+          <a:bodyPr/>
+          <a:lstStyle/>
+          <a:p>
+            <a:r>
+              <a:t>These are stated in the paper. The SiM3D failure motivates the controlled physical study.</a:t>
+            </a:r>
+          </a:p>
+        </p:txBody>
+      </p:sp>
+      <p:sp>
+        <p:nvSpPr>
+          <p:cNvPr id="4" name="Slide Number Placeholder 3"/>
+          <p:cNvSpPr>
+            <a:spLocks noGrp="1"/>
+          </p:cNvSpPr>
+          <p:nvPr>
+            <p:ph type="sldNum" idx="5" sz="quarter"/>
+          </p:nvPr>
+        </p:nvSpPr>
+        <p:spPr/>
+      </p:sp>
+    </p:spTree>
+  </p:cSld>
+  <p:clrMapOvr>
+    <a:masterClrMapping/>
+  </p:clrMapOvr>
+</p:notes>
+</file>
+
+<file path=ppt/notesSlides/notesSlide16.xml><?xml version="1.0" encoding="utf-8"?>
+<p:notes xmlns:a="http://schemas.openxmlformats.org/drawingml/2006/main" xmlns:p="http://schemas.openxmlformats.org/presentationml/2006/main" xmlns:r="http://schemas.openxmlformats.org/officeDocument/2006/relationships">
+  <p:cSld>
+    <p:spTree>
+      <p:nvGrpSpPr>
+        <p:cNvPr id="1" name=""/>
+        <p:cNvGrpSpPr/>
+        <p:nvPr/>
+      </p:nvGrpSpPr>
+      <p:grpSpPr>
+        <a:xfrm>
+          <a:off x="0" y="0"/>
+          <a:ext cx="0" cy="0"/>
+          <a:chOff x="0" y="0"/>
+          <a:chExt cx="0" cy="0"/>
+        </a:xfrm>
+      </p:grpSpPr>
+      <p:sp>
+        <p:nvSpPr>
+          <p:cNvPr id="2" name="Slide Image Placeholder 1"/>
+          <p:cNvSpPr>
+            <a:spLocks noGrp="1"/>
+          </p:cNvSpPr>
+          <p:nvPr>
+            <p:ph type="sldImg" idx="2"/>
+          </p:nvPr>
+        </p:nvSpPr>
+        <p:spPr/>
+      </p:sp>
+      <p:sp>
+        <p:nvSpPr>
+          <p:cNvPr id="3" name="Notes Placeholder 2"/>
+          <p:cNvSpPr>
+            <a:spLocks noGrp="1"/>
+          </p:cNvSpPr>
+          <p:nvPr>
+            <p:ph type="body" idx="3" sz="quarter"/>
+          </p:nvPr>
+        </p:nvSpPr>
+        <p:spPr/>
+        <p:txBody>
+          <a:bodyPr/>
+          <a:lstStyle/>
+          <a:p>
+            <a:r>
+              <a:t>The frozen pipeline will be compared against metrology on real metal.</a:t>
+            </a:r>
+          </a:p>
+        </p:txBody>
+      </p:sp>
+      <p:sp>
+        <p:nvSpPr>
+          <p:cNvPr id="4" name="Slide Number Placeholder 3"/>
+          <p:cNvSpPr>
+            <a:spLocks noGrp="1"/>
+          </p:cNvSpPr>
+          <p:nvPr>
+            <p:ph type="sldNum" idx="5" sz="quarter"/>
+          </p:nvPr>
+        </p:nvSpPr>
+        <p:spPr/>
+      </p:sp>
+    </p:spTree>
+  </p:cSld>
+  <p:clrMapOvr>
+    <a:masterClrMapping/>
+  </p:clrMapOvr>
+</p:notes>
+</file>
+
+<file path=ppt/notesSlides/notesSlide17.xml><?xml version="1.0" encoding="utf-8"?>
+<p:notes xmlns:a="http://schemas.openxmlformats.org/drawingml/2006/main" xmlns:p="http://schemas.openxmlformats.org/presentationml/2006/main" xmlns:r="http://schemas.openxmlformats.org/officeDocument/2006/relationships">
+  <p:cSld>
+    <p:spTree>
+      <p:nvGrpSpPr>
+        <p:cNvPr id="1" name=""/>
+        <p:cNvGrpSpPr/>
+        <p:nvPr/>
+      </p:nvGrpSpPr>
+      <p:grpSpPr>
+        <a:xfrm>
+          <a:off x="0" y="0"/>
+          <a:ext cx="0" cy="0"/>
+          <a:chOff x="0" y="0"/>
+          <a:chExt cx="0" cy="0"/>
+        </a:xfrm>
+      </p:grpSpPr>
+      <p:sp>
+        <p:nvSpPr>
+          <p:cNvPr id="2" name="Slide Image Placeholder 1"/>
+          <p:cNvSpPr>
+            <a:spLocks noGrp="1"/>
+          </p:cNvSpPr>
+          <p:nvPr>
+            <p:ph type="sldImg" idx="2"/>
+          </p:nvPr>
+        </p:nvSpPr>
+        <p:spPr/>
+      </p:sp>
+      <p:sp>
+        <p:nvSpPr>
+          <p:cNvPr id="3" name="Notes Placeholder 2"/>
+          <p:cNvSpPr>
+            <a:spLocks noGrp="1"/>
+          </p:cNvSpPr>
+          <p:nvPr>
+            <p:ph type="body" idx="3" sz="quarter"/>
+          </p:nvPr>
+        </p:nvSpPr>
+        <p:spPr/>
+        <p:txBody>
+          <a:bodyPr/>
+          <a:lstStyle/>
+          <a:p>
+            <a:r>
+              <a:t>Six points to remember.</a:t>
+            </a:r>
+          </a:p>
+        </p:txBody>
+      </p:sp>
+      <p:sp>
+        <p:nvSpPr>
+          <p:cNvPr id="4" name="Slide Number Placeholder 3"/>
+          <p:cNvSpPr>
+            <a:spLocks noGrp="1"/>
+          </p:cNvSpPr>
+          <p:nvPr>
+            <p:ph type="sldNum" idx="5" sz="quarter"/>
+          </p:nvPr>
+        </p:nvSpPr>
+        <p:spPr/>
+      </p:sp>
+    </p:spTree>
+  </p:cSld>
+  <p:clrMapOvr>
+    <a:masterClrMapping/>
+  </p:clrMapOvr>
+</p:notes>
+</file>
+
+<file path=ppt/notesSlides/notesSlide18.xml><?xml version="1.0" encoding="utf-8"?>
+<p:notes xmlns:a="http://schemas.openxmlformats.org/drawingml/2006/main" xmlns:p="http://schemas.openxmlformats.org/presentationml/2006/main" xmlns:r="http://schemas.openxmlformats.org/officeDocument/2006/relationships">
+  <p:cSld>
+    <p:spTree>
+      <p:nvGrpSpPr>
+        <p:cNvPr id="1" name=""/>
+        <p:cNvGrpSpPr/>
+        <p:nvPr/>
+      </p:nvGrpSpPr>
+      <p:grpSpPr>
+        <a:xfrm>
+          <a:off x="0" y="0"/>
+          <a:ext cx="0" cy="0"/>
+          <a:chOff x="0" y="0"/>
+          <a:chExt cx="0" cy="0"/>
+        </a:xfrm>
+      </p:grpSpPr>
+      <p:sp>
+        <p:nvSpPr>
+          <p:cNvPr id="2" name="Slide Image Placeholder 1"/>
+          <p:cNvSpPr>
+            <a:spLocks noGrp="1"/>
+          </p:cNvSpPr>
+          <p:nvPr>
+            <p:ph type="sldImg" idx="2"/>
+          </p:nvPr>
+        </p:nvSpPr>
+        <p:spPr/>
+      </p:sp>
+      <p:sp>
+        <p:nvSpPr>
+          <p:cNvPr id="3" name="Notes Placeholder 2"/>
+          <p:cNvSpPr>
+            <a:spLocks noGrp="1"/>
+          </p:cNvSpPr>
+          <p:nvPr>
+            <p:ph type="body" idx="3" sz="quarter"/>
+          </p:nvPr>
+        </p:nvSpPr>
+        <p:spPr/>
+        <p:txBody>
+          <a:bodyPr/>
+          <a:lstStyle/>
+          <a:p>
+            <a:r>
+              <a:t>Thank you.</a:t>
             </a:r>
           </a:p>
         </p:txBody>
@@ -984,7 +1237,7 @@
           <a:lstStyle/>
           <a:p>
             <a:r>
-              <a:t>Four causes look alike in a photo. Only a dent changes the shape. We report damage only when the images can prove it, and otherwise abstain explicitly.</a:t>
+              <a:t>Only the first cause is physical damage. The signal of interest is much smaller than the nuisance. This motivates a decision that can abstain.</a:t>
             </a:r>
           </a:p>
         </p:txBody>
@@ -1054,7 +1307,7 @@
           <a:lstStyle/>
           <a:p>
             <a:r>
-              <a:t>Step 1 explains the photos with nuisance only. Step 2 proposes locations with a score test. Step 3 fits a parametric dent by differentiable rendering. Step 4 compares the two fits. Note: the deformation is a parametric dent, not a neural network; the neural deformation field is one of our baselines.</a:t>
+              <a:t>Formally a nested hypothesis comparison. The threshold is calibrated, not assumed. The constraints are what make geometry separable from appearance.</a:t>
             </a:r>
           </a:p>
         </p:txBody>
@@ -1124,7 +1377,7 @@
           <a:lstStyle/>
           <a:p>
             <a:r>
-              <a:t>Four physical specialists each explain the photos at the detected spot. The judge picks the clear winner on the same evidence scale as detection, or says type uncertain. Irregular shapes such as folded dents have not been tested yet.</a:t>
+              <a:t>The closest methods output 2D maps or digital twins. None outputs a tested physical displacement with abstention.</a:t>
             </a:r>
           </a:p>
         </p:txBody>
@@ -1194,7 +1447,7 @@
           <a:lstStyle/>
           <a:p>
             <a:r>
-              <a:t>An honest limitation. The dent is located correctly but its depth is underestimated. Several fixes did not help, so we present location as the reliable output and depth as the open problem, most likely needing grazing light.</a:t>
+              <a:t>The deformation is a parametric dent fitted by Adam through nvdiffrast; neural deformation fields are baselines. The type stage only labels damage already reported, so it adds no false alarms.</a:t>
             </a:r>
           </a:p>
         </p:txBody>
@@ -1264,7 +1517,7 @@
           <a:lstStyle/>
           <a:p>
             <a:r>
-              <a:t>Our threshold is calibrated on real negatives. Textbook tests assume ideal noise and fail. Class-specific thresholds are a planned next step, not yet implemented.</a:t>
+              <a:t>A sealed-test case. The difference image indicates where; the evidence test decides whether; the fitted dent gives location and depth.</a:t>
             </a:r>
           </a:p>
         </p:txBody>
@@ -1334,7 +1587,7 @@
           <a:lstStyle/>
           <a:p>
             <a:r>
-              <a:t>At an equal 5 percent false-alarm rate we locate 51 percent of visible dents against at most 19 percent. Cracks are always typed correctly once found; nicks 9 of 15, with 6 honestly uncertain and 6 wrong.</a:t>
+              <a:t>Exact ground truth is only available in rendering; physical validation follows.</a:t>
             </a:r>
           </a:p>
         </p:txBody>
@@ -1404,7 +1657,7 @@
           <a:lstStyle/>
           <a:p>
             <a:r>
-              <a:t>On unseen industrial designs the frozen model raised many false alarms. We found two causes, fixed them on blades 1 and 2, and tested on blades 3 to 6.</a:t>
+              <a:t>Matched false-alarm comparison removes threshold effects. The baselines lack an appearance model, so stains force their thresholds up.</a:t>
             </a:r>
           </a:p>
         </p:txBody>
@@ -1474,7 +1727,7 @@
           <a:lstStyle/>
           <a:p>
             <a:r>
-              <a:t>Baselines include 2D, classical and CAD-prior deformation methods. Two authors of the closest work gave feedback in personal correspondence; paraphrased.</a:t>
+              <a:t>Most misses are physically small. The detectability predictor works per dent; the aggregated maps are optimistic and are reported as such.</a:t>
             </a:r>
           </a:p>
         </p:txBody>
@@ -10774,7 +11027,7 @@
           <a:lstStyle/>
           <a:p>
             <a:r>
-              <a:t>Evidence-Bounded 3D Defect Estimation</a:t>
+              <a:t>When Do Images Prove a Defect?</a:t>
             </a:r>
           </a:p>
         </p:txBody>
@@ -10795,7 +11048,7 @@
           <a:lstStyle/>
           <a:p>
             <a:r>
-              <a:t>For aero-engine blades, from CAD and a few views</a:t>
+              <a:t>Evidence-bounded 3D defect estimation for aero-engine blades</a:t>
             </a:r>
           </a:p>
         </p:txBody>
@@ -10884,40 +11137,415 @@
           <a:lstStyle/>
           <a:p>
             <a:r>
-              <a:rPr sz="3000"/>
-              <a:t>Threshold Calibration</a:t>
-            </a:r>
-          </a:p>
-        </p:txBody>
-      </p:sp>
+              <a:rPr sz="2100" b="1"/>
+              <a:t>Worked example: the evidence exceeds the threshold by a wide margin</a:t>
+            </a:r>
+          </a:p>
+        </p:txBody>
+      </p:sp>
+      <p:sp>
+        <p:nvSpPr>
+          <p:cNvPr id="3" name="TextBox 2"/>
+          <p:cNvSpPr txBox="1"/>
+          <p:nvPr/>
+        </p:nvSpPr>
+        <p:spPr>
+          <a:xfrm>
+            <a:off x="11155680" y="6446520"/>
+            <a:ext cx="822960" cy="320040"/>
+          </a:xfrm>
+          <a:prstGeom prst="rect">
+            <a:avLst/>
+          </a:prstGeom>
+          <a:noFill/>
+        </p:spPr>
+        <p:txBody>
+          <a:bodyPr wrap="none">
+            <a:spAutoFit/>
+          </a:bodyPr>
+          <a:lstStyle/>
+          <a:p>
+            <a:pPr algn="r"/>
+            <a:r>
+              <a:rPr sz="1100">
+                <a:solidFill>
+                  <a:srgbClr val="5A6577"/>
+                </a:solidFill>
+              </a:rPr>
+              <a:t>6</a:t>
+            </a:r>
+          </a:p>
+        </p:txBody>
+      </p:sp>
+      <p:sp>
+        <p:nvSpPr>
+          <p:cNvPr id="4" name="TextBox 3"/>
+          <p:cNvSpPr txBox="1"/>
+          <p:nvPr/>
+        </p:nvSpPr>
+        <p:spPr>
+          <a:xfrm>
+            <a:off x="502920" y="6446520"/>
+            <a:ext cx="5486400" cy="320040"/>
+          </a:xfrm>
+          <a:prstGeom prst="rect">
+            <a:avLst/>
+          </a:prstGeom>
+          <a:noFill/>
+        </p:spPr>
+        <p:txBody>
+          <a:bodyPr wrap="none">
+            <a:spAutoFit/>
+          </a:bodyPr>
+          <a:lstStyle/>
+          <a:p>
+            <a:r>
+              <a:rPr sz="1000" b="1">
+                <a:solidFill>
+                  <a:srgbClr val="0047BB"/>
+                </a:solidFill>
+              </a:rPr>
+              <a:t>METHOD</a:t>
+            </a:r>
+          </a:p>
+        </p:txBody>
+      </p:sp>
+      <p:pic>
+        <p:nvPicPr>
+          <p:cNvPr id="5" name="Picture 4" descr="f_example.png"/>
+          <p:cNvPicPr>
+            <a:picLocks noChangeAspect="1"/>
+          </p:cNvPicPr>
+          <p:nvPr/>
+        </p:nvPicPr>
+        <p:blipFill>
+          <a:blip r:embed="rId2"/>
+          <a:stretch>
+            <a:fillRect/>
+          </a:stretch>
+        </p:blipFill>
+        <p:spPr>
+          <a:xfrm>
+            <a:off x="457200" y="2331720"/>
+            <a:ext cx="7315200" cy="1783080"/>
+          </a:xfrm>
+          <a:prstGeom prst="rect">
+            <a:avLst/>
+          </a:prstGeom>
+        </p:spPr>
+      </p:pic>
       <p:graphicFrame>
         <p:nvGraphicFramePr>
-          <p:cNvPr id="3" name="Chart 2"/>
+          <p:cNvPr id="6" name="Table 5"/>
           <p:cNvGraphicFramePr>
             <a:graphicFrameLocks noGrp="1"/>
           </p:cNvGraphicFramePr>
           <p:nvPr/>
         </p:nvGraphicFramePr>
         <p:xfrm>
-          <a:off x="457200" y="1865376"/>
-          <a:ext cx="5852160" cy="3785615"/>
+          <a:off x="8046720" y="1947672"/>
+          <a:ext cx="3657600" cy="2633472"/>
         </p:xfrm>
         <a:graphic>
-          <a:graphicData uri="http://schemas.openxmlformats.org/drawingml/2006/chart">
-            <c:chart xmlns:c="http://schemas.openxmlformats.org/drawingml/2006/chart" r:id="rId2"/>
+          <a:graphicData uri="http://schemas.openxmlformats.org/drawingml/2006/table">
+            <a:tbl>
+              <a:tblPr firstRow="1" bandRow="1">
+                <a:tableStyleId>{5C22544A-7EE6-4342-B048-85BDC9FD1C3A}</a:tableStyleId>
+              </a:tblPr>
+              <a:tblGrid>
+                <a:gridCol w="2103120"/>
+                <a:gridCol w="1554480"/>
+              </a:tblGrid>
+              <a:tr h="438912">
+                <a:tc>
+                  <a:txBody>
+                    <a:bodyPr/>
+                    <a:lstStyle/>
+                    <a:p>
+                      <a:pPr algn="l"/>
+                      <a:r>
+                        <a:rPr sz="1300" b="1">
+                          <a:solidFill>
+                            <a:srgbClr val="FFFFFF"/>
+                          </a:solidFill>
+                        </a:rPr>
+                        <a:t>Quantity</a:t>
+                      </a:r>
+                    </a:p>
+                  </a:txBody>
+                  <a:tcPr marL="73152" marR="73152">
+                    <a:solidFill>
+                      <a:srgbClr val="0047BB"/>
+                    </a:solidFill>
+                  </a:tcPr>
+                </a:tc>
+                <a:tc>
+                  <a:txBody>
+                    <a:bodyPr/>
+                    <a:lstStyle/>
+                    <a:p>
+                      <a:pPr algn="ctr"/>
+                      <a:r>
+                        <a:rPr sz="1300" b="1">
+                          <a:solidFill>
+                            <a:srgbClr val="FFFFFF"/>
+                          </a:solidFill>
+                        </a:rPr>
+                        <a:t>Value</a:t>
+                      </a:r>
+                    </a:p>
+                  </a:txBody>
+                  <a:tcPr marL="73152" marR="73152">
+                    <a:solidFill>
+                      <a:srgbClr val="0047BB"/>
+                    </a:solidFill>
+                  </a:tcPr>
+                </a:tc>
+              </a:tr>
+              <a:tr h="438912">
+                <a:tc>
+                  <a:txBody>
+                    <a:bodyPr/>
+                    <a:lstStyle/>
+                    <a:p>
+                      <a:pPr algn="l"/>
+                      <a:r>
+                        <a:rPr sz="1300" b="0">
+                          <a:solidFill>
+                            <a:srgbClr val="1F2937"/>
+                          </a:solidFill>
+                        </a:rPr>
+                        <a:t>L(H0), no damage</a:t>
+                      </a:r>
+                    </a:p>
+                  </a:txBody>
+                  <a:tcPr marL="73152" marR="73152">
+                    <a:solidFill>
+                      <a:srgbClr val="FFFFFF"/>
+                    </a:solidFill>
+                  </a:tcPr>
+                </a:tc>
+                <a:tc>
+                  <a:txBody>
+                    <a:bodyPr/>
+                    <a:lstStyle/>
+                    <a:p>
+                      <a:pPr algn="ctr"/>
+                      <a:r>
+                        <a:rPr sz="1300" b="0">
+                          <a:solidFill>
+                            <a:srgbClr val="1F2937"/>
+                          </a:solidFill>
+                        </a:rPr>
+                        <a:t>89.3</a:t>
+                      </a:r>
+                    </a:p>
+                  </a:txBody>
+                  <a:tcPr marL="73152" marR="73152">
+                    <a:solidFill>
+                      <a:srgbClr val="FFFFFF"/>
+                    </a:solidFill>
+                  </a:tcPr>
+                </a:tc>
+              </a:tr>
+              <a:tr h="438912">
+                <a:tc>
+                  <a:txBody>
+                    <a:bodyPr/>
+                    <a:lstStyle/>
+                    <a:p>
+                      <a:pPr algn="l"/>
+                      <a:r>
+                        <a:rPr sz="1300" b="0">
+                          <a:solidFill>
+                            <a:srgbClr val="1F2937"/>
+                          </a:solidFill>
+                        </a:rPr>
+                        <a:t>L(H1), with dent</a:t>
+                      </a:r>
+                    </a:p>
+                  </a:txBody>
+                  <a:tcPr marL="73152" marR="73152">
+                    <a:solidFill>
+                      <a:srgbClr val="F2F5FA"/>
+                    </a:solidFill>
+                  </a:tcPr>
+                </a:tc>
+                <a:tc>
+                  <a:txBody>
+                    <a:bodyPr/>
+                    <a:lstStyle/>
+                    <a:p>
+                      <a:pPr algn="ctr"/>
+                      <a:r>
+                        <a:rPr sz="1300" b="0">
+                          <a:solidFill>
+                            <a:srgbClr val="1F2937"/>
+                          </a:solidFill>
+                        </a:rPr>
+                        <a:t>19.9</a:t>
+                      </a:r>
+                    </a:p>
+                  </a:txBody>
+                  <a:tcPr marL="73152" marR="73152">
+                    <a:solidFill>
+                      <a:srgbClr val="F2F5FA"/>
+                    </a:solidFill>
+                  </a:tcPr>
+                </a:tc>
+              </a:tr>
+              <a:tr h="438912">
+                <a:tc>
+                  <a:txBody>
+                    <a:bodyPr/>
+                    <a:lstStyle/>
+                    <a:p>
+                      <a:pPr algn="l"/>
+                      <a:r>
+                        <a:rPr sz="1300" b="1">
+                          <a:solidFill>
+                            <a:srgbClr val="0047BB"/>
+                          </a:solidFill>
+                        </a:rPr>
+                        <a:t>Evidence (gain)</a:t>
+                      </a:r>
+                    </a:p>
+                  </a:txBody>
+                  <a:tcPr marL="73152" marR="73152">
+                    <a:solidFill>
+                      <a:srgbClr val="E3ECFA"/>
+                    </a:solidFill>
+                  </a:tcPr>
+                </a:tc>
+                <a:tc>
+                  <a:txBody>
+                    <a:bodyPr/>
+                    <a:lstStyle/>
+                    <a:p>
+                      <a:pPr algn="ctr"/>
+                      <a:r>
+                        <a:rPr sz="1300" b="1">
+                          <a:solidFill>
+                            <a:srgbClr val="0047BB"/>
+                          </a:solidFill>
+                        </a:rPr>
+                        <a:t>69.4</a:t>
+                      </a:r>
+                    </a:p>
+                  </a:txBody>
+                  <a:tcPr marL="73152" marR="73152">
+                    <a:solidFill>
+                      <a:srgbClr val="E3ECFA"/>
+                    </a:solidFill>
+                  </a:tcPr>
+                </a:tc>
+              </a:tr>
+              <a:tr h="438912">
+                <a:tc>
+                  <a:txBody>
+                    <a:bodyPr/>
+                    <a:lstStyle/>
+                    <a:p>
+                      <a:pPr algn="l"/>
+                      <a:r>
+                        <a:rPr sz="1300" b="0">
+                          <a:solidFill>
+                            <a:srgbClr val="1F2937"/>
+                          </a:solidFill>
+                        </a:rPr>
+                        <a:t>Threshold τ</a:t>
+                      </a:r>
+                    </a:p>
+                  </a:txBody>
+                  <a:tcPr marL="73152" marR="73152">
+                    <a:solidFill>
+                      <a:srgbClr val="F2F5FA"/>
+                    </a:solidFill>
+                  </a:tcPr>
+                </a:tc>
+                <a:tc>
+                  <a:txBody>
+                    <a:bodyPr/>
+                    <a:lstStyle/>
+                    <a:p>
+                      <a:pPr algn="ctr"/>
+                      <a:r>
+                        <a:rPr sz="1300" b="0">
+                          <a:solidFill>
+                            <a:srgbClr val="1F2937"/>
+                          </a:solidFill>
+                        </a:rPr>
+                        <a:t>1.02</a:t>
+                      </a:r>
+                    </a:p>
+                  </a:txBody>
+                  <a:tcPr marL="73152" marR="73152">
+                    <a:solidFill>
+                      <a:srgbClr val="F2F5FA"/>
+                    </a:solidFill>
+                  </a:tcPr>
+                </a:tc>
+              </a:tr>
+              <a:tr h="438912">
+                <a:tc>
+                  <a:txBody>
+                    <a:bodyPr/>
+                    <a:lstStyle/>
+                    <a:p>
+                      <a:pPr algn="l"/>
+                      <a:r>
+                        <a:rPr sz="1300" b="0">
+                          <a:solidFill>
+                            <a:srgbClr val="1F2937"/>
+                          </a:solidFill>
+                        </a:rPr>
+                        <a:t>Depth found / true</a:t>
+                      </a:r>
+                    </a:p>
+                  </a:txBody>
+                  <a:tcPr marL="73152" marR="73152">
+                    <a:solidFill>
+                      <a:srgbClr val="FFFFFF"/>
+                    </a:solidFill>
+                  </a:tcPr>
+                </a:tc>
+                <a:tc>
+                  <a:txBody>
+                    <a:bodyPr/>
+                    <a:lstStyle/>
+                    <a:p>
+                      <a:pPr algn="ctr"/>
+                      <a:r>
+                        <a:rPr sz="1300" b="0">
+                          <a:solidFill>
+                            <a:srgbClr val="1F2937"/>
+                          </a:solidFill>
+                        </a:rPr>
+                        <a:t>0.35 / 0.36 mm</a:t>
+                      </a:r>
+                    </a:p>
+                  </a:txBody>
+                  <a:tcPr marL="73152" marR="73152">
+                    <a:solidFill>
+                      <a:srgbClr val="FFFFFF"/>
+                    </a:solidFill>
+                  </a:tcPr>
+                </a:tc>
+              </a:tr>
+            </a:tbl>
           </a:graphicData>
         </a:graphic>
       </p:graphicFrame>
       <p:sp>
         <p:nvSpPr>
-          <p:cNvPr id="4" name="TextBox 3"/>
+          <p:cNvPr id="7" name="TextBox 6"/>
           <p:cNvSpPr txBox="1"/>
           <p:nvPr/>
         </p:nvSpPr>
         <p:spPr>
           <a:xfrm>
-            <a:off x="6583680" y="1947672"/>
-            <a:ext cx="5212080" cy="3291840"/>
+            <a:off x="502920" y="6053328"/>
+            <a:ext cx="10515600" cy="365760"/>
           </a:xfrm>
           <a:prstGeom prst="rect">
             <a:avLst/>
@@ -10925,120 +11553,18 @@
           <a:noFill/>
         </p:spPr>
         <p:txBody>
-          <a:bodyPr wrap="square" anchor="t">
+          <a:bodyPr wrap="square">
             <a:spAutoFit/>
           </a:bodyPr>
           <a:lstStyle/>
           <a:p>
-            <a:pPr algn="l">
-              <a:spcAft>
-                <a:spcPts val="800"/>
-              </a:spcAft>
-            </a:pPr>
-            <a:r>
-              <a:rPr sz="1500" b="0">
-                <a:solidFill>
-                  <a:srgbClr val="1F2937"/>
+            <a:r>
+              <a:rPr sz="1000" i="1">
+                <a:solidFill>
+                  <a:srgbClr val="5A6577"/>
                 </a:solidFill>
               </a:rPr>
-              <a:t>•  Threshold set by split-conformal calibration on healthy and stained blades</a:t>
-            </a:r>
-          </a:p>
-          <a:p>
-            <a:pPr algn="l">
-              <a:spcAft>
-                <a:spcPts val="800"/>
-              </a:spcAft>
-            </a:pPr>
-            <a:r>
-              <a:rPr sz="1500" b="0">
-                <a:solidFill>
-                  <a:srgbClr val="1F2937"/>
-                </a:solidFill>
-              </a:rPr>
-              <a:t>•  Recalibrated on 360 negatives: target 2% → 4% actual on the sealed test</a:t>
-            </a:r>
-          </a:p>
-          <a:p>
-            <a:pPr algn="l">
-              <a:spcAft>
-                <a:spcPts val="800"/>
-              </a:spcAft>
-            </a:pPr>
-            <a:r>
-              <a:rPr sz="1500" b="0">
-                <a:solidFill>
-                  <a:srgbClr val="1F2937"/>
-                </a:solidFill>
-              </a:rPr>
-              <a:t>•  Textbook statistical thresholds do not control false alarms under real mismatch</a:t>
-            </a:r>
-          </a:p>
-          <a:p>
-            <a:pPr algn="l">
-              <a:spcAft>
-                <a:spcPts val="800"/>
-              </a:spcAft>
-            </a:pPr>
-            <a:r>
-              <a:rPr sz="1500" b="0">
-                <a:solidFill>
-                  <a:srgbClr val="1F2937"/>
-                </a:solidFill>
-              </a:rPr>
-              <a:t>•  Planned: class-specific thresholds (dent / nick / crack), since their error distributions differ</a:t>
-            </a:r>
-          </a:p>
-        </p:txBody>
-      </p:sp>
-      <p:sp>
-        <p:nvSpPr>
-          <p:cNvPr id="5" name="Rounded Rectangle 4"/>
-          <p:cNvSpPr/>
-          <p:nvPr/>
-        </p:nvSpPr>
-        <p:spPr>
-          <a:xfrm>
-            <a:off x="6583680" y="5239512"/>
-            <a:ext cx="5212080" cy="822960"/>
-          </a:xfrm>
-          <a:prstGeom prst="roundRect">
-            <a:avLst/>
-          </a:prstGeom>
-          <a:solidFill>
-            <a:srgbClr val="0047BB"/>
-          </a:solidFill>
-          <a:ln>
-            <a:noFill/>
-          </a:ln>
-          <a:effectLst/>
-        </p:spPr>
-        <p:style>
-          <a:lnRef idx="1">
-            <a:schemeClr val="accent1"/>
-          </a:lnRef>
-          <a:fillRef idx="3">
-            <a:schemeClr val="accent1"/>
-          </a:fillRef>
-          <a:effectRef idx="2">
-            <a:schemeClr val="accent1"/>
-          </a:effectRef>
-          <a:fontRef idx="minor">
-            <a:schemeClr val="lt1"/>
-          </a:fontRef>
-        </p:style>
-        <p:txBody>
-          <a:bodyPr rtlCol="0" anchor="ctr" wrap="square"/>
-          <a:lstStyle/>
-          <a:p>
-            <a:pPr algn="ctr"/>
-            <a:r>
-              <a:rPr sz="1800" b="1">
-                <a:solidFill>
-                  <a:srgbClr val="FFFFFF"/>
-                </a:solidFill>
-              </a:rPr>
-              <a:t>Calibration is required, not cosmetic</a:t>
+              <a:t>Sealed test case test2_0083_3 (Rotor37, unseen blade).</a:t>
             </a:r>
           </a:p>
         </p:txBody>
@@ -11077,15 +11603,517 @@
           <a:lstStyle/>
           <a:p>
             <a:r>
-              <a:rPr sz="2400"/>
-              <a:t>Quantitative Results (about 1,350 rendered cases)</a:t>
-            </a:r>
-          </a:p>
-        </p:txBody>
-      </p:sp>
+              <a:rPr sz="2100" b="1"/>
+              <a:t>BladeDelta: 1,352 rendered cases with exact ground truth</a:t>
+            </a:r>
+          </a:p>
+        </p:txBody>
+      </p:sp>
+      <p:sp>
+        <p:nvSpPr>
+          <p:cNvPr id="3" name="TextBox 2"/>
+          <p:cNvSpPr txBox="1"/>
+          <p:nvPr/>
+        </p:nvSpPr>
+        <p:spPr>
+          <a:xfrm>
+            <a:off x="11155680" y="6446520"/>
+            <a:ext cx="822960" cy="320040"/>
+          </a:xfrm>
+          <a:prstGeom prst="rect">
+            <a:avLst/>
+          </a:prstGeom>
+          <a:noFill/>
+        </p:spPr>
+        <p:txBody>
+          <a:bodyPr wrap="none">
+            <a:spAutoFit/>
+          </a:bodyPr>
+          <a:lstStyle/>
+          <a:p>
+            <a:pPr algn="r"/>
+            <a:r>
+              <a:rPr sz="1100">
+                <a:solidFill>
+                  <a:srgbClr val="5A6577"/>
+                </a:solidFill>
+              </a:rPr>
+              <a:t>7</a:t>
+            </a:r>
+          </a:p>
+        </p:txBody>
+      </p:sp>
+      <p:sp>
+        <p:nvSpPr>
+          <p:cNvPr id="4" name="TextBox 3"/>
+          <p:cNvSpPr txBox="1"/>
+          <p:nvPr/>
+        </p:nvSpPr>
+        <p:spPr>
+          <a:xfrm>
+            <a:off x="502920" y="6446520"/>
+            <a:ext cx="5486400" cy="320040"/>
+          </a:xfrm>
+          <a:prstGeom prst="rect">
+            <a:avLst/>
+          </a:prstGeom>
+          <a:noFill/>
+        </p:spPr>
+        <p:txBody>
+          <a:bodyPr wrap="none">
+            <a:spAutoFit/>
+          </a:bodyPr>
+          <a:lstStyle/>
+          <a:p>
+            <a:r>
+              <a:rPr sz="1000" b="1">
+                <a:solidFill>
+                  <a:srgbClr val="0047BB"/>
+                </a:solidFill>
+              </a:rPr>
+              <a:t>BENCHMARK</a:t>
+            </a:r>
+          </a:p>
+        </p:txBody>
+      </p:sp>
+      <p:graphicFrame>
+        <p:nvGraphicFramePr>
+          <p:cNvPr id="5" name="Table 4"/>
+          <p:cNvGraphicFramePr>
+            <a:graphicFrameLocks noGrp="1"/>
+          </p:cNvGraphicFramePr>
+          <p:nvPr/>
+        </p:nvGraphicFramePr>
+        <p:xfrm>
+          <a:off x="548640" y="1865376"/>
+          <a:ext cx="6400800" cy="2743200"/>
+        </p:xfrm>
+        <a:graphic>
+          <a:graphicData uri="http://schemas.openxmlformats.org/drawingml/2006/table">
+            <a:tbl>
+              <a:tblPr firstRow="1" bandRow="1">
+                <a:tableStyleId>{5C22544A-7EE6-4342-B048-85BDC9FD1C3A}</a:tableStyleId>
+              </a:tblPr>
+              <a:tblGrid>
+                <a:gridCol w="2194560"/>
+                <a:gridCol w="1645920"/>
+                <a:gridCol w="2560320"/>
+              </a:tblGrid>
+              <a:tr h="457200">
+                <a:tc>
+                  <a:txBody>
+                    <a:bodyPr/>
+                    <a:lstStyle/>
+                    <a:p>
+                      <a:pPr algn="l"/>
+                      <a:r>
+                        <a:rPr sz="1200" b="1">
+                          <a:solidFill>
+                            <a:srgbClr val="FFFFFF"/>
+                          </a:solidFill>
+                        </a:rPr>
+                        <a:t>Split</a:t>
+                      </a:r>
+                    </a:p>
+                  </a:txBody>
+                  <a:tcPr marL="73152" marR="73152">
+                    <a:solidFill>
+                      <a:srgbClr val="0047BB"/>
+                    </a:solidFill>
+                  </a:tcPr>
+                </a:tc>
+                <a:tc>
+                  <a:txBody>
+                    <a:bodyPr/>
+                    <a:lstStyle/>
+                    <a:p>
+                      <a:pPr algn="ctr"/>
+                      <a:r>
+                        <a:rPr sz="1200" b="1">
+                          <a:solidFill>
+                            <a:srgbClr val="FFFFFF"/>
+                          </a:solidFill>
+                        </a:rPr>
+                        <a:t>Cases</a:t>
+                      </a:r>
+                    </a:p>
+                  </a:txBody>
+                  <a:tcPr marL="73152" marR="73152">
+                    <a:solidFill>
+                      <a:srgbClr val="0047BB"/>
+                    </a:solidFill>
+                  </a:tcPr>
+                </a:tc>
+                <a:tc>
+                  <a:txBody>
+                    <a:bodyPr/>
+                    <a:lstStyle/>
+                    <a:p>
+                      <a:pPr algn="ctr"/>
+                      <a:r>
+                        <a:rPr sz="1200" b="1">
+                          <a:solidFill>
+                            <a:srgbClr val="FFFFFF"/>
+                          </a:solidFill>
+                        </a:rPr>
+                        <a:t>Role</a:t>
+                      </a:r>
+                    </a:p>
+                  </a:txBody>
+                  <a:tcPr marL="73152" marR="73152">
+                    <a:solidFill>
+                      <a:srgbClr val="0047BB"/>
+                    </a:solidFill>
+                  </a:tcPr>
+                </a:tc>
+              </a:tr>
+              <a:tr h="457200">
+                <a:tc>
+                  <a:txBody>
+                    <a:bodyPr/>
+                    <a:lstStyle/>
+                    <a:p>
+                      <a:pPr algn="l"/>
+                      <a:r>
+                        <a:rPr sz="1200" b="0">
+                          <a:solidFill>
+                            <a:srgbClr val="1F2937"/>
+                          </a:solidFill>
+                        </a:rPr>
+                        <a:t>Rotor37 dev / calib</a:t>
+                      </a:r>
+                    </a:p>
+                  </a:txBody>
+                  <a:tcPr marL="73152" marR="73152">
+                    <a:solidFill>
+                      <a:srgbClr val="FFFFFF"/>
+                    </a:solidFill>
+                  </a:tcPr>
+                </a:tc>
+                <a:tc>
+                  <a:txBody>
+                    <a:bodyPr/>
+                    <a:lstStyle/>
+                    <a:p>
+                      <a:pPr algn="ctr"/>
+                      <a:r>
+                        <a:rPr sz="1200" b="0">
+                          <a:solidFill>
+                            <a:srgbClr val="1F2937"/>
+                          </a:solidFill>
+                        </a:rPr>
+                        <a:t>96 / 120 (+300)</a:t>
+                      </a:r>
+                    </a:p>
+                  </a:txBody>
+                  <a:tcPr marL="73152" marR="73152">
+                    <a:solidFill>
+                      <a:srgbClr val="FFFFFF"/>
+                    </a:solidFill>
+                  </a:tcPr>
+                </a:tc>
+                <a:tc>
+                  <a:txBody>
+                    <a:bodyPr/>
+                    <a:lstStyle/>
+                    <a:p>
+                      <a:pPr algn="ctr"/>
+                      <a:r>
+                        <a:rPr sz="1200" b="0">
+                          <a:solidFill>
+                            <a:srgbClr val="1F2937"/>
+                          </a:solidFill>
+                        </a:rPr>
+                        <a:t>Development, calibration</a:t>
+                      </a:r>
+                    </a:p>
+                  </a:txBody>
+                  <a:tcPr marL="73152" marR="73152">
+                    <a:solidFill>
+                      <a:srgbClr val="FFFFFF"/>
+                    </a:solidFill>
+                  </a:tcPr>
+                </a:tc>
+              </a:tr>
+              <a:tr h="457200">
+                <a:tc>
+                  <a:txBody>
+                    <a:bodyPr/>
+                    <a:lstStyle/>
+                    <a:p>
+                      <a:pPr algn="l"/>
+                      <a:r>
+                        <a:rPr sz="1200" b="0">
+                          <a:solidFill>
+                            <a:srgbClr val="1F2937"/>
+                          </a:solidFill>
+                        </a:rPr>
+                        <a:t>Rotor37 sealed test</a:t>
+                      </a:r>
+                    </a:p>
+                  </a:txBody>
+                  <a:tcPr marL="73152" marR="73152">
+                    <a:solidFill>
+                      <a:srgbClr val="F2F5FA"/>
+                    </a:solidFill>
+                  </a:tcPr>
+                </a:tc>
+                <a:tc>
+                  <a:txBody>
+                    <a:bodyPr/>
+                    <a:lstStyle/>
+                    <a:p>
+                      <a:pPr algn="ctr"/>
+                      <a:r>
+                        <a:rPr sz="1200" b="0">
+                          <a:solidFill>
+                            <a:srgbClr val="1F2937"/>
+                          </a:solidFill>
+                        </a:rPr>
+                        <a:t>240 (30 blades)</a:t>
+                      </a:r>
+                    </a:p>
+                  </a:txBody>
+                  <a:tcPr marL="73152" marR="73152">
+                    <a:solidFill>
+                      <a:srgbClr val="F2F5FA"/>
+                    </a:solidFill>
+                  </a:tcPr>
+                </a:tc>
+                <a:tc>
+                  <a:txBody>
+                    <a:bodyPr/>
+                    <a:lstStyle/>
+                    <a:p>
+                      <a:pPr algn="ctr"/>
+                      <a:r>
+                        <a:rPr sz="1200" b="0">
+                          <a:solidFill>
+                            <a:srgbClr val="1F2937"/>
+                          </a:solidFill>
+                        </a:rPr>
+                        <a:t>Main result</a:t>
+                      </a:r>
+                    </a:p>
+                  </a:txBody>
+                  <a:tcPr marL="73152" marR="73152">
+                    <a:solidFill>
+                      <a:srgbClr val="F2F5FA"/>
+                    </a:solidFill>
+                  </a:tcPr>
+                </a:tc>
+              </a:tr>
+              <a:tr h="457200">
+                <a:tc>
+                  <a:txBody>
+                    <a:bodyPr/>
+                    <a:lstStyle/>
+                    <a:p>
+                      <a:pPr algn="l"/>
+                      <a:r>
+                        <a:rPr sz="1200" b="0">
+                          <a:solidFill>
+                            <a:srgbClr val="1F2937"/>
+                          </a:solidFill>
+                        </a:rPr>
+                        <a:t>Rotor37 second test</a:t>
+                      </a:r>
+                    </a:p>
+                  </a:txBody>
+                  <a:tcPr marL="73152" marR="73152">
+                    <a:solidFill>
+                      <a:srgbClr val="FFFFFF"/>
+                    </a:solidFill>
+                  </a:tcPr>
+                </a:tc>
+                <a:tc>
+                  <a:txBody>
+                    <a:bodyPr/>
+                    <a:lstStyle/>
+                    <a:p>
+                      <a:pPr algn="ctr"/>
+                      <a:r>
+                        <a:rPr sz="1200" b="0">
+                          <a:solidFill>
+                            <a:srgbClr val="1F2937"/>
+                          </a:solidFill>
+                        </a:rPr>
+                        <a:t>240 (30 blades)</a:t>
+                      </a:r>
+                    </a:p>
+                  </a:txBody>
+                  <a:tcPr marL="73152" marR="73152">
+                    <a:solidFill>
+                      <a:srgbClr val="FFFFFF"/>
+                    </a:solidFill>
+                  </a:tcPr>
+                </a:tc>
+                <a:tc>
+                  <a:txBody>
+                    <a:bodyPr/>
+                    <a:lstStyle/>
+                    <a:p>
+                      <a:pPr algn="ctr"/>
+                      <a:r>
+                        <a:rPr sz="1200" b="0">
+                          <a:solidFill>
+                            <a:srgbClr val="1F2937"/>
+                          </a:solidFill>
+                        </a:rPr>
+                        <a:t>Reproduction</a:t>
+                      </a:r>
+                    </a:p>
+                  </a:txBody>
+                  <a:tcPr marL="73152" marR="73152">
+                    <a:solidFill>
+                      <a:srgbClr val="FFFFFF"/>
+                    </a:solidFill>
+                  </a:tcPr>
+                </a:tc>
+              </a:tr>
+              <a:tr h="457200">
+                <a:tc>
+                  <a:txBody>
+                    <a:bodyPr/>
+                    <a:lstStyle/>
+                    <a:p>
+                      <a:pPr algn="l"/>
+                      <a:r>
+                        <a:rPr sz="1200" b="0">
+                          <a:solidFill>
+                            <a:srgbClr val="1F2937"/>
+                          </a:solidFill>
+                        </a:rPr>
+                        <a:t>Six industrial designs</a:t>
+                      </a:r>
+                    </a:p>
+                  </a:txBody>
+                  <a:tcPr marL="73152" marR="73152">
+                    <a:solidFill>
+                      <a:srgbClr val="F2F5FA"/>
+                    </a:solidFill>
+                  </a:tcPr>
+                </a:tc>
+                <a:tc>
+                  <a:txBody>
+                    <a:bodyPr/>
+                    <a:lstStyle/>
+                    <a:p>
+                      <a:pPr algn="ctr"/>
+                      <a:r>
+                        <a:rPr sz="1200" b="0">
+                          <a:solidFill>
+                            <a:srgbClr val="1F2937"/>
+                          </a:solidFill>
+                        </a:rPr>
+                        <a:t>456</a:t>
+                      </a:r>
+                    </a:p>
+                  </a:txBody>
+                  <a:tcPr marL="73152" marR="73152">
+                    <a:solidFill>
+                      <a:srgbClr val="F2F5FA"/>
+                    </a:solidFill>
+                  </a:tcPr>
+                </a:tc>
+                <a:tc>
+                  <a:txBody>
+                    <a:bodyPr/>
+                    <a:lstStyle/>
+                    <a:p>
+                      <a:pPr algn="ctr"/>
+                      <a:r>
+                        <a:rPr sz="1200" b="0">
+                          <a:solidFill>
+                            <a:srgbClr val="1F2937"/>
+                          </a:solidFill>
+                        </a:rPr>
+                        <a:t>Transfer (blades 3–6 held out)</a:t>
+                      </a:r>
+                    </a:p>
+                  </a:txBody>
+                  <a:tcPr marL="73152" marR="73152">
+                    <a:solidFill>
+                      <a:srgbClr val="F2F5FA"/>
+                    </a:solidFill>
+                  </a:tcPr>
+                </a:tc>
+              </a:tr>
+              <a:tr h="457200">
+                <a:tc>
+                  <a:txBody>
+                    <a:bodyPr/>
+                    <a:lstStyle/>
+                    <a:p>
+                      <a:pPr algn="l"/>
+                      <a:r>
+                        <a:rPr sz="1200" b="0">
+                          <a:solidFill>
+                            <a:srgbClr val="1F2937"/>
+                          </a:solidFill>
+                        </a:rPr>
+                        <a:t>Defect types</a:t>
+                      </a:r>
+                    </a:p>
+                  </a:txBody>
+                  <a:tcPr marL="73152" marR="73152">
+                    <a:solidFill>
+                      <a:srgbClr val="FFFFFF"/>
+                    </a:solidFill>
+                  </a:tcPr>
+                </a:tc>
+                <a:tc>
+                  <a:txBody>
+                    <a:bodyPr/>
+                    <a:lstStyle/>
+                    <a:p>
+                      <a:pPr algn="ctr"/>
+                      <a:r>
+                        <a:rPr sz="1200" b="0">
+                          <a:solidFill>
+                            <a:srgbClr val="1F2937"/>
+                          </a:solidFill>
+                        </a:rPr>
+                        <a:t>136 + 64</a:t>
+                      </a:r>
+                    </a:p>
+                  </a:txBody>
+                  <a:tcPr marL="73152" marR="73152">
+                    <a:solidFill>
+                      <a:srgbClr val="FFFFFF"/>
+                    </a:solidFill>
+                  </a:tcPr>
+                </a:tc>
+                <a:tc>
+                  <a:txBody>
+                    <a:bodyPr/>
+                    <a:lstStyle/>
+                    <a:p>
+                      <a:pPr algn="ctr"/>
+                      <a:r>
+                        <a:rPr sz="1200" b="0">
+                          <a:solidFill>
+                            <a:srgbClr val="1F2937"/>
+                          </a:solidFill>
+                        </a:rPr>
+                        <a:t>Nicks, cracks, stains</a:t>
+                      </a:r>
+                    </a:p>
+                  </a:txBody>
+                  <a:tcPr marL="73152" marR="73152">
+                    <a:solidFill>
+                      <a:srgbClr val="FFFFFF"/>
+                    </a:solidFill>
+                  </a:tcPr>
+                </a:tc>
+              </a:tr>
+            </a:tbl>
+          </a:graphicData>
+        </a:graphic>
+      </p:graphicFrame>
       <p:pic>
         <p:nvPicPr>
-          <p:cNvPr id="3" name="Picture 2" descr="f_bar.png"/>
+          <p:cNvPr id="6" name="Picture 5" descr="cad6_blades.png"/>
           <p:cNvPicPr>
             <a:picLocks noChangeAspect="1"/>
           </p:cNvPicPr>
@@ -11099,8 +12127,8 @@
         </p:blipFill>
         <p:spPr>
           <a:xfrm>
-            <a:off x="668818" y="1865376"/>
-            <a:ext cx="4514523" cy="2633472"/>
+            <a:off x="7223760" y="1989957"/>
+            <a:ext cx="4572000" cy="1067573"/>
           </a:xfrm>
           <a:prstGeom prst="rect">
             <a:avLst/>
@@ -11109,14 +12137,14 @@
       </p:pic>
       <p:sp>
         <p:nvSpPr>
-          <p:cNvPr id="4" name="TextBox 3"/>
+          <p:cNvPr id="7" name="TextBox 6"/>
           <p:cNvSpPr txBox="1"/>
           <p:nvPr/>
         </p:nvSpPr>
         <p:spPr>
           <a:xfrm>
-            <a:off x="457200" y="4539996"/>
-            <a:ext cx="4937760" cy="329184"/>
+            <a:off x="7223760" y="3429000"/>
+            <a:ext cx="4572000" cy="2468880"/>
           </a:xfrm>
           <a:prstGeom prst="rect">
             <a:avLst/>
@@ -11124,361 +12152,100 @@
           <a:noFill/>
         </p:spPr>
         <p:txBody>
-          <a:bodyPr wrap="square" anchor="t">
+          <a:bodyPr wrap="square">
             <a:spAutoFit/>
           </a:bodyPr>
           <a:lstStyle/>
           <a:p>
-            <a:pPr algn="ctr">
+            <a:pPr>
               <a:spcAft>
-                <a:spcPts val="200"/>
+                <a:spcPts val="900"/>
               </a:spcAft>
             </a:pPr>
             <a:r>
-              <a:rPr sz="1100" b="0">
-                <a:solidFill>
-                  <a:srgbClr val="5A6577"/>
+              <a:rPr sz="1300">
+                <a:solidFill>
+                  <a:srgbClr val="0047BB"/>
                 </a:solidFill>
               </a:rPr>
-              <a:t>*re-implementations of the CADSplat idea</a:t>
-            </a:r>
-          </a:p>
-        </p:txBody>
-      </p:sp>
-      <p:sp>
-        <p:nvSpPr>
-          <p:cNvPr id="5" name="Rounded Rectangle 4"/>
-          <p:cNvSpPr/>
-          <p:nvPr/>
-        </p:nvSpPr>
-        <p:spPr>
-          <a:xfrm>
-            <a:off x="5669280" y="1865376"/>
-            <a:ext cx="2926080" cy="1110996"/>
-          </a:xfrm>
-          <a:prstGeom prst="roundRect">
-            <a:avLst/>
-          </a:prstGeom>
-          <a:solidFill>
-            <a:srgbClr val="F2F5FA"/>
-          </a:solidFill>
-          <a:ln>
-            <a:noFill/>
-          </a:ln>
-          <a:effectLst/>
-        </p:spPr>
-        <p:style>
-          <a:lnRef idx="1">
-            <a:schemeClr val="accent1"/>
-          </a:lnRef>
-          <a:fillRef idx="3">
-            <a:schemeClr val="accent1"/>
-          </a:fillRef>
-          <a:effectRef idx="2">
-            <a:schemeClr val="accent1"/>
-          </a:effectRef>
-          <a:fontRef idx="minor">
-            <a:schemeClr val="lt1"/>
-          </a:fontRef>
-        </p:style>
-        <p:txBody>
-          <a:bodyPr rtlCol="0" anchor="ctr" wrap="square"/>
-          <a:lstStyle/>
-          <a:p>
-            <a:pPr algn="ctr"/>
-            <a:r>
-              <a:rPr sz="1500" b="1">
-                <a:solidFill>
-                  <a:srgbClr val="0047BB"/>
+              <a:t>▪  </a:t>
+            </a:r>
+            <a:r>
+              <a:rPr sz="1300">
+                <a:solidFill>
+                  <a:srgbClr val="1F2937"/>
                 </a:solidFill>
               </a:rPr>
-              <a:t>100%</a:t>
-            </a:r>
-          </a:p>
-          <a:p>
-            <a:pPr algn="ctr"/>
-            <a:r>
-              <a:rPr sz="1300" b="0">
-                <a:solidFill>
-                  <a:srgbClr val="0047BB"/>
-                </a:solidFill>
-              </a:rPr>
-              <a:t>cracks typed correctly (22/22)</a:t>
-            </a:r>
-          </a:p>
-        </p:txBody>
-      </p:sp>
-      <p:sp>
-        <p:nvSpPr>
-          <p:cNvPr id="6" name="Rounded Rectangle 5"/>
-          <p:cNvSpPr/>
-          <p:nvPr/>
-        </p:nvSpPr>
-        <p:spPr>
-          <a:xfrm>
-            <a:off x="8778240" y="1865376"/>
-            <a:ext cx="2926080" cy="1110996"/>
-          </a:xfrm>
-          <a:prstGeom prst="roundRect">
-            <a:avLst/>
-          </a:prstGeom>
-          <a:solidFill>
-            <a:srgbClr val="F2F5FA"/>
-          </a:solidFill>
-          <a:ln>
-            <a:noFill/>
-          </a:ln>
-          <a:effectLst/>
-        </p:spPr>
-        <p:style>
-          <a:lnRef idx="1">
-            <a:schemeClr val="accent1"/>
-          </a:lnRef>
-          <a:fillRef idx="3">
-            <a:schemeClr val="accent1"/>
-          </a:fillRef>
-          <a:effectRef idx="2">
-            <a:schemeClr val="accent1"/>
-          </a:effectRef>
-          <a:fontRef idx="minor">
-            <a:schemeClr val="lt1"/>
-          </a:fontRef>
-        </p:style>
-        <p:txBody>
-          <a:bodyPr rtlCol="0" anchor="ctr" wrap="square"/>
-          <a:lstStyle/>
-          <a:p>
-            <a:pPr algn="ctr"/>
-            <a:r>
-              <a:rPr sz="1500" b="1">
-                <a:solidFill>
-                  <a:srgbClr val="0047BB"/>
-                </a:solidFill>
-              </a:rPr>
-              <a:t>9 / 15</a:t>
-            </a:r>
-          </a:p>
-          <a:p>
-            <a:pPr algn="ctr"/>
-            <a:r>
-              <a:rPr sz="1300" b="0">
-                <a:solidFill>
-                  <a:srgbClr val="0047BB"/>
-                </a:solidFill>
-              </a:rPr>
-              <a:t>nicks typed correctly; 6 more "uncertain", 6 wrong</a:t>
-            </a:r>
-          </a:p>
-        </p:txBody>
-      </p:sp>
-      <p:sp>
-        <p:nvSpPr>
-          <p:cNvPr id="7" name="Rounded Rectangle 6"/>
-          <p:cNvSpPr/>
-          <p:nvPr/>
-        </p:nvSpPr>
-        <p:spPr>
-          <a:xfrm>
-            <a:off x="5669280" y="3140963"/>
-            <a:ext cx="2926080" cy="1110996"/>
-          </a:xfrm>
-          <a:prstGeom prst="roundRect">
-            <a:avLst/>
-          </a:prstGeom>
-          <a:solidFill>
-            <a:srgbClr val="F2F5FA"/>
-          </a:solidFill>
-          <a:ln>
-            <a:noFill/>
-          </a:ln>
-          <a:effectLst/>
-        </p:spPr>
-        <p:style>
-          <a:lnRef idx="1">
-            <a:schemeClr val="accent1"/>
-          </a:lnRef>
-          <a:fillRef idx="3">
-            <a:schemeClr val="accent1"/>
-          </a:fillRef>
-          <a:effectRef idx="2">
-            <a:schemeClr val="accent1"/>
-          </a:effectRef>
-          <a:fontRef idx="minor">
-            <a:schemeClr val="lt1"/>
-          </a:fontRef>
-        </p:style>
-        <p:txBody>
-          <a:bodyPr rtlCol="0" anchor="ctr" wrap="square"/>
-          <a:lstStyle/>
-          <a:p>
-            <a:pPr algn="ctr"/>
-            <a:r>
-              <a:rPr sz="1500" b="1">
-                <a:solidFill>
-                  <a:srgbClr val="0047BB"/>
-                </a:solidFill>
-              </a:rPr>
-              <a:t>0.7 mm</a:t>
-            </a:r>
-          </a:p>
-          <a:p>
-            <a:pPr algn="ctr"/>
-            <a:r>
-              <a:rPr sz="1300" b="0">
-                <a:solidFill>
-                  <a:srgbClr val="0047BB"/>
-                </a:solidFill>
-              </a:rPr>
-              <a:t>median 3D centre error (sealed test)</a:t>
-            </a:r>
-          </a:p>
-        </p:txBody>
-      </p:sp>
-      <p:sp>
-        <p:nvSpPr>
-          <p:cNvPr id="8" name="Rounded Rectangle 7"/>
-          <p:cNvSpPr/>
-          <p:nvPr/>
-        </p:nvSpPr>
-        <p:spPr>
-          <a:xfrm>
-            <a:off x="8778240" y="3140963"/>
-            <a:ext cx="2926080" cy="1110996"/>
-          </a:xfrm>
-          <a:prstGeom prst="roundRect">
-            <a:avLst/>
-          </a:prstGeom>
-          <a:solidFill>
-            <a:srgbClr val="F2F5FA"/>
-          </a:solidFill>
-          <a:ln>
-            <a:noFill/>
-          </a:ln>
-          <a:effectLst/>
-        </p:spPr>
-        <p:style>
-          <a:lnRef idx="1">
-            <a:schemeClr val="accent1"/>
-          </a:lnRef>
-          <a:fillRef idx="3">
-            <a:schemeClr val="accent1"/>
-          </a:fillRef>
-          <a:effectRef idx="2">
-            <a:schemeClr val="accent1"/>
-          </a:effectRef>
-          <a:fontRef idx="minor">
-            <a:schemeClr val="lt1"/>
-          </a:fontRef>
-        </p:style>
-        <p:txBody>
-          <a:bodyPr rtlCol="0" anchor="ctr" wrap="square"/>
-          <a:lstStyle/>
-          <a:p>
-            <a:pPr algn="ctr"/>
-            <a:r>
-              <a:rPr sz="1500" b="1">
-                <a:solidFill>
-                  <a:srgbClr val="0047BB"/>
-                </a:solidFill>
-              </a:rPr>
-              <a:t>12 / 13</a:t>
-            </a:r>
-          </a:p>
-          <a:p>
-            <a:pPr algn="ctr"/>
-            <a:r>
-              <a:rPr sz="1300" b="0">
-                <a:solidFill>
-                  <a:srgbClr val="0047BB"/>
-                </a:solidFill>
-              </a:rPr>
-              <a:t>dents deeper than 0.2 mm found</a:t>
-            </a:r>
-          </a:p>
-        </p:txBody>
-      </p:sp>
-      <p:pic>
-        <p:nvPicPr>
-          <p:cNvPr id="9" name="Picture 8" descr="cad6dmg2_1004_11.jpg"/>
-          <p:cNvPicPr>
-            <a:picLocks noChangeAspect="1"/>
-          </p:cNvPicPr>
-          <p:nvPr/>
-        </p:nvPicPr>
-        <p:blipFill>
-          <a:blip r:embed="rId3"/>
-          <a:stretch>
-            <a:fillRect/>
-          </a:stretch>
-        </p:blipFill>
-        <p:spPr>
-          <a:xfrm>
-            <a:off x="5702998" y="4539996"/>
-            <a:ext cx="2904363" cy="905256"/>
-          </a:xfrm>
-          <a:prstGeom prst="rect">
-            <a:avLst/>
-          </a:prstGeom>
-        </p:spPr>
-      </p:pic>
-      <p:pic>
-        <p:nvPicPr>
-          <p:cNvPr id="10" name="Picture 9" descr="cad6dmg2_1003_02.jpg"/>
-          <p:cNvPicPr>
-            <a:picLocks noChangeAspect="1"/>
-          </p:cNvPicPr>
-          <p:nvPr/>
-        </p:nvPicPr>
-        <p:blipFill>
-          <a:blip r:embed="rId4"/>
-          <a:stretch>
-            <a:fillRect/>
-          </a:stretch>
-        </p:blipFill>
-        <p:spPr>
-          <a:xfrm>
-            <a:off x="8810701" y="4539996"/>
-            <a:ext cx="2906877" cy="905256"/>
-          </a:xfrm>
-          <a:prstGeom prst="rect">
-            <a:avLst/>
-          </a:prstGeom>
-        </p:spPr>
-      </p:pic>
-      <p:sp>
-        <p:nvSpPr>
-          <p:cNvPr id="11" name="TextBox 10"/>
-          <p:cNvSpPr txBox="1"/>
-          <p:nvPr/>
-        </p:nvSpPr>
-        <p:spPr>
-          <a:xfrm>
-            <a:off x="5669280" y="5527548"/>
-            <a:ext cx="6126480" cy="493776"/>
-          </a:xfrm>
-          <a:prstGeom prst="rect">
-            <a:avLst/>
-          </a:prstGeom>
-          <a:noFill/>
-        </p:spPr>
-        <p:txBody>
-          <a:bodyPr wrap="square" anchor="t">
-            <a:spAutoFit/>
-          </a:bodyPr>
-          <a:lstStyle/>
-          <a:p>
-            <a:pPr algn="ctr">
+              <a:t>Blender (Cycles) renders; damage applied to the mesh</a:t>
+            </a:r>
+          </a:p>
+          <a:p>
+            <a:pPr>
               <a:spcAft>
-                <a:spcPts val="200"/>
+                <a:spcPts val="900"/>
               </a:spcAft>
             </a:pPr>
             <a:r>
-              <a:rPr sz="1100" b="0">
-                <a:solidFill>
-                  <a:srgbClr val="5A6577"/>
+              <a:rPr sz="1300">
+                <a:solidFill>
+                  <a:srgbClr val="0047BB"/>
                 </a:solidFill>
               </a:rPr>
-              <a:t>Real outputs: crack and nick, found and typed (orange = truth, blue = found)</a:t>
+              <a:t>▪  </a:t>
+            </a:r>
+            <a:r>
+              <a:rPr sz="1300">
+                <a:solidFill>
+                  <a:srgbClr val="1F2937"/>
+                </a:solidFill>
+              </a:rPr>
+              <a:t>Controlled camera error (≤1.5°) and lighting change (±15%)</a:t>
+            </a:r>
+          </a:p>
+          <a:p>
+            <a:pPr>
+              <a:spcAft>
+                <a:spcPts val="900"/>
+              </a:spcAft>
+            </a:pPr>
+            <a:r>
+              <a:rPr sz="1300">
+                <a:solidFill>
+                  <a:srgbClr val="0047BB"/>
+                </a:solidFill>
+              </a:rPr>
+              <a:t>▪  </a:t>
+            </a:r>
+            <a:r>
+              <a:rPr sz="1300">
+                <a:solidFill>
+                  <a:srgbClr val="1F2937"/>
+                </a:solidFill>
+              </a:rPr>
+              <a:t>Damage families differ from the estimator’s model</a:t>
+            </a:r>
+          </a:p>
+          <a:p>
+            <a:pPr>
+              <a:spcAft>
+                <a:spcPts val="900"/>
+              </a:spcAft>
+            </a:pPr>
+            <a:r>
+              <a:rPr sz="1300">
+                <a:solidFill>
+                  <a:srgbClr val="0047BB"/>
+                </a:solidFill>
+              </a:rPr>
+              <a:t>▪  </a:t>
+            </a:r>
+            <a:r>
+              <a:rPr sz="1300">
+                <a:solidFill>
+                  <a:srgbClr val="1F2937"/>
+                </a:solidFill>
+              </a:rPr>
+              <a:t>Test splits sealed until the method was frozen</a:t>
             </a:r>
           </a:p>
         </p:txBody>
@@ -11517,8 +12284,8 @@
           <a:lstStyle/>
           <a:p>
             <a:r>
-              <a:rPr sz="2400"/>
-              <a:t>Generalization to New Blade Designs (v1.1)</a:t>
+              <a:rPr sz="2100" b="1"/>
+              <a:t>At equal false-alarm rates, the method locates 2.7–6× more dents</a:t>
             </a:r>
           </a:p>
         </p:txBody>
@@ -11531,8 +12298,8 @@
         </p:nvSpPr>
         <p:spPr>
           <a:xfrm>
-            <a:off x="548640" y="1783080"/>
-            <a:ext cx="5486400" cy="329184"/>
+            <a:off x="11155680" y="6446520"/>
+            <a:ext cx="822960" cy="320040"/>
           </a:xfrm>
           <a:prstGeom prst="rect">
             <a:avLst/>
@@ -11540,23 +12307,19 @@
           <a:noFill/>
         </p:spPr>
         <p:txBody>
-          <a:bodyPr wrap="square" anchor="t">
+          <a:bodyPr wrap="none">
             <a:spAutoFit/>
           </a:bodyPr>
           <a:lstStyle/>
           <a:p>
-            <a:pPr algn="l">
-              <a:spcAft>
-                <a:spcPts val="200"/>
-              </a:spcAft>
-            </a:pPr>
-            <a:r>
-              <a:rPr sz="1500" b="1">
-                <a:solidFill>
-                  <a:srgbClr val="C62828"/>
+            <a:pPr algn="r"/>
+            <a:r>
+              <a:rPr sz="1100">
+                <a:solidFill>
+                  <a:srgbClr val="5A6577"/>
                 </a:solidFill>
               </a:rPr>
-              <a:t>Frozen v1</a:t>
+              <a:t>8</a:t>
             </a:r>
           </a:p>
         </p:txBody>
@@ -11569,8 +12332,8 @@
         </p:nvSpPr>
         <p:spPr>
           <a:xfrm>
-            <a:off x="6309360" y="1783080"/>
-            <a:ext cx="5486400" cy="329184"/>
+            <a:off x="502920" y="6446520"/>
+            <a:ext cx="5486400" cy="320040"/>
           </a:xfrm>
           <a:prstGeom prst="rect">
             <a:avLst/>
@@ -11578,30 +12341,25 @@
           <a:noFill/>
         </p:spPr>
         <p:txBody>
-          <a:bodyPr wrap="square" anchor="t">
+          <a:bodyPr wrap="none">
             <a:spAutoFit/>
           </a:bodyPr>
           <a:lstStyle/>
           <a:p>
-            <a:pPr algn="l">
-              <a:spcAft>
-                <a:spcPts val="200"/>
-              </a:spcAft>
-            </a:pPr>
-            <a:r>
-              <a:rPr sz="1500" b="1">
-                <a:solidFill>
-                  <a:srgbClr val="1A7F37"/>
+            <a:r>
+              <a:rPr sz="1000" b="1">
+                <a:solidFill>
+                  <a:srgbClr val="0047BB"/>
                 </a:solidFill>
               </a:rPr>
-              <a:t>v1.1 (fixed)</a:t>
+              <a:t>RESULTS</a:t>
             </a:r>
           </a:p>
         </p:txBody>
       </p:sp>
       <p:pic>
         <p:nvPicPr>
-          <p:cNvPr id="5" name="Picture 4" descr="fix_before.jpg"/>
+          <p:cNvPr id="5" name="Picture 4" descr="g_matched.png"/>
           <p:cNvPicPr>
             <a:picLocks noChangeAspect="1"/>
           </p:cNvPicPr>
@@ -11615,38 +12373,381 @@
         </p:blipFill>
         <p:spPr>
           <a:xfrm>
-            <a:off x="1177747" y="2153412"/>
-            <a:ext cx="4228185" cy="1316736"/>
+            <a:off x="501697" y="1783080"/>
+            <a:ext cx="5946044" cy="3785615"/>
           </a:xfrm>
           <a:prstGeom prst="rect">
             <a:avLst/>
           </a:prstGeom>
         </p:spPr>
       </p:pic>
-      <p:pic>
-        <p:nvPicPr>
-          <p:cNvPr id="6" name="Picture 5" descr="fix_after.jpg"/>
-          <p:cNvPicPr>
-            <a:picLocks noChangeAspect="1"/>
-          </p:cNvPicPr>
+      <p:graphicFrame>
+        <p:nvGraphicFramePr>
+          <p:cNvPr id="6" name="Table 5"/>
+          <p:cNvGraphicFramePr>
+            <a:graphicFrameLocks noGrp="1"/>
+          </p:cNvGraphicFramePr>
           <p:nvPr/>
-        </p:nvPicPr>
-        <p:blipFill>
-          <a:blip r:embed="rId3"/>
-          <a:stretch>
-            <a:fillRect/>
-          </a:stretch>
-        </p:blipFill>
-        <p:spPr>
-          <a:xfrm>
-            <a:off x="6938467" y="2153412"/>
-            <a:ext cx="4228185" cy="1316736"/>
-          </a:xfrm>
-          <a:prstGeom prst="rect">
-            <a:avLst/>
-          </a:prstGeom>
-        </p:spPr>
-      </p:pic>
+        </p:nvGraphicFramePr>
+        <p:xfrm>
+          <a:off x="6766560" y="1947672"/>
+          <a:ext cx="5029200" cy="2286000"/>
+        </p:xfrm>
+        <a:graphic>
+          <a:graphicData uri="http://schemas.openxmlformats.org/drawingml/2006/table">
+            <a:tbl>
+              <a:tblPr firstRow="1" bandRow="1">
+                <a:tableStyleId>{5C22544A-7EE6-4342-B048-85BDC9FD1C3A}</a:tableStyleId>
+              </a:tblPr>
+              <a:tblGrid>
+                <a:gridCol w="2377440"/>
+                <a:gridCol w="1188720"/>
+                <a:gridCol w="1463040"/>
+              </a:tblGrid>
+              <a:tr h="457200">
+                <a:tc>
+                  <a:txBody>
+                    <a:bodyPr/>
+                    <a:lstStyle/>
+                    <a:p>
+                      <a:pPr algn="l"/>
+                      <a:r>
+                        <a:rPr sz="1300" b="1">
+                          <a:solidFill>
+                            <a:srgbClr val="FFFFFF"/>
+                          </a:solidFill>
+                        </a:rPr>
+                        <a:t>Method</a:t>
+                      </a:r>
+                    </a:p>
+                  </a:txBody>
+                  <a:tcPr marL="73152" marR="73152">
+                    <a:solidFill>
+                      <a:srgbClr val="0047BB"/>
+                    </a:solidFill>
+                  </a:tcPr>
+                </a:tc>
+                <a:tc>
+                  <a:txBody>
+                    <a:bodyPr/>
+                    <a:lstStyle/>
+                    <a:p>
+                      <a:pPr algn="ctr"/>
+                      <a:r>
+                        <a:rPr sz="1300" b="1">
+                          <a:solidFill>
+                            <a:srgbClr val="FFFFFF"/>
+                          </a:solidFill>
+                        </a:rPr>
+                        <a:t>AUROC</a:t>
+                      </a:r>
+                    </a:p>
+                  </a:txBody>
+                  <a:tcPr marL="73152" marR="73152">
+                    <a:solidFill>
+                      <a:srgbClr val="0047BB"/>
+                    </a:solidFill>
+                  </a:tcPr>
+                </a:tc>
+                <a:tc>
+                  <a:txBody>
+                    <a:bodyPr/>
+                    <a:lstStyle/>
+                    <a:p>
+                      <a:pPr algn="ctr"/>
+                      <a:r>
+                        <a:rPr sz="1300" b="1">
+                          <a:solidFill>
+                            <a:srgbClr val="FFFFFF"/>
+                          </a:solidFill>
+                        </a:rPr>
+                        <a:t>Located @5%</a:t>
+                      </a:r>
+                    </a:p>
+                  </a:txBody>
+                  <a:tcPr marL="73152" marR="73152">
+                    <a:solidFill>
+                      <a:srgbClr val="0047BB"/>
+                    </a:solidFill>
+                  </a:tcPr>
+                </a:tc>
+              </a:tr>
+              <a:tr h="457200">
+                <a:tc>
+                  <a:txBody>
+                    <a:bodyPr/>
+                    <a:lstStyle/>
+                    <a:p>
+                      <a:pPr algn="l"/>
+                      <a:r>
+                        <a:rPr sz="1300" b="1">
+                          <a:solidFill>
+                            <a:srgbClr val="0047BB"/>
+                          </a:solidFill>
+                        </a:rPr>
+                        <a:t>Ours</a:t>
+                      </a:r>
+                    </a:p>
+                  </a:txBody>
+                  <a:tcPr marL="73152" marR="73152">
+                    <a:solidFill>
+                      <a:srgbClr val="E3ECFA"/>
+                    </a:solidFill>
+                  </a:tcPr>
+                </a:tc>
+                <a:tc>
+                  <a:txBody>
+                    <a:bodyPr/>
+                    <a:lstStyle/>
+                    <a:p>
+                      <a:pPr algn="ctr"/>
+                      <a:r>
+                        <a:rPr sz="1300" b="1">
+                          <a:solidFill>
+                            <a:srgbClr val="0047BB"/>
+                          </a:solidFill>
+                        </a:rPr>
+                        <a:t>0.82</a:t>
+                      </a:r>
+                    </a:p>
+                  </a:txBody>
+                  <a:tcPr marL="73152" marR="73152">
+                    <a:solidFill>
+                      <a:srgbClr val="E3ECFA"/>
+                    </a:solidFill>
+                  </a:tcPr>
+                </a:tc>
+                <a:tc>
+                  <a:txBody>
+                    <a:bodyPr/>
+                    <a:lstStyle/>
+                    <a:p>
+                      <a:pPr algn="ctr"/>
+                      <a:r>
+                        <a:rPr sz="1300" b="1">
+                          <a:solidFill>
+                            <a:srgbClr val="0047BB"/>
+                          </a:solidFill>
+                        </a:rPr>
+                        <a:t>51%</a:t>
+                      </a:r>
+                    </a:p>
+                  </a:txBody>
+                  <a:tcPr marL="73152" marR="73152">
+                    <a:solidFill>
+                      <a:srgbClr val="E3ECFA"/>
+                    </a:solidFill>
+                  </a:tcPr>
+                </a:tc>
+              </a:tr>
+              <a:tr h="457200">
+                <a:tc>
+                  <a:txBody>
+                    <a:bodyPr/>
+                    <a:lstStyle/>
+                    <a:p>
+                      <a:pPr algn="l"/>
+                      <a:r>
+                        <a:rPr sz="1300" b="0">
+                          <a:solidFill>
+                            <a:srgbClr val="1F2937"/>
+                          </a:solidFill>
+                        </a:rPr>
+                        <a:t>Free-form field*</a:t>
+                      </a:r>
+                    </a:p>
+                  </a:txBody>
+                  <a:tcPr marL="73152" marR="73152">
+                    <a:solidFill>
+                      <a:srgbClr val="F2F5FA"/>
+                    </a:solidFill>
+                  </a:tcPr>
+                </a:tc>
+                <a:tc>
+                  <a:txBody>
+                    <a:bodyPr/>
+                    <a:lstStyle/>
+                    <a:p>
+                      <a:pPr algn="ctr"/>
+                      <a:r>
+                        <a:rPr sz="1300" b="0">
+                          <a:solidFill>
+                            <a:srgbClr val="1F2937"/>
+                          </a:solidFill>
+                        </a:rPr>
+                        <a:t>0.63</a:t>
+                      </a:r>
+                    </a:p>
+                  </a:txBody>
+                  <a:tcPr marL="73152" marR="73152">
+                    <a:solidFill>
+                      <a:srgbClr val="F2F5FA"/>
+                    </a:solidFill>
+                  </a:tcPr>
+                </a:tc>
+                <a:tc>
+                  <a:txBody>
+                    <a:bodyPr/>
+                    <a:lstStyle/>
+                    <a:p>
+                      <a:pPr algn="ctr"/>
+                      <a:r>
+                        <a:rPr sz="1300" b="0">
+                          <a:solidFill>
+                            <a:srgbClr val="1F2937"/>
+                          </a:solidFill>
+                        </a:rPr>
+                        <a:t>19%</a:t>
+                      </a:r>
+                    </a:p>
+                  </a:txBody>
+                  <a:tcPr marL="73152" marR="73152">
+                    <a:solidFill>
+                      <a:srgbClr val="F2F5FA"/>
+                    </a:solidFill>
+                  </a:tcPr>
+                </a:tc>
+              </a:tr>
+              <a:tr h="457200">
+                <a:tc>
+                  <a:txBody>
+                    <a:bodyPr/>
+                    <a:lstStyle/>
+                    <a:p>
+                      <a:pPr algn="l"/>
+                      <a:r>
+                        <a:rPr sz="1300" b="0">
+                          <a:solidFill>
+                            <a:srgbClr val="1F2937"/>
+                          </a:solidFill>
+                        </a:rPr>
+                        <a:t>2D detector (lifted)</a:t>
+                      </a:r>
+                    </a:p>
+                  </a:txBody>
+                  <a:tcPr marL="73152" marR="73152">
+                    <a:solidFill>
+                      <a:srgbClr val="FFFFFF"/>
+                    </a:solidFill>
+                  </a:tcPr>
+                </a:tc>
+                <a:tc>
+                  <a:txBody>
+                    <a:bodyPr/>
+                    <a:lstStyle/>
+                    <a:p>
+                      <a:pPr algn="ctr"/>
+                      <a:r>
+                        <a:rPr sz="1300" b="0">
+                          <a:solidFill>
+                            <a:srgbClr val="1F2937"/>
+                          </a:solidFill>
+                        </a:rPr>
+                        <a:t>0.72</a:t>
+                      </a:r>
+                    </a:p>
+                  </a:txBody>
+                  <a:tcPr marL="73152" marR="73152">
+                    <a:solidFill>
+                      <a:srgbClr val="FFFFFF"/>
+                    </a:solidFill>
+                  </a:tcPr>
+                </a:tc>
+                <a:tc>
+                  <a:txBody>
+                    <a:bodyPr/>
+                    <a:lstStyle/>
+                    <a:p>
+                      <a:pPr algn="ctr"/>
+                      <a:r>
+                        <a:rPr sz="1300" b="0">
+                          <a:solidFill>
+                            <a:srgbClr val="1F2937"/>
+                          </a:solidFill>
+                        </a:rPr>
+                        <a:t>16%</a:t>
+                      </a:r>
+                    </a:p>
+                  </a:txBody>
+                  <a:tcPr marL="73152" marR="73152">
+                    <a:solidFill>
+                      <a:srgbClr val="FFFFFF"/>
+                    </a:solidFill>
+                  </a:tcPr>
+                </a:tc>
+              </a:tr>
+              <a:tr h="457200">
+                <a:tc>
+                  <a:txBody>
+                    <a:bodyPr/>
+                    <a:lstStyle/>
+                    <a:p>
+                      <a:pPr algn="l"/>
+                      <a:r>
+                        <a:rPr sz="1300" b="0">
+                          <a:solidFill>
+                            <a:srgbClr val="1F2937"/>
+                          </a:solidFill>
+                        </a:rPr>
+                        <a:t>MLP field*</a:t>
+                      </a:r>
+                    </a:p>
+                  </a:txBody>
+                  <a:tcPr marL="73152" marR="73152">
+                    <a:solidFill>
+                      <a:srgbClr val="F2F5FA"/>
+                    </a:solidFill>
+                  </a:tcPr>
+                </a:tc>
+                <a:tc>
+                  <a:txBody>
+                    <a:bodyPr/>
+                    <a:lstStyle/>
+                    <a:p>
+                      <a:pPr algn="ctr"/>
+                      <a:r>
+                        <a:rPr sz="1300" b="0">
+                          <a:solidFill>
+                            <a:srgbClr val="1F2937"/>
+                          </a:solidFill>
+                        </a:rPr>
+                        <a:t>0.74</a:t>
+                      </a:r>
+                    </a:p>
+                  </a:txBody>
+                  <a:tcPr marL="73152" marR="73152">
+                    <a:solidFill>
+                      <a:srgbClr val="F2F5FA"/>
+                    </a:solidFill>
+                  </a:tcPr>
+                </a:tc>
+                <a:tc>
+                  <a:txBody>
+                    <a:bodyPr/>
+                    <a:lstStyle/>
+                    <a:p>
+                      <a:pPr algn="ctr"/>
+                      <a:r>
+                        <a:rPr sz="1300" b="0">
+                          <a:solidFill>
+                            <a:srgbClr val="1F2937"/>
+                          </a:solidFill>
+                        </a:rPr>
+                        <a:t>8%</a:t>
+                      </a:r>
+                    </a:p>
+                  </a:txBody>
+                  <a:tcPr marL="73152" marR="73152">
+                    <a:solidFill>
+                      <a:srgbClr val="F2F5FA"/>
+                    </a:solidFill>
+                  </a:tcPr>
+                </a:tc>
+              </a:tr>
+            </a:tbl>
+          </a:graphicData>
+        </a:graphic>
+      </p:graphicFrame>
       <p:sp>
         <p:nvSpPr>
           <p:cNvPr id="7" name="TextBox 6"/>
@@ -11655,8 +12756,8 @@
         </p:nvSpPr>
         <p:spPr>
           <a:xfrm>
-            <a:off x="548640" y="3675888"/>
-            <a:ext cx="11155680" cy="1645920"/>
+            <a:off x="6766560" y="4293108"/>
+            <a:ext cx="5029200" cy="1645920"/>
           </a:xfrm>
           <a:prstGeom prst="rect">
             <a:avLst/>
@@ -11664,81 +12765,91 @@
           <a:noFill/>
         </p:spPr>
         <p:txBody>
-          <a:bodyPr wrap="square" anchor="t">
+          <a:bodyPr wrap="square">
             <a:spAutoFit/>
           </a:bodyPr>
           <a:lstStyle/>
           <a:p>
-            <a:pPr algn="l">
+            <a:pPr>
               <a:spcAft>
-                <a:spcPts val="800"/>
+                <a:spcPts val="900"/>
               </a:spcAft>
             </a:pPr>
             <a:r>
-              <a:rPr sz="1500" b="0">
+              <a:rPr sz="1300">
+                <a:solidFill>
+                  <a:srgbClr val="0047BB"/>
+                </a:solidFill>
+              </a:rPr>
+              <a:t>▪  </a:t>
+            </a:r>
+            <a:r>
+              <a:rPr sz="1300">
                 <a:solidFill>
                   <a:srgbClr val="1F2937"/>
                 </a:solidFill>
               </a:rPr>
-              <a:t>•  Two causes found: a silhouette pose bias, and a reference (brightness) correction that did not move with the camera</a:t>
-            </a:r>
-          </a:p>
-          <a:p>
-            <a:pPr algn="l">
+              <a:t>Second sealed test reproduces it (46% located, AUROC 0.79)</a:t>
+            </a:r>
+          </a:p>
+          <a:p>
+            <a:pPr>
               <a:spcAft>
-                <a:spcPts val="800"/>
+                <a:spcPts val="900"/>
               </a:spcAft>
             </a:pPr>
             <a:r>
-              <a:rPr sz="1500" b="0">
+              <a:rPr sz="1300">
+                <a:solidFill>
+                  <a:srgbClr val="0047BB"/>
+                </a:solidFill>
+              </a:rPr>
+              <a:t>▪  </a:t>
+            </a:r>
+            <a:r>
+              <a:rPr sz="1300">
                 <a:solidFill>
                   <a:srgbClr val="1F2937"/>
                 </a:solidFill>
               </a:rPr>
-              <a:t>•  Fix: correct the silhouette bias and re-project the healthy reference with the fitted pose; no retraining</a:t>
-            </a:r>
-          </a:p>
-          <a:p>
-            <a:pPr algn="l">
-              <a:spcAft>
-                <a:spcPts val="800"/>
-              </a:spcAft>
-            </a:pPr>
-            <a:r>
-              <a:rPr sz="1500" b="0">
-                <a:solidFill>
-                  <a:srgbClr val="1F2937"/>
-                </a:solidFill>
-              </a:rPr>
-              <a:t>•  Held-out blades 3–6: false alarms 51% → 4%, AUROC 0.72 → 0.95, hidden dents declined 50% → 98%</a:t>
-            </a:r>
-          </a:p>
-        </p:txBody>
-      </p:sp>
-      <p:pic>
-        <p:nvPicPr>
-          <p:cNvPr id="8" name="Picture 7" descr="cad6_blades.png"/>
-          <p:cNvPicPr>
-            <a:picLocks noChangeAspect="1"/>
-          </p:cNvPicPr>
+              <a:t>12 of 13 visible dents deeper than 0.2 mm found; median centre error 0.7 mm</a:t>
+            </a:r>
+          </a:p>
+        </p:txBody>
+      </p:sp>
+      <p:sp>
+        <p:nvSpPr>
+          <p:cNvPr id="8" name="TextBox 7"/>
+          <p:cNvSpPr txBox="1"/>
           <p:nvPr/>
-        </p:nvPicPr>
-        <p:blipFill>
-          <a:blip r:embed="rId4"/>
-          <a:stretch>
-            <a:fillRect/>
-          </a:stretch>
-        </p:blipFill>
-        <p:spPr>
-          <a:xfrm>
-            <a:off x="3613669" y="5239512"/>
-            <a:ext cx="4934181" cy="1152144"/>
+        </p:nvSpPr>
+        <p:spPr>
+          <a:xfrm>
+            <a:off x="502920" y="6053328"/>
+            <a:ext cx="10515600" cy="365760"/>
           </a:xfrm>
           <a:prstGeom prst="rect">
             <a:avLst/>
           </a:prstGeom>
-        </p:spPr>
-      </p:pic>
+          <a:noFill/>
+        </p:spPr>
+        <p:txBody>
+          <a:bodyPr wrap="square">
+            <a:spAutoFit/>
+          </a:bodyPr>
+          <a:lstStyle/>
+          <a:p>
+            <a:r>
+              <a:rPr sz="1000" i="1">
+                <a:solidFill>
+                  <a:srgbClr val="5A6577"/>
+                </a:solidFill>
+              </a:rPr>
+              <a:t>Sealed test, 240 cases, 30 unseen Rotor37 blades; 90 negatives, 37 visible dents. *Re-implementations of the CADSplat idea.</a:t>
+            </a:r>
+          </a:p>
+        </p:txBody>
+      </p:sp>
     </p:spTree>
   </p:cSld>
   <p:clrMapOvr>
@@ -11773,8 +12884,8 @@
           <a:lstStyle/>
           <a:p>
             <a:r>
-              <a:rPr sz="3000"/>
-              <a:t>Baselines and Expert Feedback</a:t>
+              <a:rPr sz="2100" b="1"/>
+              <a:t>Misses concentrate below 0.2 mm, where the image signal is weakest</a:t>
             </a:r>
           </a:p>
         </p:txBody>
@@ -11787,8 +12898,8 @@
         </p:nvSpPr>
         <p:spPr>
           <a:xfrm>
-            <a:off x="548640" y="1865376"/>
-            <a:ext cx="5669280" cy="3950208"/>
+            <a:off x="11155680" y="6446520"/>
+            <a:ext cx="822960" cy="320040"/>
           </a:xfrm>
           <a:prstGeom prst="rect">
             <a:avLst/>
@@ -11796,209 +12907,192 @@
           <a:noFill/>
         </p:spPr>
         <p:txBody>
-          <a:bodyPr wrap="square" anchor="t">
+          <a:bodyPr wrap="none">
             <a:spAutoFit/>
           </a:bodyPr>
           <a:lstStyle/>
           <a:p>
-            <a:pPr algn="l">
+            <a:pPr algn="r"/>
+            <a:r>
+              <a:rPr sz="1100">
+                <a:solidFill>
+                  <a:srgbClr val="5A6577"/>
+                </a:solidFill>
+              </a:rPr>
+              <a:t>9</a:t>
+            </a:r>
+          </a:p>
+        </p:txBody>
+      </p:sp>
+      <p:sp>
+        <p:nvSpPr>
+          <p:cNvPr id="4" name="TextBox 3"/>
+          <p:cNvSpPr txBox="1"/>
+          <p:nvPr/>
+        </p:nvSpPr>
+        <p:spPr>
+          <a:xfrm>
+            <a:off x="502920" y="6446520"/>
+            <a:ext cx="5486400" cy="320040"/>
+          </a:xfrm>
+          <a:prstGeom prst="rect">
+            <a:avLst/>
+          </a:prstGeom>
+          <a:noFill/>
+        </p:spPr>
+        <p:txBody>
+          <a:bodyPr wrap="none">
+            <a:spAutoFit/>
+          </a:bodyPr>
+          <a:lstStyle/>
+          <a:p>
+            <a:r>
+              <a:rPr sz="1000" b="1">
+                <a:solidFill>
+                  <a:srgbClr val="0047BB"/>
+                </a:solidFill>
+              </a:rPr>
+              <a:t>RESULTS</a:t>
+            </a:r>
+          </a:p>
+        </p:txBody>
+      </p:sp>
+      <p:pic>
+        <p:nvPicPr>
+          <p:cNvPr id="5" name="Picture 4" descr="g_depth.png"/>
+          <p:cNvPicPr>
+            <a:picLocks noChangeAspect="1"/>
+          </p:cNvPicPr>
+          <p:nvPr/>
+        </p:nvPicPr>
+        <p:blipFill>
+          <a:blip r:embed="rId2"/>
+          <a:stretch>
+            <a:fillRect/>
+          </a:stretch>
+        </p:blipFill>
+        <p:spPr>
+          <a:xfrm>
+            <a:off x="743344" y="1824228"/>
+            <a:ext cx="4914111" cy="3291840"/>
+          </a:xfrm>
+          <a:prstGeom prst="rect">
+            <a:avLst/>
+          </a:prstGeom>
+        </p:spPr>
+      </p:pic>
+      <p:sp>
+        <p:nvSpPr>
+          <p:cNvPr id="6" name="TextBox 5"/>
+          <p:cNvSpPr txBox="1"/>
+          <p:nvPr/>
+        </p:nvSpPr>
+        <p:spPr>
+          <a:xfrm>
+            <a:off x="6309360" y="1947672"/>
+            <a:ext cx="5486400" cy="3785615"/>
+          </a:xfrm>
+          <a:prstGeom prst="rect">
+            <a:avLst/>
+          </a:prstGeom>
+          <a:noFill/>
+        </p:spPr>
+        <p:txBody>
+          <a:bodyPr wrap="square">
+            <a:spAutoFit/>
+          </a:bodyPr>
+          <a:lstStyle/>
+          <a:p>
+            <a:pPr>
               <a:spcAft>
-                <a:spcPts val="800"/>
+                <a:spcPts val="900"/>
               </a:spcAft>
             </a:pPr>
             <a:r>
-              <a:rPr sz="1500" b="0">
+              <a:rPr sz="1400">
+                <a:solidFill>
+                  <a:srgbClr val="0047BB"/>
+                </a:solidFill>
+              </a:rPr>
+              <a:t>▪  </a:t>
+            </a:r>
+            <a:r>
+              <a:rPr sz="1400" b="1">
                 <a:solidFill>
                   <a:srgbClr val="1F2937"/>
                 </a:solidFill>
               </a:rPr>
-              <a:t>•  2D U-Net detector, lifted to 3D</a:t>
-            </a:r>
-          </a:p>
-          <a:p>
-            <a:pPr algn="l">
+              <a:t>Detectability is predictable.  </a:t>
+            </a:r>
+            <a:r>
+              <a:rPr sz="1400">
+                <a:solidFill>
+                  <a:srgbClr val="1F2937"/>
+                </a:solidFill>
+              </a:rPr>
+              <a:t>The profiled information of a dent predicts found vs missed with AUROC 0.90 / 0.95 on the two sealed tests.</a:t>
+            </a:r>
+          </a:p>
+          <a:p>
+            <a:pPr>
               <a:spcAft>
-                <a:spcPts val="800"/>
+                <a:spcPts val="900"/>
               </a:spcAft>
             </a:pPr>
             <a:r>
-              <a:rPr sz="1500" b="0">
+              <a:rPr sz="1400">
+                <a:solidFill>
+                  <a:srgbClr val="0047BB"/>
+                </a:solidFill>
+              </a:rPr>
+              <a:t>▪  </a:t>
+            </a:r>
+            <a:r>
+              <a:rPr sz="1400" b="1">
                 <a:solidFill>
                   <a:srgbClr val="1F2937"/>
                 </a:solidFill>
               </a:rPr>
-              <a:t>•  SIFT change detector (16–47% of defects; no location)</a:t>
-            </a:r>
-          </a:p>
-          <a:p>
-            <a:pPr algn="l">
+              <a:t>Safety-weighted recall.  </a:t>
+            </a:r>
+            <a:r>
+              <a:rPr sz="1400">
+                <a:solidFill>
+                  <a:srgbClr val="1F2937"/>
+                </a:solidFill>
+              </a:rPr>
+              <a:t>Weighting misses by depth: 73%; critical defects (&gt; 0.2 mm): 92%.</a:t>
+            </a:r>
+          </a:p>
+          <a:p>
+            <a:pPr>
               <a:spcAft>
-                <a:spcPts val="800"/>
+                <a:spcPts val="900"/>
               </a:spcAft>
             </a:pPr>
             <a:r>
-              <a:rPr sz="1500" b="0">
+              <a:rPr sz="1400">
+                <a:solidFill>
+                  <a:srgbClr val="0047BB"/>
+                </a:solidFill>
+              </a:rPr>
+              <a:t>▪  </a:t>
+            </a:r>
+            <a:r>
+              <a:rPr sz="1400" b="1">
                 <a:solidFill>
                   <a:srgbClr val="1F2937"/>
                 </a:solidFill>
               </a:rPr>
-              <a:t>•  Free-form and MLP deformation fields (CADSplat-style re-implementations)</a:t>
-            </a:r>
-          </a:p>
-          <a:p>
-            <a:pPr algn="l">
-              <a:spcAft>
-                <a:spcPts val="800"/>
-              </a:spcAft>
-            </a:pPr>
-            <a:r>
-              <a:rPr sz="1500" b="0">
+              <a:t>Per-point maps are optimistic.  </a:t>
+            </a:r>
+            <a:r>
+              <a:rPr sz="1400">
                 <a:solidFill>
                   <a:srgbClr val="1F2937"/>
                 </a:solidFill>
               </a:rPr>
-              <a:t>•  Textbook χ² and a-contrario thresholds</a:t>
-            </a:r>
-          </a:p>
-          <a:p>
-            <a:pPr algn="l">
-              <a:spcAft>
-                <a:spcPts val="800"/>
-              </a:spcAft>
-            </a:pPr>
-            <a:r>
-              <a:rPr sz="1500" b="0">
-                <a:solidFill>
-                  <a:srgbClr val="1F2937"/>
-                </a:solidFill>
-              </a:rPr>
-              <a:t>•  All calibrated the same way; ours locates ≥2× more dents at equal false alarms</a:t>
-            </a:r>
-          </a:p>
-        </p:txBody>
-      </p:sp>
-      <p:sp>
-        <p:nvSpPr>
-          <p:cNvPr id="4" name="Rounded Rectangle 3"/>
-          <p:cNvSpPr/>
-          <p:nvPr/>
-        </p:nvSpPr>
-        <p:spPr>
-          <a:xfrm>
-            <a:off x="6492240" y="1865376"/>
-            <a:ext cx="5303520" cy="1728216"/>
-          </a:xfrm>
-          <a:prstGeom prst="roundRect">
-            <a:avLst/>
-          </a:prstGeom>
-          <a:solidFill>
-            <a:srgbClr val="F2F5FA"/>
-          </a:solidFill>
-          <a:ln>
-            <a:noFill/>
-          </a:ln>
-          <a:effectLst/>
-        </p:spPr>
-        <p:style>
-          <a:lnRef idx="1">
-            <a:schemeClr val="accent1"/>
-          </a:lnRef>
-          <a:fillRef idx="3">
-            <a:schemeClr val="accent1"/>
-          </a:fillRef>
-          <a:effectRef idx="2">
-            <a:schemeClr val="accent1"/>
-          </a:effectRef>
-          <a:fontRef idx="minor">
-            <a:schemeClr val="lt1"/>
-          </a:fontRef>
-        </p:style>
-        <p:txBody>
-          <a:bodyPr rtlCol="0" anchor="ctr" wrap="square"/>
-          <a:lstStyle/>
-          <a:p>
-            <a:pPr algn="ctr"/>
-            <a:r>
-              <a:rPr sz="1500" b="1">
-                <a:solidFill>
-                  <a:srgbClr val="1F2937"/>
-                </a:solidFill>
-              </a:rPr>
-              <a:t>Author of CADSplat (personal correspondence)</a:t>
-            </a:r>
-          </a:p>
-          <a:p>
-            <a:pPr algn="ctr"/>
-            <a:r>
-              <a:rPr sz="1300" b="0">
-                <a:solidFill>
-                  <a:srgbClr val="1F2937"/>
-                </a:solidFill>
-              </a:rPr>
-              <a:t>their method does not detect minor defects; suggested deflectometry</a:t>
-            </a:r>
-          </a:p>
-        </p:txBody>
-      </p:sp>
-      <p:sp>
-        <p:nvSpPr>
-          <p:cNvPr id="5" name="Rounded Rectangle 4"/>
-          <p:cNvSpPr/>
-          <p:nvPr/>
-        </p:nvSpPr>
-        <p:spPr>
-          <a:xfrm>
-            <a:off x="6492240" y="3758184"/>
-            <a:ext cx="5303520" cy="1728216"/>
-          </a:xfrm>
-          <a:prstGeom prst="roundRect">
-            <a:avLst/>
-          </a:prstGeom>
-          <a:solidFill>
-            <a:srgbClr val="F2F5FA"/>
-          </a:solidFill>
-          <a:ln>
-            <a:noFill/>
-          </a:ln>
-          <a:effectLst/>
-        </p:spPr>
-        <p:style>
-          <a:lnRef idx="1">
-            <a:schemeClr val="accent1"/>
-          </a:lnRef>
-          <a:fillRef idx="3">
-            <a:schemeClr val="accent1"/>
-          </a:fillRef>
-          <a:effectRef idx="2">
-            <a:schemeClr val="accent1"/>
-          </a:effectRef>
-          <a:fontRef idx="minor">
-            <a:schemeClr val="lt1"/>
-          </a:fontRef>
-        </p:style>
-        <p:txBody>
-          <a:bodyPr rtlCol="0" anchor="ctr" wrap="square"/>
-          <a:lstStyle/>
-          <a:p>
-            <a:pPr algn="ctr"/>
-            <a:r>
-              <a:rPr sz="1500" b="1">
-                <a:solidFill>
-                  <a:srgbClr val="1F2937"/>
-                </a:solidFill>
-              </a:rPr>
-              <a:t>Author of PIAD (personal correspondence)</a:t>
-            </a:r>
-          </a:p>
-          <a:p>
-            <a:pPr algn="ctr"/>
-            <a:r>
-              <a:rPr sz="1300" b="0">
-                <a:solidFill>
-                  <a:srgbClr val="1F2937"/>
-                </a:solidFill>
-              </a:rPr>
-              <a:t>identifiability and abstention are a meaningful contribution in themselves</a:t>
+              <a:t>They imply 49–66% recall below 0.1 mm against 10% observed; reported as an upper bound.</a:t>
             </a:r>
           </a:p>
         </p:txBody>
@@ -12037,15 +13131,82 @@
           <a:lstStyle/>
           <a:p>
             <a:r>
-              <a:rPr sz="3000"/>
-              <a:t>Future Work: Physical Validation</a:t>
+              <a:rPr sz="2100" b="1"/>
+              <a:t>Calibration is necessary: textbook thresholds do not control false alarms</a:t>
+            </a:r>
+          </a:p>
+        </p:txBody>
+      </p:sp>
+      <p:sp>
+        <p:nvSpPr>
+          <p:cNvPr id="3" name="TextBox 2"/>
+          <p:cNvSpPr txBox="1"/>
+          <p:nvPr/>
+        </p:nvSpPr>
+        <p:spPr>
+          <a:xfrm>
+            <a:off x="11155680" y="6446520"/>
+            <a:ext cx="822960" cy="320040"/>
+          </a:xfrm>
+          <a:prstGeom prst="rect">
+            <a:avLst/>
+          </a:prstGeom>
+          <a:noFill/>
+        </p:spPr>
+        <p:txBody>
+          <a:bodyPr wrap="none">
+            <a:spAutoFit/>
+          </a:bodyPr>
+          <a:lstStyle/>
+          <a:p>
+            <a:pPr algn="r"/>
+            <a:r>
+              <a:rPr sz="1100">
+                <a:solidFill>
+                  <a:srgbClr val="5A6577"/>
+                </a:solidFill>
+              </a:rPr>
+              <a:t>10</a:t>
+            </a:r>
+          </a:p>
+        </p:txBody>
+      </p:sp>
+      <p:sp>
+        <p:nvSpPr>
+          <p:cNvPr id="4" name="TextBox 3"/>
+          <p:cNvSpPr txBox="1"/>
+          <p:nvPr/>
+        </p:nvSpPr>
+        <p:spPr>
+          <a:xfrm>
+            <a:off x="502920" y="6446520"/>
+            <a:ext cx="5486400" cy="320040"/>
+          </a:xfrm>
+          <a:prstGeom prst="rect">
+            <a:avLst/>
+          </a:prstGeom>
+          <a:noFill/>
+        </p:spPr>
+        <p:txBody>
+          <a:bodyPr wrap="none">
+            <a:spAutoFit/>
+          </a:bodyPr>
+          <a:lstStyle/>
+          <a:p>
+            <a:r>
+              <a:rPr sz="1000" b="1">
+                <a:solidFill>
+                  <a:srgbClr val="0047BB"/>
+                </a:solidFill>
+              </a:rPr>
+              <a:t>RESULTS</a:t>
             </a:r>
           </a:p>
         </p:txBody>
       </p:sp>
       <p:pic>
         <p:nvPicPr>
-          <p:cNvPr id="3" name="Picture 2" descr="f_plan.png"/>
+          <p:cNvPr id="5" name="Picture 4" descr="g_calib.png"/>
           <p:cNvPicPr>
             <a:picLocks noChangeAspect="1"/>
           </p:cNvPicPr>
@@ -12059,8 +13220,8 @@
         </p:blipFill>
         <p:spPr>
           <a:xfrm>
-            <a:off x="1223620" y="1865376"/>
-            <a:ext cx="9714279" cy="1563624"/>
+            <a:off x="740828" y="1824228"/>
+            <a:ext cx="5284903" cy="3456432"/>
           </a:xfrm>
           <a:prstGeom prst="rect">
             <a:avLst/>
@@ -12069,14 +13230,14 @@
       </p:pic>
       <p:sp>
         <p:nvSpPr>
-          <p:cNvPr id="4" name="TextBox 3"/>
+          <p:cNvPr id="6" name="TextBox 5"/>
           <p:cNvSpPr txBox="1"/>
           <p:nvPr/>
         </p:nvSpPr>
         <p:spPr>
           <a:xfrm>
-            <a:off x="548640" y="3675888"/>
-            <a:ext cx="11064240" cy="2468880"/>
+            <a:off x="6583680" y="1947672"/>
+            <a:ext cx="5212080" cy="3785615"/>
           </a:xfrm>
           <a:prstGeom prst="rect">
             <a:avLst/>
@@ -12084,6 +13245,317 @@
           <a:noFill/>
         </p:spPr>
         <p:txBody>
+          <a:bodyPr wrap="square">
+            <a:spAutoFit/>
+          </a:bodyPr>
+          <a:lstStyle/>
+          <a:p>
+            <a:pPr>
+              <a:spcAft>
+                <a:spcPts val="900"/>
+              </a:spcAft>
+            </a:pPr>
+            <a:r>
+              <a:rPr sz="1400">
+                <a:solidFill>
+                  <a:srgbClr val="0047BB"/>
+                </a:solidFill>
+              </a:rPr>
+              <a:t>▪  </a:t>
+            </a:r>
+            <a:r>
+              <a:rPr sz="1400" b="1">
+                <a:solidFill>
+                  <a:srgbClr val="1F2937"/>
+                </a:solidFill>
+              </a:rPr>
+              <a:t>Why.  </a:t>
+            </a:r>
+            <a:r>
+              <a:rPr sz="1400">
+                <a:solidFill>
+                  <a:srgbClr val="1F2937"/>
+                </a:solidFill>
+              </a:rPr>
+              <a:t>Textbook thresholds assume ideal pixel noise; the residual after the best nuisance fit is dominated by model mismatch.</a:t>
+            </a:r>
+          </a:p>
+          <a:p>
+            <a:pPr>
+              <a:spcAft>
+                <a:spcPts val="900"/>
+              </a:spcAft>
+            </a:pPr>
+            <a:r>
+              <a:rPr sz="1400">
+                <a:solidFill>
+                  <a:srgbClr val="0047BB"/>
+                </a:solidFill>
+              </a:rPr>
+              <a:t>▪  </a:t>
+            </a:r>
+            <a:r>
+              <a:rPr sz="1400" b="1">
+                <a:solidFill>
+                  <a:srgbClr val="1F2937"/>
+                </a:solidFill>
+              </a:rPr>
+              <a:t>χ².  </a:t>
+            </a:r>
+            <a:r>
+              <a:rPr sz="1400">
+                <a:solidFill>
+                  <a:srgbClr val="1F2937"/>
+                </a:solidFill>
+              </a:rPr>
+              <a:t>Nominal 1% → 32% false alarms (≈30×).</a:t>
+            </a:r>
+          </a:p>
+          <a:p>
+            <a:pPr>
+              <a:spcAft>
+                <a:spcPts val="900"/>
+              </a:spcAft>
+            </a:pPr>
+            <a:r>
+              <a:rPr sz="1400">
+                <a:solidFill>
+                  <a:srgbClr val="0047BB"/>
+                </a:solidFill>
+              </a:rPr>
+              <a:t>▪  </a:t>
+            </a:r>
+            <a:r>
+              <a:rPr sz="1400" b="1">
+                <a:solidFill>
+                  <a:srgbClr val="1F2937"/>
+                </a:solidFill>
+              </a:rPr>
+              <a:t>A-contrario.  </a:t>
+            </a:r>
+            <a:r>
+              <a:rPr sz="1400">
+                <a:solidFill>
+                  <a:srgbClr val="1F2937"/>
+                </a:solidFill>
+              </a:rPr>
+              <a:t>Flags 96% of healthy blades.</a:t>
+            </a:r>
+          </a:p>
+          <a:p>
+            <a:pPr>
+              <a:spcAft>
+                <a:spcPts val="900"/>
+              </a:spcAft>
+            </a:pPr>
+            <a:r>
+              <a:rPr sz="1400">
+                <a:solidFill>
+                  <a:srgbClr val="0047BB"/>
+                </a:solidFill>
+              </a:rPr>
+              <a:t>▪  </a:t>
+            </a:r>
+            <a:r>
+              <a:rPr sz="1400" b="1">
+                <a:solidFill>
+                  <a:srgbClr val="1F2937"/>
+                </a:solidFill>
+              </a:rPr>
+              <a:t>Ours.  </a:t>
+            </a:r>
+            <a:r>
+              <a:rPr sz="1400">
+                <a:solidFill>
+                  <a:srgbClr val="1F2937"/>
+                </a:solidFill>
+              </a:rPr>
+              <a:t>Recalibrated on 360 negatives: 2% target → 4% observed.</a:t>
+            </a:r>
+          </a:p>
+        </p:txBody>
+      </p:sp>
+      <p:sp>
+        <p:nvSpPr>
+          <p:cNvPr id="7" name="TextBox 6"/>
+          <p:cNvSpPr txBox="1"/>
+          <p:nvPr/>
+        </p:nvSpPr>
+        <p:spPr>
+          <a:xfrm>
+            <a:off x="502920" y="6053328"/>
+            <a:ext cx="10515600" cy="365760"/>
+          </a:xfrm>
+          <a:prstGeom prst="rect">
+            <a:avLst/>
+          </a:prstGeom>
+          <a:noFill/>
+        </p:spPr>
+        <p:txBody>
+          <a:bodyPr wrap="square">
+            <a:spAutoFit/>
+          </a:bodyPr>
+          <a:lstStyle/>
+          <a:p>
+            <a:r>
+              <a:rPr sz="1000" i="1">
+                <a:solidFill>
+                  <a:srgbClr val="5A6577"/>
+                </a:solidFill>
+              </a:rPr>
+              <a:t>Same fits on the sealed test.</a:t>
+            </a:r>
+          </a:p>
+        </p:txBody>
+      </p:sp>
+    </p:spTree>
+  </p:cSld>
+  <p:clrMapOvr>
+    <a:masterClrMapping/>
+  </p:clrMapOvr>
+</p:sld>
+</file>
+
+<file path=ppt/slides/slide15.xml><?xml version="1.0" encoding="utf-8"?>
+<p:sld xmlns:a="http://schemas.openxmlformats.org/drawingml/2006/main" xmlns:p="http://schemas.openxmlformats.org/presentationml/2006/main" xmlns:r="http://schemas.openxmlformats.org/officeDocument/2006/relationships">
+  <p:cSld>
+    <p:spTree>
+      <p:nvGrpSpPr>
+        <p:cNvPr id="1" name=""/>
+        <p:cNvGrpSpPr/>
+        <p:nvPr/>
+      </p:nvGrpSpPr>
+      <p:grpSpPr/>
+      <p:sp>
+        <p:nvSpPr>
+          <p:cNvPr id="2" name="Title 1"/>
+          <p:cNvSpPr>
+            <a:spLocks noGrp="1"/>
+          </p:cNvSpPr>
+          <p:nvPr>
+            <p:ph type="title"/>
+          </p:nvPr>
+        </p:nvSpPr>
+        <p:spPr/>
+        <p:txBody>
+          <a:bodyPr/>
+          <a:lstStyle/>
+          <a:p>
+            <a:r>
+              <a:rPr sz="2100" b="1"/>
+              <a:t>Two corrections restore transfer to unseen industrial designs</a:t>
+            </a:r>
+          </a:p>
+        </p:txBody>
+      </p:sp>
+      <p:sp>
+        <p:nvSpPr>
+          <p:cNvPr id="3" name="TextBox 2"/>
+          <p:cNvSpPr txBox="1"/>
+          <p:nvPr/>
+        </p:nvSpPr>
+        <p:spPr>
+          <a:xfrm>
+            <a:off x="11155680" y="6446520"/>
+            <a:ext cx="822960" cy="320040"/>
+          </a:xfrm>
+          <a:prstGeom prst="rect">
+            <a:avLst/>
+          </a:prstGeom>
+          <a:noFill/>
+        </p:spPr>
+        <p:txBody>
+          <a:bodyPr wrap="none">
+            <a:spAutoFit/>
+          </a:bodyPr>
+          <a:lstStyle/>
+          <a:p>
+            <a:pPr algn="r"/>
+            <a:r>
+              <a:rPr sz="1100">
+                <a:solidFill>
+                  <a:srgbClr val="5A6577"/>
+                </a:solidFill>
+              </a:rPr>
+              <a:t>11</a:t>
+            </a:r>
+          </a:p>
+        </p:txBody>
+      </p:sp>
+      <p:sp>
+        <p:nvSpPr>
+          <p:cNvPr id="4" name="TextBox 3"/>
+          <p:cNvSpPr txBox="1"/>
+          <p:nvPr/>
+        </p:nvSpPr>
+        <p:spPr>
+          <a:xfrm>
+            <a:off x="502920" y="6446520"/>
+            <a:ext cx="5486400" cy="320040"/>
+          </a:xfrm>
+          <a:prstGeom prst="rect">
+            <a:avLst/>
+          </a:prstGeom>
+          <a:noFill/>
+        </p:spPr>
+        <p:txBody>
+          <a:bodyPr wrap="none">
+            <a:spAutoFit/>
+          </a:bodyPr>
+          <a:lstStyle/>
+          <a:p>
+            <a:r>
+              <a:rPr sz="1000" b="1">
+                <a:solidFill>
+                  <a:srgbClr val="0047BB"/>
+                </a:solidFill>
+              </a:rPr>
+              <a:t>RESULTS</a:t>
+            </a:r>
+          </a:p>
+        </p:txBody>
+      </p:sp>
+      <p:pic>
+        <p:nvPicPr>
+          <p:cNvPr id="5" name="Picture 4" descr="g_transfer.png"/>
+          <p:cNvPicPr>
+            <a:picLocks noChangeAspect="1"/>
+          </p:cNvPicPr>
+          <p:nvPr/>
+        </p:nvPicPr>
+        <p:blipFill>
+          <a:blip r:embed="rId2"/>
+          <a:stretch>
+            <a:fillRect/>
+          </a:stretch>
+        </p:blipFill>
+        <p:spPr>
+          <a:xfrm>
+            <a:off x="1196879" y="1824228"/>
+            <a:ext cx="4189920" cy="3044952"/>
+          </a:xfrm>
+          <a:prstGeom prst="rect">
+            <a:avLst/>
+          </a:prstGeom>
+        </p:spPr>
+      </p:pic>
+      <p:sp>
+        <p:nvSpPr>
+          <p:cNvPr id="6" name="TextBox 5"/>
+          <p:cNvSpPr txBox="1"/>
+          <p:nvPr/>
+        </p:nvSpPr>
+        <p:spPr>
+          <a:xfrm>
+            <a:off x="6400800" y="1824228"/>
+            <a:ext cx="5394960" cy="288036"/>
+          </a:xfrm>
+          <a:prstGeom prst="rect">
+            <a:avLst/>
+          </a:prstGeom>
+          <a:noFill/>
+        </p:spPr>
+        <p:txBody>
           <a:bodyPr wrap="square" anchor="t">
             <a:spAutoFit/>
           </a:bodyPr>
@@ -12091,61 +13563,2930 @@
           <a:p>
             <a:pPr algn="l">
               <a:spcAft>
-                <a:spcPts val="800"/>
+                <a:spcPts val="200"/>
               </a:spcAft>
             </a:pPr>
             <a:r>
-              <a:rPr sz="1600" b="0">
-                <a:solidFill>
-                  <a:srgbClr val="1F2937"/>
+              <a:rPr sz="1100" b="1">
+                <a:solidFill>
+                  <a:srgbClr val="C62828"/>
                 </a:solidFill>
               </a:rPr>
-              <a:t>•  3D-print 10 stainless-steel blades from our CAD models</a:t>
-            </a:r>
-          </a:p>
+              <a:t>v1 (frozen): a false dent on a healthy blade</a:t>
+            </a:r>
+          </a:p>
+        </p:txBody>
+      </p:sp>
+      <p:pic>
+        <p:nvPicPr>
+          <p:cNvPr id="7" name="Picture 6" descr="fix_before.jpg"/>
+          <p:cNvPicPr>
+            <a:picLocks noChangeAspect="1"/>
+          </p:cNvPicPr>
+          <p:nvPr/>
+        </p:nvPicPr>
+        <p:blipFill>
+          <a:blip r:embed="rId3"/>
+          <a:stretch>
+            <a:fillRect/>
+          </a:stretch>
+        </p:blipFill>
+        <p:spPr>
+          <a:xfrm>
+            <a:off x="7182383" y="2153412"/>
+            <a:ext cx="3831793" cy="1193292"/>
+          </a:xfrm>
+          <a:prstGeom prst="rect">
+            <a:avLst/>
+          </a:prstGeom>
+        </p:spPr>
+      </p:pic>
+      <p:sp>
+        <p:nvSpPr>
+          <p:cNvPr id="8" name="TextBox 7"/>
+          <p:cNvSpPr txBox="1"/>
+          <p:nvPr/>
+        </p:nvSpPr>
+        <p:spPr>
+          <a:xfrm>
+            <a:off x="6400800" y="3429000"/>
+            <a:ext cx="5394960" cy="288036"/>
+          </a:xfrm>
+          <a:prstGeom prst="rect">
+            <a:avLst/>
+          </a:prstGeom>
+          <a:noFill/>
+        </p:spPr>
+        <p:txBody>
+          <a:bodyPr wrap="square" anchor="t">
+            <a:spAutoFit/>
+          </a:bodyPr>
+          <a:lstStyle/>
           <a:p>
             <a:pPr algn="l">
               <a:spcAft>
-                <a:spcPts val="800"/>
+                <a:spcPts val="200"/>
               </a:spcAft>
             </a:pPr>
             <a:r>
-              <a:rPr sz="1600" b="0">
-                <a:solidFill>
-                  <a:srgbClr val="1F2937"/>
+              <a:rPr sz="1100" b="1">
+                <a:solidFill>
+                  <a:srgbClr val="1A7F37"/>
                 </a:solidFill>
               </a:rPr>
-              <a:t>•  Induce damage: ball bearings (dents), files (nicks), paint (stains)</a:t>
-            </a:r>
-          </a:p>
-          <a:p>
-            <a:pPr algn="l">
+              <a:t>v1.1: correctly nothing reported</a:t>
+            </a:r>
+          </a:p>
+        </p:txBody>
+      </p:sp>
+      <p:pic>
+        <p:nvPicPr>
+          <p:cNvPr id="9" name="Picture 8" descr="fix_after.jpg"/>
+          <p:cNvPicPr>
+            <a:picLocks noChangeAspect="1"/>
+          </p:cNvPicPr>
+          <p:nvPr/>
+        </p:nvPicPr>
+        <p:blipFill>
+          <a:blip r:embed="rId4"/>
+          <a:stretch>
+            <a:fillRect/>
+          </a:stretch>
+        </p:blipFill>
+        <p:spPr>
+          <a:xfrm>
+            <a:off x="7182383" y="3758184"/>
+            <a:ext cx="3831793" cy="1193292"/>
+          </a:xfrm>
+          <a:prstGeom prst="rect">
+            <a:avLst/>
+          </a:prstGeom>
+        </p:spPr>
+      </p:pic>
+      <p:sp>
+        <p:nvSpPr>
+          <p:cNvPr id="10" name="TextBox 9"/>
+          <p:cNvSpPr txBox="1"/>
+          <p:nvPr/>
+        </p:nvSpPr>
+        <p:spPr>
+          <a:xfrm>
+            <a:off x="548640" y="4992624"/>
+            <a:ext cx="11155680" cy="987552"/>
+          </a:xfrm>
+          <a:prstGeom prst="rect">
+            <a:avLst/>
+          </a:prstGeom>
+          <a:noFill/>
+        </p:spPr>
+        <p:txBody>
+          <a:bodyPr wrap="square">
+            <a:spAutoFit/>
+          </a:bodyPr>
+          <a:lstStyle/>
+          <a:p>
+            <a:pPr>
               <a:spcAft>
-                <a:spcPts val="800"/>
+                <a:spcPts val="900"/>
               </a:spcAft>
             </a:pPr>
             <a:r>
-              <a:rPr sz="1600" b="0">
+              <a:rPr sz="1300">
+                <a:solidFill>
+                  <a:srgbClr val="0047BB"/>
+                </a:solidFill>
+              </a:rPr>
+              <a:t>▪  </a:t>
+            </a:r>
+            <a:r>
+              <a:rPr sz="1300" b="1">
                 <a:solidFill>
                   <a:srgbClr val="1F2937"/>
                 </a:solidFill>
               </a:rPr>
-              <a:t>•  Ground truth: dial gauge and 3D scanner; photographs with ArUco markers and grazing light</a:t>
-            </a:r>
-          </a:p>
-          <a:p>
-            <a:pPr algn="l">
+              <a:t>Causes.  </a:t>
+            </a:r>
+            <a:r>
+              <a:rPr sz="1300">
+                <a:solidFill>
+                  <a:srgbClr val="1F2937"/>
+                </a:solidFill>
+              </a:rPr>
+              <a:t>a silhouette pose bias, and a healthy-reference correction that did not move with the camera. Fixed on blades 1–2, no retraining; evaluated on 3–6.</a:t>
+            </a:r>
+          </a:p>
+        </p:txBody>
+      </p:sp>
+    </p:spTree>
+  </p:cSld>
+  <p:clrMapOvr>
+    <a:masterClrMapping/>
+  </p:clrMapOvr>
+</p:sld>
+</file>
+
+<file path=ppt/slides/slide16.xml><?xml version="1.0" encoding="utf-8"?>
+<p:sld xmlns:a="http://schemas.openxmlformats.org/drawingml/2006/main" xmlns:p="http://schemas.openxmlformats.org/presentationml/2006/main" xmlns:r="http://schemas.openxmlformats.org/officeDocument/2006/relationships">
+  <p:cSld>
+    <p:spTree>
+      <p:nvGrpSpPr>
+        <p:cNvPr id="1" name=""/>
+        <p:cNvGrpSpPr/>
+        <p:nvPr/>
+      </p:nvGrpSpPr>
+      <p:grpSpPr/>
+      <p:sp>
+        <p:nvSpPr>
+          <p:cNvPr id="2" name="Title 1"/>
+          <p:cNvSpPr>
+            <a:spLocks noGrp="1"/>
+          </p:cNvSpPr>
+          <p:nvPr>
+            <p:ph type="title"/>
+          </p:nvPr>
+        </p:nvSpPr>
+        <p:spPr/>
+        <p:txBody>
+          <a:bodyPr/>
+          <a:lstStyle/>
+          <a:p>
+            <a:r>
+              <a:rPr sz="2100" b="1"/>
+              <a:t>Detection extends to nicks and cracks without retraining</a:t>
+            </a:r>
+          </a:p>
+        </p:txBody>
+      </p:sp>
+      <p:sp>
+        <p:nvSpPr>
+          <p:cNvPr id="3" name="TextBox 2"/>
+          <p:cNvSpPr txBox="1"/>
+          <p:nvPr/>
+        </p:nvSpPr>
+        <p:spPr>
+          <a:xfrm>
+            <a:off x="11155680" y="6446520"/>
+            <a:ext cx="822960" cy="320040"/>
+          </a:xfrm>
+          <a:prstGeom prst="rect">
+            <a:avLst/>
+          </a:prstGeom>
+          <a:noFill/>
+        </p:spPr>
+        <p:txBody>
+          <a:bodyPr wrap="none">
+            <a:spAutoFit/>
+          </a:bodyPr>
+          <a:lstStyle/>
+          <a:p>
+            <a:pPr algn="r"/>
+            <a:r>
+              <a:rPr sz="1100">
+                <a:solidFill>
+                  <a:srgbClr val="5A6577"/>
+                </a:solidFill>
+              </a:rPr>
+              <a:t>12</a:t>
+            </a:r>
+          </a:p>
+        </p:txBody>
+      </p:sp>
+      <p:sp>
+        <p:nvSpPr>
+          <p:cNvPr id="4" name="TextBox 3"/>
+          <p:cNvSpPr txBox="1"/>
+          <p:nvPr/>
+        </p:nvSpPr>
+        <p:spPr>
+          <a:xfrm>
+            <a:off x="502920" y="6446520"/>
+            <a:ext cx="5486400" cy="320040"/>
+          </a:xfrm>
+          <a:prstGeom prst="rect">
+            <a:avLst/>
+          </a:prstGeom>
+          <a:noFill/>
+        </p:spPr>
+        <p:txBody>
+          <a:bodyPr wrap="none">
+            <a:spAutoFit/>
+          </a:bodyPr>
+          <a:lstStyle/>
+          <a:p>
+            <a:r>
+              <a:rPr sz="1000" b="1">
+                <a:solidFill>
+                  <a:srgbClr val="0047BB"/>
+                </a:solidFill>
+              </a:rPr>
+              <a:t>RESULTS</a:t>
+            </a:r>
+          </a:p>
+        </p:txBody>
+      </p:sp>
+      <p:graphicFrame>
+        <p:nvGraphicFramePr>
+          <p:cNvPr id="5" name="Table 4"/>
+          <p:cNvGraphicFramePr>
+            <a:graphicFrameLocks noGrp="1"/>
+          </p:cNvGraphicFramePr>
+          <p:nvPr/>
+        </p:nvGraphicFramePr>
+        <p:xfrm>
+          <a:off x="548640" y="1865376"/>
+          <a:ext cx="6583680" cy="2743200"/>
+        </p:xfrm>
+        <a:graphic>
+          <a:graphicData uri="http://schemas.openxmlformats.org/drawingml/2006/table">
+            <a:tbl>
+              <a:tblPr firstRow="1" bandRow="1">
+                <a:tableStyleId>{5C22544A-7EE6-4342-B048-85BDC9FD1C3A}</a:tableStyleId>
+              </a:tblPr>
+              <a:tblGrid>
+                <a:gridCol w="2743200"/>
+                <a:gridCol w="914400"/>
+                <a:gridCol w="1463040"/>
+                <a:gridCol w="1463040"/>
+              </a:tblGrid>
+              <a:tr h="457200">
+                <a:tc>
+                  <a:txBody>
+                    <a:bodyPr/>
+                    <a:lstStyle/>
+                    <a:p>
+                      <a:pPr algn="l"/>
+                      <a:r>
+                        <a:rPr sz="1200" b="1">
+                          <a:solidFill>
+                            <a:srgbClr val="FFFFFF"/>
+                          </a:solidFill>
+                        </a:rPr>
+                        <a:t>Defect (held-out designs)</a:t>
+                      </a:r>
+                    </a:p>
+                  </a:txBody>
+                  <a:tcPr marL="73152" marR="73152">
+                    <a:solidFill>
+                      <a:srgbClr val="0047BB"/>
+                    </a:solidFill>
+                  </a:tcPr>
+                </a:tc>
+                <a:tc>
+                  <a:txBody>
+                    <a:bodyPr/>
+                    <a:lstStyle/>
+                    <a:p>
+                      <a:pPr algn="ctr"/>
+                      <a:r>
+                        <a:rPr sz="1200" b="1">
+                          <a:solidFill>
+                            <a:srgbClr val="FFFFFF"/>
+                          </a:solidFill>
+                        </a:rPr>
+                        <a:t>Cases</a:t>
+                      </a:r>
+                    </a:p>
+                  </a:txBody>
+                  <a:tcPr marL="73152" marR="73152">
+                    <a:solidFill>
+                      <a:srgbClr val="0047BB"/>
+                    </a:solidFill>
+                  </a:tcPr>
+                </a:tc>
+                <a:tc>
+                  <a:txBody>
+                    <a:bodyPr/>
+                    <a:lstStyle/>
+                    <a:p>
+                      <a:pPr algn="ctr"/>
+                      <a:r>
+                        <a:rPr sz="1200" b="1">
+                          <a:solidFill>
+                            <a:srgbClr val="FFFFFF"/>
+                          </a:solidFill>
+                        </a:rPr>
+                        <a:t>Ours: located</a:t>
+                      </a:r>
+                    </a:p>
+                  </a:txBody>
+                  <a:tcPr marL="73152" marR="73152">
+                    <a:solidFill>
+                      <a:srgbClr val="0047BB"/>
+                    </a:solidFill>
+                  </a:tcPr>
+                </a:tc>
+                <a:tc>
+                  <a:txBody>
+                    <a:bodyPr/>
+                    <a:lstStyle/>
+                    <a:p>
+                      <a:pPr algn="ctr"/>
+                      <a:r>
+                        <a:rPr sz="1200" b="1">
+                          <a:solidFill>
+                            <a:srgbClr val="FFFFFF"/>
+                          </a:solidFill>
+                        </a:rPr>
+                        <a:t>SIFT: reported</a:t>
+                      </a:r>
+                    </a:p>
+                  </a:txBody>
+                  <a:tcPr marL="73152" marR="73152">
+                    <a:solidFill>
+                      <a:srgbClr val="0047BB"/>
+                    </a:solidFill>
+                  </a:tcPr>
+                </a:tc>
+              </a:tr>
+              <a:tr h="457200">
+                <a:tc>
+                  <a:txBody>
+                    <a:bodyPr/>
+                    <a:lstStyle/>
+                    <a:p>
+                      <a:pPr algn="l"/>
+                      <a:r>
+                        <a:rPr sz="1200" b="0">
+                          <a:solidFill>
+                            <a:srgbClr val="1F2937"/>
+                          </a:solidFill>
+                        </a:rPr>
+                        <a:t>Dent</a:t>
+                      </a:r>
+                    </a:p>
+                  </a:txBody>
+                  <a:tcPr marL="73152" marR="73152">
+                    <a:solidFill>
+                      <a:srgbClr val="FFFFFF"/>
+                    </a:solidFill>
+                  </a:tcPr>
+                </a:tc>
+                <a:tc>
+                  <a:txBody>
+                    <a:bodyPr/>
+                    <a:lstStyle/>
+                    <a:p>
+                      <a:pPr algn="ctr"/>
+                      <a:r>
+                        <a:rPr sz="1200" b="0">
+                          <a:solidFill>
+                            <a:srgbClr val="1F2937"/>
+                          </a:solidFill>
+                        </a:rPr>
+                        <a:t>24</a:t>
+                      </a:r>
+                    </a:p>
+                  </a:txBody>
+                  <a:tcPr marL="73152" marR="73152">
+                    <a:solidFill>
+                      <a:srgbClr val="FFFFFF"/>
+                    </a:solidFill>
+                  </a:tcPr>
+                </a:tc>
+                <a:tc>
+                  <a:txBody>
+                    <a:bodyPr/>
+                    <a:lstStyle/>
+                    <a:p>
+                      <a:pPr algn="ctr"/>
+                      <a:r>
+                        <a:rPr sz="1200" b="0">
+                          <a:solidFill>
+                            <a:srgbClr val="1F2937"/>
+                          </a:solidFill>
+                        </a:rPr>
+                        <a:t>23 (96%)</a:t>
+                      </a:r>
+                    </a:p>
+                  </a:txBody>
+                  <a:tcPr marL="73152" marR="73152">
+                    <a:solidFill>
+                      <a:srgbClr val="FFFFFF"/>
+                    </a:solidFill>
+                  </a:tcPr>
+                </a:tc>
+                <a:tc>
+                  <a:txBody>
+                    <a:bodyPr/>
+                    <a:lstStyle/>
+                    <a:p>
+                      <a:pPr algn="ctr"/>
+                      <a:r>
+                        <a:rPr sz="1200" b="0">
+                          <a:solidFill>
+                            <a:srgbClr val="1F2937"/>
+                          </a:solidFill>
+                        </a:rPr>
+                        <a:t>6 (25%)</a:t>
+                      </a:r>
+                    </a:p>
+                  </a:txBody>
+                  <a:tcPr marL="73152" marR="73152">
+                    <a:solidFill>
+                      <a:srgbClr val="FFFFFF"/>
+                    </a:solidFill>
+                  </a:tcPr>
+                </a:tc>
+              </a:tr>
+              <a:tr h="457200">
+                <a:tc>
+                  <a:txBody>
+                    <a:bodyPr/>
+                    <a:lstStyle/>
+                    <a:p>
+                      <a:pPr algn="l"/>
+                      <a:r>
+                        <a:rPr sz="1200" b="0">
+                          <a:solidFill>
+                            <a:srgbClr val="1F2937"/>
+                          </a:solidFill>
+                        </a:rPr>
+                        <a:t>Sharp nick (edge notch)</a:t>
+                      </a:r>
+                    </a:p>
+                  </a:txBody>
+                  <a:tcPr marL="73152" marR="73152">
+                    <a:solidFill>
+                      <a:srgbClr val="F2F5FA"/>
+                    </a:solidFill>
+                  </a:tcPr>
+                </a:tc>
+                <a:tc>
+                  <a:txBody>
+                    <a:bodyPr/>
+                    <a:lstStyle/>
+                    <a:p>
+                      <a:pPr algn="ctr"/>
+                      <a:r>
+                        <a:rPr sz="1200" b="0">
+                          <a:solidFill>
+                            <a:srgbClr val="1F2937"/>
+                          </a:solidFill>
+                        </a:rPr>
+                        <a:t>32</a:t>
+                      </a:r>
+                    </a:p>
+                  </a:txBody>
+                  <a:tcPr marL="73152" marR="73152">
+                    <a:solidFill>
+                      <a:srgbClr val="F2F5FA"/>
+                    </a:solidFill>
+                  </a:tcPr>
+                </a:tc>
+                <a:tc>
+                  <a:txBody>
+                    <a:bodyPr/>
+                    <a:lstStyle/>
+                    <a:p>
+                      <a:pPr algn="ctr"/>
+                      <a:r>
+                        <a:rPr sz="1200" b="0">
+                          <a:solidFill>
+                            <a:srgbClr val="1F2937"/>
+                          </a:solidFill>
+                        </a:rPr>
+                        <a:t>21 (66%)</a:t>
+                      </a:r>
+                    </a:p>
+                  </a:txBody>
+                  <a:tcPr marL="73152" marR="73152">
+                    <a:solidFill>
+                      <a:srgbClr val="F2F5FA"/>
+                    </a:solidFill>
+                  </a:tcPr>
+                </a:tc>
+                <a:tc>
+                  <a:txBody>
+                    <a:bodyPr/>
+                    <a:lstStyle/>
+                    <a:p>
+                      <a:pPr algn="ctr"/>
+                      <a:r>
+                        <a:rPr sz="1200" b="0">
+                          <a:solidFill>
+                            <a:srgbClr val="1F2937"/>
+                          </a:solidFill>
+                        </a:rPr>
+                        <a:t>9 (28%)</a:t>
+                      </a:r>
+                    </a:p>
+                  </a:txBody>
+                  <a:tcPr marL="73152" marR="73152">
+                    <a:solidFill>
+                      <a:srgbClr val="F2F5FA"/>
+                    </a:solidFill>
+                  </a:tcPr>
+                </a:tc>
+              </a:tr>
+              <a:tr h="457200">
+                <a:tc>
+                  <a:txBody>
+                    <a:bodyPr/>
+                    <a:lstStyle/>
+                    <a:p>
+                      <a:pPr algn="l"/>
+                      <a:r>
+                        <a:rPr sz="1200" b="0">
+                          <a:solidFill>
+                            <a:srgbClr val="1F2937"/>
+                          </a:solidFill>
+                        </a:rPr>
+                        <a:t>Hairline crack (dark line)</a:t>
+                      </a:r>
+                    </a:p>
+                  </a:txBody>
+                  <a:tcPr marL="73152" marR="73152">
+                    <a:solidFill>
+                      <a:srgbClr val="FFFFFF"/>
+                    </a:solidFill>
+                  </a:tcPr>
+                </a:tc>
+                <a:tc>
+                  <a:txBody>
+                    <a:bodyPr/>
+                    <a:lstStyle/>
+                    <a:p>
+                      <a:pPr algn="ctr"/>
+                      <a:r>
+                        <a:rPr sz="1200" b="0">
+                          <a:solidFill>
+                            <a:srgbClr val="1F2937"/>
+                          </a:solidFill>
+                        </a:rPr>
+                        <a:t>32</a:t>
+                      </a:r>
+                    </a:p>
+                  </a:txBody>
+                  <a:tcPr marL="73152" marR="73152">
+                    <a:solidFill>
+                      <a:srgbClr val="FFFFFF"/>
+                    </a:solidFill>
+                  </a:tcPr>
+                </a:tc>
+                <a:tc>
+                  <a:txBody>
+                    <a:bodyPr/>
+                    <a:lstStyle/>
+                    <a:p>
+                      <a:pPr algn="ctr"/>
+                      <a:r>
+                        <a:rPr sz="1200" b="0">
+                          <a:solidFill>
+                            <a:srgbClr val="1F2937"/>
+                          </a:solidFill>
+                        </a:rPr>
+                        <a:t>22 (69%)</a:t>
+                      </a:r>
+                    </a:p>
+                  </a:txBody>
+                  <a:tcPr marL="73152" marR="73152">
+                    <a:solidFill>
+                      <a:srgbClr val="FFFFFF"/>
+                    </a:solidFill>
+                  </a:tcPr>
+                </a:tc>
+                <a:tc>
+                  <a:txBody>
+                    <a:bodyPr/>
+                    <a:lstStyle/>
+                    <a:p>
+                      <a:pPr algn="ctr"/>
+                      <a:r>
+                        <a:rPr sz="1200" b="0">
+                          <a:solidFill>
+                            <a:srgbClr val="1F2937"/>
+                          </a:solidFill>
+                        </a:rPr>
+                        <a:t>15 (47%)</a:t>
+                      </a:r>
+                    </a:p>
+                  </a:txBody>
+                  <a:tcPr marL="73152" marR="73152">
+                    <a:solidFill>
+                      <a:srgbClr val="FFFFFF"/>
+                    </a:solidFill>
+                  </a:tcPr>
+                </a:tc>
+              </a:tr>
+              <a:tr h="457200">
+                <a:tc>
+                  <a:txBody>
+                    <a:bodyPr/>
+                    <a:lstStyle/>
+                    <a:p>
+                      <a:pPr algn="l"/>
+                      <a:r>
+                        <a:rPr sz="1200" b="0">
+                          <a:solidFill>
+                            <a:srgbClr val="1F2937"/>
+                          </a:solidFill>
+                        </a:rPr>
+                        <a:t>Stain (should be 0)</a:t>
+                      </a:r>
+                    </a:p>
+                  </a:txBody>
+                  <a:tcPr marL="73152" marR="73152">
+                    <a:solidFill>
+                      <a:srgbClr val="F2F5FA"/>
+                    </a:solidFill>
+                  </a:tcPr>
+                </a:tc>
+                <a:tc>
+                  <a:txBody>
+                    <a:bodyPr/>
+                    <a:lstStyle/>
+                    <a:p>
+                      <a:pPr algn="ctr"/>
+                      <a:r>
+                        <a:rPr sz="1200" b="0">
+                          <a:solidFill>
+                            <a:srgbClr val="1F2937"/>
+                          </a:solidFill>
+                        </a:rPr>
+                        <a:t>24</a:t>
+                      </a:r>
+                    </a:p>
+                  </a:txBody>
+                  <a:tcPr marL="73152" marR="73152">
+                    <a:solidFill>
+                      <a:srgbClr val="F2F5FA"/>
+                    </a:solidFill>
+                  </a:tcPr>
+                </a:tc>
+                <a:tc>
+                  <a:txBody>
+                    <a:bodyPr/>
+                    <a:lstStyle/>
+                    <a:p>
+                      <a:pPr algn="ctr"/>
+                      <a:r>
+                        <a:rPr sz="1200" b="0">
+                          <a:solidFill>
+                            <a:srgbClr val="1F2937"/>
+                          </a:solidFill>
+                        </a:rPr>
+                        <a:t>4 reported</a:t>
+                      </a:r>
+                    </a:p>
+                  </a:txBody>
+                  <a:tcPr marL="73152" marR="73152">
+                    <a:solidFill>
+                      <a:srgbClr val="F2F5FA"/>
+                    </a:solidFill>
+                  </a:tcPr>
+                </a:tc>
+                <a:tc>
+                  <a:txBody>
+                    <a:bodyPr/>
+                    <a:lstStyle/>
+                    <a:p>
+                      <a:pPr algn="ctr"/>
+                      <a:r>
+                        <a:rPr sz="1200" b="0">
+                          <a:solidFill>
+                            <a:srgbClr val="1F2937"/>
+                          </a:solidFill>
+                        </a:rPr>
+                        <a:t>3</a:t>
+                      </a:r>
+                    </a:p>
+                  </a:txBody>
+                  <a:tcPr marL="73152" marR="73152">
+                    <a:solidFill>
+                      <a:srgbClr val="F2F5FA"/>
+                    </a:solidFill>
+                  </a:tcPr>
+                </a:tc>
+              </a:tr>
+              <a:tr h="457200">
+                <a:tc>
+                  <a:txBody>
+                    <a:bodyPr/>
+                    <a:lstStyle/>
+                    <a:p>
+                      <a:pPr algn="l"/>
+                      <a:r>
+                        <a:rPr sz="1200" b="0">
+                          <a:solidFill>
+                            <a:srgbClr val="1F2937"/>
+                          </a:solidFill>
+                        </a:rPr>
+                        <a:t>Healthy (should be 0)</a:t>
+                      </a:r>
+                    </a:p>
+                  </a:txBody>
+                  <a:tcPr marL="73152" marR="73152">
+                    <a:solidFill>
+                      <a:srgbClr val="FFFFFF"/>
+                    </a:solidFill>
+                  </a:tcPr>
+                </a:tc>
+                <a:tc>
+                  <a:txBody>
+                    <a:bodyPr/>
+                    <a:lstStyle/>
+                    <a:p>
+                      <a:pPr algn="ctr"/>
+                      <a:r>
+                        <a:rPr sz="1200" b="0">
+                          <a:solidFill>
+                            <a:srgbClr val="1F2937"/>
+                          </a:solidFill>
+                        </a:rPr>
+                        <a:t>24</a:t>
+                      </a:r>
+                    </a:p>
+                  </a:txBody>
+                  <a:tcPr marL="73152" marR="73152">
+                    <a:solidFill>
+                      <a:srgbClr val="FFFFFF"/>
+                    </a:solidFill>
+                  </a:tcPr>
+                </a:tc>
+                <a:tc>
+                  <a:txBody>
+                    <a:bodyPr/>
+                    <a:lstStyle/>
+                    <a:p>
+                      <a:pPr algn="ctr"/>
+                      <a:r>
+                        <a:rPr sz="1200" b="0">
+                          <a:solidFill>
+                            <a:srgbClr val="1F2937"/>
+                          </a:solidFill>
+                        </a:rPr>
+                        <a:t>2 reported</a:t>
+                      </a:r>
+                    </a:p>
+                  </a:txBody>
+                  <a:tcPr marL="73152" marR="73152">
+                    <a:solidFill>
+                      <a:srgbClr val="FFFFFF"/>
+                    </a:solidFill>
+                  </a:tcPr>
+                </a:tc>
+                <a:tc>
+                  <a:txBody>
+                    <a:bodyPr/>
+                    <a:lstStyle/>
+                    <a:p>
+                      <a:pPr algn="ctr"/>
+                      <a:r>
+                        <a:rPr sz="1200" b="0">
+                          <a:solidFill>
+                            <a:srgbClr val="1F2937"/>
+                          </a:solidFill>
+                        </a:rPr>
+                        <a:t>3</a:t>
+                      </a:r>
+                    </a:p>
+                  </a:txBody>
+                  <a:tcPr marL="73152" marR="73152">
+                    <a:solidFill>
+                      <a:srgbClr val="FFFFFF"/>
+                    </a:solidFill>
+                  </a:tcPr>
+                </a:tc>
+              </a:tr>
+            </a:tbl>
+          </a:graphicData>
+        </a:graphic>
+      </p:graphicFrame>
+      <p:pic>
+        <p:nvPicPr>
+          <p:cNvPr id="6" name="Picture 5" descr="cad6dmg2_1003_02.jpg"/>
+          <p:cNvPicPr>
+            <a:picLocks noChangeAspect="1"/>
+          </p:cNvPicPr>
+          <p:nvPr/>
+        </p:nvPicPr>
+        <p:blipFill>
+          <a:blip r:embed="rId2"/>
+          <a:stretch>
+            <a:fillRect/>
+          </a:stretch>
+        </p:blipFill>
+        <p:spPr>
+          <a:xfrm>
+            <a:off x="7487107" y="1865376"/>
+            <a:ext cx="4228185" cy="1316736"/>
+          </a:xfrm>
+          <a:prstGeom prst="rect">
+            <a:avLst/>
+          </a:prstGeom>
+        </p:spPr>
+      </p:pic>
+      <p:pic>
+        <p:nvPicPr>
+          <p:cNvPr id="7" name="Picture 6" descr="cad6dmg2_1004_11.jpg"/>
+          <p:cNvPicPr>
+            <a:picLocks noChangeAspect="1"/>
+          </p:cNvPicPr>
+          <p:nvPr/>
+        </p:nvPicPr>
+        <p:blipFill>
+          <a:blip r:embed="rId3"/>
+          <a:stretch>
+            <a:fillRect/>
+          </a:stretch>
+        </p:blipFill>
+        <p:spPr>
+          <a:xfrm>
+            <a:off x="7488936" y="3346704"/>
+            <a:ext cx="4224528" cy="1316736"/>
+          </a:xfrm>
+          <a:prstGeom prst="rect">
+            <a:avLst/>
+          </a:prstGeom>
+        </p:spPr>
+      </p:pic>
+      <p:sp>
+        <p:nvSpPr>
+          <p:cNvPr id="8" name="TextBox 7"/>
+          <p:cNvSpPr txBox="1"/>
+          <p:nvPr/>
+        </p:nvSpPr>
+        <p:spPr>
+          <a:xfrm>
+            <a:off x="7406640" y="4745736"/>
+            <a:ext cx="4389120" cy="493776"/>
+          </a:xfrm>
+          <a:prstGeom prst="rect">
+            <a:avLst/>
+          </a:prstGeom>
+          <a:noFill/>
+        </p:spPr>
+        <p:txBody>
+          <a:bodyPr wrap="square" anchor="t">
+            <a:spAutoFit/>
+          </a:bodyPr>
+          <a:lstStyle/>
+          <a:p>
+            <a:pPr algn="ctr">
               <a:spcAft>
-                <a:spcPts val="800"/>
+                <a:spcPts val="200"/>
               </a:spcAft>
             </a:pPr>
             <a:r>
-              <a:rPr sz="1600" b="0">
+              <a:rPr sz="1100" b="0">
+                <a:solidFill>
+                  <a:srgbClr val="5A6577"/>
+                </a:solidFill>
+              </a:rPr>
+              <a:t>Sharp nick (top), hairline crack (bottom): orange = truth, blue = found</a:t>
+            </a:r>
+          </a:p>
+        </p:txBody>
+      </p:sp>
+      <p:sp>
+        <p:nvSpPr>
+          <p:cNvPr id="9" name="TextBox 8"/>
+          <p:cNvSpPr txBox="1"/>
+          <p:nvPr/>
+        </p:nvSpPr>
+        <p:spPr>
+          <a:xfrm>
+            <a:off x="548640" y="4622292"/>
+            <a:ext cx="6583680" cy="1234440"/>
+          </a:xfrm>
+          <a:prstGeom prst="rect">
+            <a:avLst/>
+          </a:prstGeom>
+          <a:noFill/>
+        </p:spPr>
+        <p:txBody>
+          <a:bodyPr wrap="square">
+            <a:spAutoFit/>
+          </a:bodyPr>
+          <a:lstStyle/>
+          <a:p>
+            <a:pPr>
+              <a:spcAft>
+                <a:spcPts val="900"/>
+              </a:spcAft>
+            </a:pPr>
+            <a:r>
+              <a:rPr sz="1300">
+                <a:solidFill>
+                  <a:srgbClr val="0047BB"/>
+                </a:solidFill>
+              </a:rPr>
+              <a:t>▪  </a:t>
+            </a:r>
+            <a:r>
+              <a:rPr sz="1300">
                 <a:solidFill>
                   <a:srgbClr val="1F2937"/>
                 </a:solidFill>
               </a:rPr>
-              <a:t>•  Compare the frozen pipeline’s 3D estimates with metrology; test robustness to specular reflection and sensor noise</a:t>
+              <a:t>False alarms 6/48 (12.5%) exceed the 5% target set on Rotor37: recalibration on these designs is required.</a:t>
+            </a:r>
+          </a:p>
+        </p:txBody>
+      </p:sp>
+    </p:spTree>
+  </p:cSld>
+  <p:clrMapOvr>
+    <a:masterClrMapping/>
+  </p:clrMapOvr>
+</p:sld>
+</file>
+
+<file path=ppt/slides/slide17.xml><?xml version="1.0" encoding="utf-8"?>
+<p:sld xmlns:a="http://schemas.openxmlformats.org/drawingml/2006/main" xmlns:p="http://schemas.openxmlformats.org/presentationml/2006/main" xmlns:r="http://schemas.openxmlformats.org/officeDocument/2006/relationships">
+  <p:cSld>
+    <p:spTree>
+      <p:nvGrpSpPr>
+        <p:cNvPr id="1" name=""/>
+        <p:cNvGrpSpPr/>
+        <p:nvPr/>
+      </p:nvGrpSpPr>
+      <p:grpSpPr/>
+      <p:sp>
+        <p:nvSpPr>
+          <p:cNvPr id="2" name="Title 1"/>
+          <p:cNvSpPr>
+            <a:spLocks noGrp="1"/>
+          </p:cNvSpPr>
+          <p:nvPr>
+            <p:ph type="title"/>
+          </p:nvPr>
+        </p:nvSpPr>
+        <p:spPr/>
+        <p:txBody>
+          <a:bodyPr/>
+          <a:lstStyle/>
+          <a:p>
+            <a:r>
+              <a:rPr sz="2100" b="1"/>
+              <a:t>Physical specialists and a judge recognise the damage type</a:t>
+            </a:r>
+          </a:p>
+        </p:txBody>
+      </p:sp>
+      <p:sp>
+        <p:nvSpPr>
+          <p:cNvPr id="3" name="TextBox 2"/>
+          <p:cNvSpPr txBox="1"/>
+          <p:nvPr/>
+        </p:nvSpPr>
+        <p:spPr>
+          <a:xfrm>
+            <a:off x="11155680" y="6446520"/>
+            <a:ext cx="822960" cy="320040"/>
+          </a:xfrm>
+          <a:prstGeom prst="rect">
+            <a:avLst/>
+          </a:prstGeom>
+          <a:noFill/>
+        </p:spPr>
+        <p:txBody>
+          <a:bodyPr wrap="none">
+            <a:spAutoFit/>
+          </a:bodyPr>
+          <a:lstStyle/>
+          <a:p>
+            <a:pPr algn="r"/>
+            <a:r>
+              <a:rPr sz="1100">
+                <a:solidFill>
+                  <a:srgbClr val="5A6577"/>
+                </a:solidFill>
+              </a:rPr>
+              <a:t>13</a:t>
+            </a:r>
+          </a:p>
+        </p:txBody>
+      </p:sp>
+      <p:sp>
+        <p:nvSpPr>
+          <p:cNvPr id="4" name="TextBox 3"/>
+          <p:cNvSpPr txBox="1"/>
+          <p:nvPr/>
+        </p:nvSpPr>
+        <p:spPr>
+          <a:xfrm>
+            <a:off x="502920" y="6446520"/>
+            <a:ext cx="5486400" cy="320040"/>
+          </a:xfrm>
+          <a:prstGeom prst="rect">
+            <a:avLst/>
+          </a:prstGeom>
+          <a:noFill/>
+        </p:spPr>
+        <p:txBody>
+          <a:bodyPr wrap="none">
+            <a:spAutoFit/>
+          </a:bodyPr>
+          <a:lstStyle/>
+          <a:p>
+            <a:r>
+              <a:rPr sz="1000" b="1">
+                <a:solidFill>
+                  <a:srgbClr val="0047BB"/>
+                </a:solidFill>
+              </a:rPr>
+              <a:t>RESULTS</a:t>
+            </a:r>
+          </a:p>
+        </p:txBody>
+      </p:sp>
+      <p:pic>
+        <p:nvPicPr>
+          <p:cNvPr id="5" name="Picture 4" descr="g_confusion.png"/>
+          <p:cNvPicPr>
+            <a:picLocks noChangeAspect="1"/>
+          </p:cNvPicPr>
+          <p:nvPr/>
+        </p:nvPicPr>
+        <p:blipFill>
+          <a:blip r:embed="rId2"/>
+          <a:stretch>
+            <a:fillRect/>
+          </a:stretch>
+        </p:blipFill>
+        <p:spPr>
+          <a:xfrm>
+            <a:off x="526002" y="1783080"/>
+            <a:ext cx="6263194" cy="3291840"/>
+          </a:xfrm>
+          <a:prstGeom prst="rect">
+            <a:avLst/>
+          </a:prstGeom>
+        </p:spPr>
+      </p:pic>
+      <p:sp>
+        <p:nvSpPr>
+          <p:cNvPr id="6" name="Rounded Rectangle 5"/>
+          <p:cNvSpPr/>
+          <p:nvPr/>
+        </p:nvSpPr>
+        <p:spPr>
+          <a:xfrm>
+            <a:off x="7223760" y="1865376"/>
+            <a:ext cx="2194560" cy="1028700"/>
+          </a:xfrm>
+          <a:prstGeom prst="roundRect">
+            <a:avLst/>
+          </a:prstGeom>
+          <a:solidFill>
+            <a:srgbClr val="F2F5FA"/>
+          </a:solidFill>
+          <a:ln>
+            <a:noFill/>
+          </a:ln>
+          <a:effectLst/>
+        </p:spPr>
+        <p:style>
+          <a:lnRef idx="1">
+            <a:schemeClr val="accent1"/>
+          </a:lnRef>
+          <a:fillRef idx="3">
+            <a:schemeClr val="accent1"/>
+          </a:fillRef>
+          <a:effectRef idx="2">
+            <a:schemeClr val="accent1"/>
+          </a:effectRef>
+          <a:fontRef idx="minor">
+            <a:schemeClr val="lt1"/>
+          </a:fontRef>
+        </p:style>
+        <p:txBody>
+          <a:bodyPr rtlCol="0" anchor="ctr" wrap="square"/>
+          <a:lstStyle/>
+          <a:p>
+            <a:pPr algn="ctr"/>
+            <a:r>
+              <a:rPr sz="1400" b="1">
+                <a:solidFill>
+                  <a:srgbClr val="0047BB"/>
+                </a:solidFill>
+              </a:rPr>
+              <a:t>22 / 22</a:t>
+            </a:r>
+          </a:p>
+          <a:p>
+            <a:pPr algn="ctr"/>
+            <a:r>
+              <a:rPr sz="1200" b="0">
+                <a:solidFill>
+                  <a:srgbClr val="0047BB"/>
+                </a:solidFill>
+              </a:rPr>
+              <a:t>cracks typed correctly</a:t>
+            </a:r>
+          </a:p>
+        </p:txBody>
+      </p:sp>
+      <p:sp>
+        <p:nvSpPr>
+          <p:cNvPr id="7" name="Rounded Rectangle 6"/>
+          <p:cNvSpPr/>
+          <p:nvPr/>
+        </p:nvSpPr>
+        <p:spPr>
+          <a:xfrm>
+            <a:off x="9601200" y="1865376"/>
+            <a:ext cx="2194560" cy="1028700"/>
+          </a:xfrm>
+          <a:prstGeom prst="roundRect">
+            <a:avLst/>
+          </a:prstGeom>
+          <a:solidFill>
+            <a:srgbClr val="F2F5FA"/>
+          </a:solidFill>
+          <a:ln>
+            <a:noFill/>
+          </a:ln>
+          <a:effectLst/>
+        </p:spPr>
+        <p:style>
+          <a:lnRef idx="1">
+            <a:schemeClr val="accent1"/>
+          </a:lnRef>
+          <a:fillRef idx="3">
+            <a:schemeClr val="accent1"/>
+          </a:fillRef>
+          <a:effectRef idx="2">
+            <a:schemeClr val="accent1"/>
+          </a:effectRef>
+          <a:fontRef idx="minor">
+            <a:schemeClr val="lt1"/>
+          </a:fontRef>
+        </p:style>
+        <p:txBody>
+          <a:bodyPr rtlCol="0" anchor="ctr" wrap="square"/>
+          <a:lstStyle/>
+          <a:p>
+            <a:pPr algn="ctr"/>
+            <a:r>
+              <a:rPr sz="1400" b="1">
+                <a:solidFill>
+                  <a:srgbClr val="0047BB"/>
+                </a:solidFill>
+              </a:rPr>
+              <a:t>9 / 15</a:t>
+            </a:r>
+          </a:p>
+          <a:p>
+            <a:pPr algn="ctr"/>
+            <a:r>
+              <a:rPr sz="1200" b="0">
+                <a:solidFill>
+                  <a:srgbClr val="0047BB"/>
+                </a:solidFill>
+              </a:rPr>
+              <a:t>nicks typed; 6 more uncertain</a:t>
+            </a:r>
+          </a:p>
+        </p:txBody>
+      </p:sp>
+      <p:sp>
+        <p:nvSpPr>
+          <p:cNvPr id="8" name="Rounded Rectangle 7"/>
+          <p:cNvSpPr/>
+          <p:nvPr/>
+        </p:nvSpPr>
+        <p:spPr>
+          <a:xfrm>
+            <a:off x="7223760" y="3058668"/>
+            <a:ext cx="2194560" cy="1028700"/>
+          </a:xfrm>
+          <a:prstGeom prst="roundRect">
+            <a:avLst/>
+          </a:prstGeom>
+          <a:solidFill>
+            <a:srgbClr val="F2F5FA"/>
+          </a:solidFill>
+          <a:ln>
+            <a:noFill/>
+          </a:ln>
+          <a:effectLst/>
+        </p:spPr>
+        <p:style>
+          <a:lnRef idx="1">
+            <a:schemeClr val="accent1"/>
+          </a:lnRef>
+          <a:fillRef idx="3">
+            <a:schemeClr val="accent1"/>
+          </a:fillRef>
+          <a:effectRef idx="2">
+            <a:schemeClr val="accent1"/>
+          </a:effectRef>
+          <a:fontRef idx="minor">
+            <a:schemeClr val="lt1"/>
+          </a:fontRef>
+        </p:style>
+        <p:txBody>
+          <a:bodyPr rtlCol="0" anchor="ctr" wrap="square"/>
+          <a:lstStyle/>
+          <a:p>
+            <a:pPr algn="ctr"/>
+            <a:r>
+              <a:rPr sz="1400" b="1">
+                <a:solidFill>
+                  <a:srgbClr val="0047BB"/>
+                </a:solidFill>
+              </a:rPr>
+              <a:t>42 / 43</a:t>
+            </a:r>
+          </a:p>
+          <a:p>
+            <a:pPr algn="ctr"/>
+            <a:r>
+              <a:rPr sz="1200" b="0">
+                <a:solidFill>
+                  <a:srgbClr val="0047BB"/>
+                </a:solidFill>
+              </a:rPr>
+              <a:t>location preserved</a:t>
+            </a:r>
+          </a:p>
+        </p:txBody>
+      </p:sp>
+      <p:sp>
+        <p:nvSpPr>
+          <p:cNvPr id="9" name="Rounded Rectangle 8"/>
+          <p:cNvSpPr/>
+          <p:nvPr/>
+        </p:nvSpPr>
+        <p:spPr>
+          <a:xfrm>
+            <a:off x="9601200" y="3058668"/>
+            <a:ext cx="2194560" cy="1028700"/>
+          </a:xfrm>
+          <a:prstGeom prst="roundRect">
+            <a:avLst/>
+          </a:prstGeom>
+          <a:solidFill>
+            <a:srgbClr val="F2F5FA"/>
+          </a:solidFill>
+          <a:ln>
+            <a:noFill/>
+          </a:ln>
+          <a:effectLst/>
+        </p:spPr>
+        <p:style>
+          <a:lnRef idx="1">
+            <a:schemeClr val="accent1"/>
+          </a:lnRef>
+          <a:fillRef idx="3">
+            <a:schemeClr val="accent1"/>
+          </a:fillRef>
+          <a:effectRef idx="2">
+            <a:schemeClr val="accent1"/>
+          </a:effectRef>
+          <a:fontRef idx="minor">
+            <a:schemeClr val="lt1"/>
+          </a:fontRef>
+        </p:style>
+        <p:txBody>
+          <a:bodyPr rtlCol="0" anchor="ctr" wrap="square"/>
+          <a:lstStyle/>
+          <a:p>
+            <a:pPr algn="ctr"/>
+            <a:r>
+              <a:rPr sz="1400" b="1">
+                <a:solidFill>
+                  <a:srgbClr val="0047BB"/>
+                </a:solidFill>
+              </a:rPr>
+              <a:t>2 → 9</a:t>
+            </a:r>
+          </a:p>
+          <a:p>
+            <a:pPr algn="ctr"/>
+            <a:r>
+              <a:rPr sz="1200" b="0">
+                <a:solidFill>
+                  <a:srgbClr val="0047BB"/>
+                </a:solidFill>
+              </a:rPr>
+              <a:t>nicks recognised, round 1 → 2</a:t>
+            </a:r>
+          </a:p>
+        </p:txBody>
+      </p:sp>
+      <p:sp>
+        <p:nvSpPr>
+          <p:cNvPr id="10" name="TextBox 9"/>
+          <p:cNvSpPr txBox="1"/>
+          <p:nvPr/>
+        </p:nvSpPr>
+        <p:spPr>
+          <a:xfrm>
+            <a:off x="7223760" y="4334256"/>
+            <a:ext cx="4572000" cy="1645920"/>
+          </a:xfrm>
+          <a:prstGeom prst="rect">
+            <a:avLst/>
+          </a:prstGeom>
+          <a:noFill/>
+        </p:spPr>
+        <p:txBody>
+          <a:bodyPr wrap="square">
+            <a:spAutoFit/>
+          </a:bodyPr>
+          <a:lstStyle/>
+          <a:p>
+            <a:pPr>
+              <a:spcAft>
+                <a:spcPts val="900"/>
+              </a:spcAft>
+            </a:pPr>
+            <a:r>
+              <a:rPr sz="1200">
+                <a:solidFill>
+                  <a:srgbClr val="0047BB"/>
+                </a:solidFill>
+              </a:rPr>
+              <a:t>▪  </a:t>
+            </a:r>
+            <a:r>
+              <a:rPr sz="1200">
+                <a:solidFill>
+                  <a:srgbClr val="1F2937"/>
+                </a:solidFill>
+              </a:rPr>
+              <a:t>Specialists: smooth dent, soft-ellipsoid notch, dark-line crack, colour patch</a:t>
+            </a:r>
+          </a:p>
+          <a:p>
+            <a:pPr>
+              <a:spcAft>
+                <a:spcPts val="900"/>
+              </a:spcAft>
+            </a:pPr>
+            <a:r>
+              <a:rPr sz="1200">
+                <a:solidFill>
+                  <a:srgbClr val="0047BB"/>
+                </a:solidFill>
+              </a:rPr>
+              <a:t>▪  </a:t>
+            </a:r>
+            <a:r>
+              <a:rPr sz="1200">
+                <a:solidFill>
+                  <a:srgbClr val="1F2937"/>
+                </a:solidFill>
+              </a:rPr>
+              <a:t>Judge: lowest loss wins; “uncertain” if within τ. Adapted from MedGuards</a:t>
+            </a:r>
+          </a:p>
+        </p:txBody>
+      </p:sp>
+      <p:sp>
+        <p:nvSpPr>
+          <p:cNvPr id="11" name="TextBox 10"/>
+          <p:cNvSpPr txBox="1"/>
+          <p:nvPr/>
+        </p:nvSpPr>
+        <p:spPr>
+          <a:xfrm>
+            <a:off x="502920" y="6053328"/>
+            <a:ext cx="10515600" cy="365760"/>
+          </a:xfrm>
+          <a:prstGeom prst="rect">
+            <a:avLst/>
+          </a:prstGeom>
+          <a:noFill/>
+        </p:spPr>
+        <p:txBody>
+          <a:bodyPr wrap="square">
+            <a:spAutoFit/>
+          </a:bodyPr>
+          <a:lstStyle/>
+          <a:p>
+            <a:r>
+              <a:rPr sz="1000" i="1">
+                <a:solidFill>
+                  <a:srgbClr val="5A6577"/>
+                </a:solidFill>
+              </a:rPr>
+              <a:t>Nick and crack: 32 realistic cases each (round 2); dent, stain, healthy: 24 each. Stain/nothing on damage = detector miss.</a:t>
+            </a:r>
+          </a:p>
+        </p:txBody>
+      </p:sp>
+    </p:spTree>
+  </p:cSld>
+  <p:clrMapOvr>
+    <a:masterClrMapping/>
+  </p:clrMapOvr>
+</p:sld>
+</file>
+
+<file path=ppt/slides/slide18.xml><?xml version="1.0" encoding="utf-8"?>
+<p:sld xmlns:a="http://schemas.openxmlformats.org/drawingml/2006/main" xmlns:p="http://schemas.openxmlformats.org/presentationml/2006/main" xmlns:r="http://schemas.openxmlformats.org/officeDocument/2006/relationships">
+  <p:cSld>
+    <p:spTree>
+      <p:nvGrpSpPr>
+        <p:cNvPr id="1" name=""/>
+        <p:cNvGrpSpPr/>
+        <p:nvPr/>
+      </p:nvGrpSpPr>
+      <p:grpSpPr/>
+      <p:sp>
+        <p:nvSpPr>
+          <p:cNvPr id="2" name="Title 1"/>
+          <p:cNvSpPr>
+            <a:spLocks noGrp="1"/>
+          </p:cNvSpPr>
+          <p:nvPr>
+            <p:ph type="title"/>
+          </p:nvPr>
+        </p:nvSpPr>
+        <p:spPr/>
+        <p:txBody>
+          <a:bodyPr/>
+          <a:lstStyle/>
+          <a:p>
+            <a:r>
+              <a:rPr sz="2100" b="1"/>
+              <a:t>Location is identifiable from two views; depth is not</a:t>
+            </a:r>
+          </a:p>
+        </p:txBody>
+      </p:sp>
+      <p:sp>
+        <p:nvSpPr>
+          <p:cNvPr id="3" name="TextBox 2"/>
+          <p:cNvSpPr txBox="1"/>
+          <p:nvPr/>
+        </p:nvSpPr>
+        <p:spPr>
+          <a:xfrm>
+            <a:off x="11155680" y="6446520"/>
+            <a:ext cx="822960" cy="320040"/>
+          </a:xfrm>
+          <a:prstGeom prst="rect">
+            <a:avLst/>
+          </a:prstGeom>
+          <a:noFill/>
+        </p:spPr>
+        <p:txBody>
+          <a:bodyPr wrap="none">
+            <a:spAutoFit/>
+          </a:bodyPr>
+          <a:lstStyle/>
+          <a:p>
+            <a:pPr algn="r"/>
+            <a:r>
+              <a:rPr sz="1100">
+                <a:solidFill>
+                  <a:srgbClr val="5A6577"/>
+                </a:solidFill>
+              </a:rPr>
+              <a:t>14</a:t>
+            </a:r>
+          </a:p>
+        </p:txBody>
+      </p:sp>
+      <p:sp>
+        <p:nvSpPr>
+          <p:cNvPr id="4" name="TextBox 3"/>
+          <p:cNvSpPr txBox="1"/>
+          <p:nvPr/>
+        </p:nvSpPr>
+        <p:spPr>
+          <a:xfrm>
+            <a:off x="502920" y="6446520"/>
+            <a:ext cx="5486400" cy="320040"/>
+          </a:xfrm>
+          <a:prstGeom prst="rect">
+            <a:avLst/>
+          </a:prstGeom>
+          <a:noFill/>
+        </p:spPr>
+        <p:txBody>
+          <a:bodyPr wrap="none">
+            <a:spAutoFit/>
+          </a:bodyPr>
+          <a:lstStyle/>
+          <a:p>
+            <a:r>
+              <a:rPr sz="1000" b="1">
+                <a:solidFill>
+                  <a:srgbClr val="0047BB"/>
+                </a:solidFill>
+              </a:rPr>
+              <a:t>FINDINGS</a:t>
+            </a:r>
+          </a:p>
+        </p:txBody>
+      </p:sp>
+      <p:pic>
+        <p:nvPicPr>
+          <p:cNvPr id="5" name="Picture 4" descr="cad6_1006_67.jpg"/>
+          <p:cNvPicPr>
+            <a:picLocks noChangeAspect="1"/>
+          </p:cNvPicPr>
+          <p:nvPr/>
+        </p:nvPicPr>
+        <p:blipFill>
+          <a:blip r:embed="rId2"/>
+          <a:stretch>
+            <a:fillRect/>
+          </a:stretch>
+        </p:blipFill>
+        <p:spPr>
+          <a:xfrm>
+            <a:off x="594074" y="1824228"/>
+            <a:ext cx="5578411" cy="1769364"/>
+          </a:xfrm>
+          <a:prstGeom prst="rect">
+            <a:avLst/>
+          </a:prstGeom>
+        </p:spPr>
+      </p:pic>
+      <p:sp>
+        <p:nvSpPr>
+          <p:cNvPr id="6" name="TextBox 5"/>
+          <p:cNvSpPr txBox="1"/>
+          <p:nvPr/>
+        </p:nvSpPr>
+        <p:spPr>
+          <a:xfrm>
+            <a:off x="457200" y="3634739"/>
+            <a:ext cx="5852160" cy="329184"/>
+          </a:xfrm>
+          <a:prstGeom prst="rect">
+            <a:avLst/>
+          </a:prstGeom>
+          <a:noFill/>
+        </p:spPr>
+        <p:txBody>
+          <a:bodyPr wrap="square" anchor="t">
+            <a:spAutoFit/>
+          </a:bodyPr>
+          <a:lstStyle/>
+          <a:p>
+            <a:pPr algn="ctr">
+              <a:spcAft>
+                <a:spcPts val="200"/>
+              </a:spcAft>
+            </a:pPr>
+            <a:r>
+              <a:rPr sz="1200" b="0">
+                <a:solidFill>
+                  <a:srgbClr val="5A6577"/>
+                </a:solidFill>
+              </a:rPr>
+              <a:t>Unseen design: correct location, depth 0.06 mm for a true 0.64 mm</a:t>
+            </a:r>
+          </a:p>
+        </p:txBody>
+      </p:sp>
+      <p:graphicFrame>
+        <p:nvGraphicFramePr>
+          <p:cNvPr id="7" name="Table 6"/>
+          <p:cNvGraphicFramePr>
+            <a:graphicFrameLocks noGrp="1"/>
+          </p:cNvGraphicFramePr>
+          <p:nvPr/>
+        </p:nvGraphicFramePr>
+        <p:xfrm>
+          <a:off x="548640" y="4128515"/>
+          <a:ext cx="5760720" cy="1536192"/>
+        </p:xfrm>
+        <a:graphic>
+          <a:graphicData uri="http://schemas.openxmlformats.org/drawingml/2006/table">
+            <a:tbl>
+              <a:tblPr firstRow="1" bandRow="1">
+                <a:tableStyleId>{5C22544A-7EE6-4342-B048-85BDC9FD1C3A}</a:tableStyleId>
+              </a:tblPr>
+              <a:tblGrid>
+                <a:gridCol w="3474720"/>
+                <a:gridCol w="2286000"/>
+              </a:tblGrid>
+              <a:tr h="384048">
+                <a:tc>
+                  <a:txBody>
+                    <a:bodyPr/>
+                    <a:lstStyle/>
+                    <a:p>
+                      <a:pPr algn="l"/>
+                      <a:r>
+                        <a:rPr sz="1200" b="1">
+                          <a:solidFill>
+                            <a:srgbClr val="FFFFFF"/>
+                          </a:solidFill>
+                        </a:rPr>
+                        <a:t>Depth, measured / true (median)</a:t>
+                      </a:r>
+                    </a:p>
+                  </a:txBody>
+                  <a:tcPr marL="73152" marR="73152">
+                    <a:solidFill>
+                      <a:srgbClr val="0047BB"/>
+                    </a:solidFill>
+                  </a:tcPr>
+                </a:tc>
+                <a:tc>
+                  <a:txBody>
+                    <a:bodyPr/>
+                    <a:lstStyle/>
+                    <a:p>
+                      <a:pPr algn="ctr"/>
+                    </a:p>
+                  </a:txBody>
+                  <a:tcPr marL="73152" marR="73152">
+                    <a:solidFill>
+                      <a:srgbClr val="0047BB"/>
+                    </a:solidFill>
+                  </a:tcPr>
+                </a:tc>
+              </a:tr>
+              <a:tr h="384048">
+                <a:tc>
+                  <a:txBody>
+                    <a:bodyPr/>
+                    <a:lstStyle/>
+                    <a:p>
+                      <a:pPr algn="l"/>
+                      <a:r>
+                        <a:rPr sz="1200" b="0">
+                          <a:solidFill>
+                            <a:srgbClr val="1F2937"/>
+                          </a:solidFill>
+                        </a:rPr>
+                        <a:t>Rotor37 sealed test</a:t>
+                      </a:r>
+                    </a:p>
+                  </a:txBody>
+                  <a:tcPr marL="73152" marR="73152">
+                    <a:solidFill>
+                      <a:srgbClr val="FFFFFF"/>
+                    </a:solidFill>
+                  </a:tcPr>
+                </a:tc>
+                <a:tc>
+                  <a:txBody>
+                    <a:bodyPr/>
+                    <a:lstStyle/>
+                    <a:p>
+                      <a:pPr algn="ctr"/>
+                      <a:r>
+                        <a:rPr sz="1200" b="0">
+                          <a:solidFill>
+                            <a:srgbClr val="1F2937"/>
+                          </a:solidFill>
+                        </a:rPr>
+                        <a:t>0.89</a:t>
+                      </a:r>
+                    </a:p>
+                  </a:txBody>
+                  <a:tcPr marL="73152" marR="73152">
+                    <a:solidFill>
+                      <a:srgbClr val="FFFFFF"/>
+                    </a:solidFill>
+                  </a:tcPr>
+                </a:tc>
+              </a:tr>
+              <a:tr h="384048">
+                <a:tc>
+                  <a:txBody>
+                    <a:bodyPr/>
+                    <a:lstStyle/>
+                    <a:p>
+                      <a:pPr algn="l"/>
+                      <a:r>
+                        <a:rPr sz="1200" b="0">
+                          <a:solidFill>
+                            <a:srgbClr val="1F2937"/>
+                          </a:solidFill>
+                        </a:rPr>
+                        <a:t>Industrial held-out</a:t>
+                      </a:r>
+                    </a:p>
+                  </a:txBody>
+                  <a:tcPr marL="73152" marR="73152">
+                    <a:solidFill>
+                      <a:srgbClr val="F2F5FA"/>
+                    </a:solidFill>
+                  </a:tcPr>
+                </a:tc>
+                <a:tc>
+                  <a:txBody>
+                    <a:bodyPr/>
+                    <a:lstStyle/>
+                    <a:p>
+                      <a:pPr algn="ctr"/>
+                      <a:r>
+                        <a:rPr sz="1200" b="0">
+                          <a:solidFill>
+                            <a:srgbClr val="1F2937"/>
+                          </a:solidFill>
+                        </a:rPr>
+                        <a:t>0.60</a:t>
+                      </a:r>
+                    </a:p>
+                  </a:txBody>
+                  <a:tcPr marL="73152" marR="73152">
+                    <a:solidFill>
+                      <a:srgbClr val="F2F5FA"/>
+                    </a:solidFill>
+                  </a:tcPr>
+                </a:tc>
+              </a:tr>
+              <a:tr h="384048">
+                <a:tc>
+                  <a:txBody>
+                    <a:bodyPr/>
+                    <a:lstStyle/>
+                    <a:p>
+                      <a:pPr algn="l"/>
+                      <a:r>
+                        <a:rPr sz="1200" b="0">
+                          <a:solidFill>
+                            <a:srgbClr val="1F2937"/>
+                          </a:solidFill>
+                        </a:rPr>
+                        <a:t>4 views instead of 2</a:t>
+                      </a:r>
+                    </a:p>
+                  </a:txBody>
+                  <a:tcPr marL="73152" marR="73152">
+                    <a:solidFill>
+                      <a:srgbClr val="FFFFFF"/>
+                    </a:solidFill>
+                  </a:tcPr>
+                </a:tc>
+                <a:tc>
+                  <a:txBody>
+                    <a:bodyPr/>
+                    <a:lstStyle/>
+                    <a:p>
+                      <a:pPr algn="ctr"/>
+                      <a:r>
+                        <a:rPr sz="1200" b="0">
+                          <a:solidFill>
+                            <a:srgbClr val="1F2937"/>
+                          </a:solidFill>
+                        </a:rPr>
+                        <a:t>no change (0.68 vs 0.71)</a:t>
+                      </a:r>
+                    </a:p>
+                  </a:txBody>
+                  <a:tcPr marL="73152" marR="73152">
+                    <a:solidFill>
+                      <a:srgbClr val="FFFFFF"/>
+                    </a:solidFill>
+                  </a:tcPr>
+                </a:tc>
+              </a:tr>
+            </a:tbl>
+          </a:graphicData>
+        </a:graphic>
+      </p:graphicFrame>
+      <p:sp>
+        <p:nvSpPr>
+          <p:cNvPr id="8" name="TextBox 7"/>
+          <p:cNvSpPr txBox="1"/>
+          <p:nvPr/>
+        </p:nvSpPr>
+        <p:spPr>
+          <a:xfrm>
+            <a:off x="6583680" y="1906524"/>
+            <a:ext cx="5212080" cy="3950208"/>
+          </a:xfrm>
+          <a:prstGeom prst="rect">
+            <a:avLst/>
+          </a:prstGeom>
+          <a:noFill/>
+        </p:spPr>
+        <p:txBody>
+          <a:bodyPr wrap="square">
+            <a:spAutoFit/>
+          </a:bodyPr>
+          <a:lstStyle/>
+          <a:p>
+            <a:pPr>
+              <a:spcAft>
+                <a:spcPts val="900"/>
+              </a:spcAft>
+            </a:pPr>
+            <a:r>
+              <a:rPr sz="1400">
+                <a:solidFill>
+                  <a:srgbClr val="0047BB"/>
+                </a:solidFill>
+              </a:rPr>
+              <a:t>▪  </a:t>
+            </a:r>
+            <a:r>
+              <a:rPr sz="1400" b="1">
+                <a:solidFill>
+                  <a:srgbClr val="1F2937"/>
+                </a:solidFill>
+              </a:rPr>
+              <a:t>Not a search failure.  </a:t>
+            </a:r>
+            <a:r>
+              <a:rPr sz="1400">
+                <a:solidFill>
+                  <a:srgbClr val="1F2937"/>
+                </a:solidFill>
+              </a:rPr>
+              <a:t>Better proposals and restarts at the true location recover ≤ 4 of 42 misses.</a:t>
+            </a:r>
+          </a:p>
+          <a:p>
+            <a:pPr>
+              <a:spcAft>
+                <a:spcPts val="900"/>
+              </a:spcAft>
+            </a:pPr>
+            <a:r>
+              <a:rPr sz="1400">
+                <a:solidFill>
+                  <a:srgbClr val="0047BB"/>
+                </a:solidFill>
+              </a:rPr>
+              <a:t>▪  </a:t>
+            </a:r>
+            <a:r>
+              <a:rPr sz="1400" b="1">
+                <a:solidFill>
+                  <a:srgbClr val="1F2937"/>
+                </a:solidFill>
+              </a:rPr>
+              <a:t>Not ambiguity alone.  </a:t>
+            </a:r>
+            <a:r>
+              <a:rPr sz="1400">
+                <a:solidFill>
+                  <a:srgbClr val="1F2937"/>
+                </a:solidFill>
+              </a:rPr>
+              <a:t>Profile-likelihood depth intervals are narrow yet contain the truth in 36 of 109 cases: a systematic bias.</a:t>
+            </a:r>
+          </a:p>
+          <a:p>
+            <a:pPr>
+              <a:spcAft>
+                <a:spcPts val="900"/>
+              </a:spcAft>
+            </a:pPr>
+            <a:r>
+              <a:rPr sz="1400">
+                <a:solidFill>
+                  <a:srgbClr val="0047BB"/>
+                </a:solidFill>
+              </a:rPr>
+              <a:t>▪  </a:t>
+            </a:r>
+            <a:r>
+              <a:rPr sz="1400" b="1">
+                <a:solidFill>
+                  <a:srgbClr val="1F2937"/>
+                </a:solidFill>
+              </a:rPr>
+              <a:t>Implication.  </a:t>
+            </a:r>
+            <a:r>
+              <a:rPr sz="1400">
+                <a:solidFill>
+                  <a:srgbClr val="1F2937"/>
+                </a:solidFill>
+              </a:rPr>
+              <a:t>Report location; treat depth as unresolved under passive two-view capture. Controlled (grazing) illumination is the next lever.</a:t>
+            </a:r>
+          </a:p>
+        </p:txBody>
+      </p:sp>
+    </p:spTree>
+  </p:cSld>
+  <p:clrMapOvr>
+    <a:masterClrMapping/>
+  </p:clrMapOvr>
+</p:sld>
+</file>
+
+<file path=ppt/slides/slide19.xml><?xml version="1.0" encoding="utf-8"?>
+<p:sld xmlns:a="http://schemas.openxmlformats.org/drawingml/2006/main" xmlns:p="http://schemas.openxmlformats.org/presentationml/2006/main" xmlns:r="http://schemas.openxmlformats.org/officeDocument/2006/relationships">
+  <p:cSld>
+    <p:spTree>
+      <p:nvGrpSpPr>
+        <p:cNvPr id="1" name=""/>
+        <p:cNvGrpSpPr/>
+        <p:nvPr/>
+      </p:nvGrpSpPr>
+      <p:grpSpPr/>
+      <p:sp>
+        <p:nvSpPr>
+          <p:cNvPr id="2" name="Title 1"/>
+          <p:cNvSpPr>
+            <a:spLocks noGrp="1"/>
+          </p:cNvSpPr>
+          <p:nvPr>
+            <p:ph type="title"/>
+          </p:nvPr>
+        </p:nvSpPr>
+        <p:spPr/>
+        <p:txBody>
+          <a:bodyPr/>
+          <a:lstStyle/>
+          <a:p>
+            <a:r>
+              <a:rPr sz="2400" b="1"/>
+              <a:t>Limitations</a:t>
+            </a:r>
+          </a:p>
+        </p:txBody>
+      </p:sp>
+      <p:sp>
+        <p:nvSpPr>
+          <p:cNvPr id="3" name="TextBox 2"/>
+          <p:cNvSpPr txBox="1"/>
+          <p:nvPr/>
+        </p:nvSpPr>
+        <p:spPr>
+          <a:xfrm>
+            <a:off x="11155680" y="6446520"/>
+            <a:ext cx="822960" cy="320040"/>
+          </a:xfrm>
+          <a:prstGeom prst="rect">
+            <a:avLst/>
+          </a:prstGeom>
+          <a:noFill/>
+        </p:spPr>
+        <p:txBody>
+          <a:bodyPr wrap="none">
+            <a:spAutoFit/>
+          </a:bodyPr>
+          <a:lstStyle/>
+          <a:p>
+            <a:pPr algn="r"/>
+            <a:r>
+              <a:rPr sz="1100">
+                <a:solidFill>
+                  <a:srgbClr val="5A6577"/>
+                </a:solidFill>
+              </a:rPr>
+              <a:t>15</a:t>
+            </a:r>
+          </a:p>
+        </p:txBody>
+      </p:sp>
+      <p:sp>
+        <p:nvSpPr>
+          <p:cNvPr id="4" name="TextBox 3"/>
+          <p:cNvSpPr txBox="1"/>
+          <p:nvPr/>
+        </p:nvSpPr>
+        <p:spPr>
+          <a:xfrm>
+            <a:off x="502920" y="6446520"/>
+            <a:ext cx="5486400" cy="320040"/>
+          </a:xfrm>
+          <a:prstGeom prst="rect">
+            <a:avLst/>
+          </a:prstGeom>
+          <a:noFill/>
+        </p:spPr>
+        <p:txBody>
+          <a:bodyPr wrap="none">
+            <a:spAutoFit/>
+          </a:bodyPr>
+          <a:lstStyle/>
+          <a:p>
+            <a:r>
+              <a:rPr sz="1000" b="1">
+                <a:solidFill>
+                  <a:srgbClr val="0047BB"/>
+                </a:solidFill>
+              </a:rPr>
+              <a:t>DISCUSSION</a:t>
+            </a:r>
+          </a:p>
+        </p:txBody>
+      </p:sp>
+      <p:sp>
+        <p:nvSpPr>
+          <p:cNvPr id="5" name="TextBox 4"/>
+          <p:cNvSpPr txBox="1"/>
+          <p:nvPr/>
+        </p:nvSpPr>
+        <p:spPr>
+          <a:xfrm>
+            <a:off x="548640" y="1865376"/>
+            <a:ext cx="11064240" cy="4114800"/>
+          </a:xfrm>
+          <a:prstGeom prst="rect">
+            <a:avLst/>
+          </a:prstGeom>
+          <a:noFill/>
+        </p:spPr>
+        <p:txBody>
+          <a:bodyPr wrap="square">
+            <a:spAutoFit/>
+          </a:bodyPr>
+          <a:lstStyle/>
+          <a:p>
+            <a:pPr>
+              <a:spcAft>
+                <a:spcPts val="900"/>
+              </a:spcAft>
+            </a:pPr>
+            <a:r>
+              <a:rPr sz="1500">
+                <a:solidFill>
+                  <a:srgbClr val="0047BB"/>
+                </a:solidFill>
+              </a:rPr>
+              <a:t>▪  </a:t>
+            </a:r>
+            <a:r>
+              <a:rPr sz="1500" b="1">
+                <a:solidFill>
+                  <a:srgbClr val="1F2937"/>
+                </a:solidFill>
+              </a:rPr>
+              <a:t>Rendered data only.  </a:t>
+            </a:r>
+            <a:r>
+              <a:rPr sz="1500">
+                <a:solidFill>
+                  <a:srgbClr val="1F2937"/>
+                </a:solidFill>
+              </a:rPr>
+              <a:t>All positive results use rendered images with known materials.</a:t>
+            </a:r>
+          </a:p>
+          <a:p>
+            <a:pPr>
+              <a:spcAft>
+                <a:spcPts val="900"/>
+              </a:spcAft>
+            </a:pPr>
+            <a:r>
+              <a:rPr sz="1500">
+                <a:solidFill>
+                  <a:srgbClr val="0047BB"/>
+                </a:solidFill>
+              </a:rPr>
+              <a:t>▪  </a:t>
+            </a:r>
+            <a:r>
+              <a:rPr sz="1500" b="1">
+                <a:solidFill>
+                  <a:srgbClr val="1F2937"/>
+                </a:solidFill>
+              </a:rPr>
+              <a:t>Real scans fail so far.  </a:t>
+            </a:r>
+            <a:r>
+              <a:rPr sz="1500">
+                <a:solidFill>
+                  <a:srgbClr val="1F2937"/>
+                </a:solidFill>
+              </a:rPr>
+              <a:t>On SiM3D real objects: AUROC 0.54, 0/22 defects detected; dominated by misregistration and texture.</a:t>
+            </a:r>
+          </a:p>
+          <a:p>
+            <a:pPr>
+              <a:spcAft>
+                <a:spcPts val="900"/>
+              </a:spcAft>
+            </a:pPr>
+            <a:r>
+              <a:rPr sz="1500">
+                <a:solidFill>
+                  <a:srgbClr val="0047BB"/>
+                </a:solidFill>
+              </a:rPr>
+              <a:t>▪  </a:t>
+            </a:r>
+            <a:r>
+              <a:rPr sz="1500" b="1">
+                <a:solidFill>
+                  <a:srgbClr val="1F2937"/>
+                </a:solidFill>
+              </a:rPr>
+              <a:t>Depth bias on new designs.  </a:t>
+            </a:r>
+            <a:r>
+              <a:rPr sz="1500">
+                <a:solidFill>
+                  <a:srgbClr val="1F2937"/>
+                </a:solidFill>
+              </a:rPr>
+              <a:t>Median 60% of true depth; not fixed by views or intervals.</a:t>
+            </a:r>
+          </a:p>
+          <a:p>
+            <a:pPr>
+              <a:spcAft>
+                <a:spcPts val="900"/>
+              </a:spcAft>
+            </a:pPr>
+            <a:r>
+              <a:rPr sz="1500">
+                <a:solidFill>
+                  <a:srgbClr val="0047BB"/>
+                </a:solidFill>
+              </a:rPr>
+              <a:t>▪  </a:t>
+            </a:r>
+            <a:r>
+              <a:rPr sz="1500" b="1">
+                <a:solidFill>
+                  <a:srgbClr val="1F2937"/>
+                </a:solidFill>
+              </a:rPr>
+              <a:t>Calibration transfer.  </a:t>
+            </a:r>
+            <a:r>
+              <a:rPr sz="1500">
+                <a:solidFill>
+                  <a:srgbClr val="1F2937"/>
+                </a:solidFill>
+              </a:rPr>
+              <a:t>12.5% false alarms on the defect-type set vs 5% target; requires per-design recalibration.</a:t>
+            </a:r>
+          </a:p>
+          <a:p>
+            <a:pPr>
+              <a:spcAft>
+                <a:spcPts val="900"/>
+              </a:spcAft>
+            </a:pPr>
+            <a:r>
+              <a:rPr sz="1500">
+                <a:solidFill>
+                  <a:srgbClr val="0047BB"/>
+                </a:solidFill>
+              </a:rPr>
+              <a:t>▪  </a:t>
+            </a:r>
+            <a:r>
+              <a:rPr sz="1500" b="1">
+                <a:solidFill>
+                  <a:srgbClr val="1F2937"/>
+                </a:solidFill>
+              </a:rPr>
+              <a:t>Nicks.  </a:t>
+            </a:r>
+            <a:r>
+              <a:rPr sz="1500">
+                <a:solidFill>
+                  <a:srgbClr val="1F2937"/>
+                </a:solidFill>
+              </a:rPr>
+              <a:t>11 of 32 not detected; 6 of 21 located nicks mistyped.</a:t>
+            </a:r>
+          </a:p>
+          <a:p>
+            <a:pPr>
+              <a:spcAft>
+                <a:spcPts val="900"/>
+              </a:spcAft>
+            </a:pPr>
+            <a:r>
+              <a:rPr sz="1500">
+                <a:solidFill>
+                  <a:srgbClr val="0047BB"/>
+                </a:solidFill>
+              </a:rPr>
+              <a:t>▪  </a:t>
+            </a:r>
+            <a:r>
+              <a:rPr sz="1500" b="1">
+                <a:solidFill>
+                  <a:srgbClr val="1F2937"/>
+                </a:solidFill>
+              </a:rPr>
+              <a:t>Realism gaps.  </a:t>
+            </a:r>
+            <a:r>
+              <a:rPr sz="1500">
+                <a:solidFill>
+                  <a:srgbClr val="1F2937"/>
+                </a:solidFill>
+              </a:rPr>
+              <a:t>No sensor noise, blur or material variation in the renders yet.</a:t>
+            </a:r>
+          </a:p>
+        </p:txBody>
+      </p:sp>
+    </p:spTree>
+  </p:cSld>
+  <p:clrMapOvr>
+    <a:masterClrMapping/>
+  </p:clrMapOvr>
+</p:sld>
+</file>
+
+<file path=ppt/slides/slide20.xml><?xml version="1.0" encoding="utf-8"?>
+<p:sld xmlns:a="http://schemas.openxmlformats.org/drawingml/2006/main" xmlns:p="http://schemas.openxmlformats.org/presentationml/2006/main" xmlns:r="http://schemas.openxmlformats.org/officeDocument/2006/relationships">
+  <p:cSld>
+    <p:spTree>
+      <p:nvGrpSpPr>
+        <p:cNvPr id="1" name=""/>
+        <p:cNvGrpSpPr/>
+        <p:nvPr/>
+      </p:nvGrpSpPr>
+      <p:grpSpPr/>
+      <p:sp>
+        <p:nvSpPr>
+          <p:cNvPr id="2" name="Title 1"/>
+          <p:cNvSpPr>
+            <a:spLocks noGrp="1"/>
+          </p:cNvSpPr>
+          <p:nvPr>
+            <p:ph type="title"/>
+          </p:nvPr>
+        </p:nvSpPr>
+        <p:spPr/>
+        <p:txBody>
+          <a:bodyPr/>
+          <a:lstStyle/>
+          <a:p>
+            <a:r>
+              <a:rPr sz="2100" b="1"/>
+              <a:t>Next: physical validation with measured ground truth</a:t>
+            </a:r>
+          </a:p>
+        </p:txBody>
+      </p:sp>
+      <p:sp>
+        <p:nvSpPr>
+          <p:cNvPr id="3" name="TextBox 2"/>
+          <p:cNvSpPr txBox="1"/>
+          <p:nvPr/>
+        </p:nvSpPr>
+        <p:spPr>
+          <a:xfrm>
+            <a:off x="11155680" y="6446520"/>
+            <a:ext cx="822960" cy="320040"/>
+          </a:xfrm>
+          <a:prstGeom prst="rect">
+            <a:avLst/>
+          </a:prstGeom>
+          <a:noFill/>
+        </p:spPr>
+        <p:txBody>
+          <a:bodyPr wrap="none">
+            <a:spAutoFit/>
+          </a:bodyPr>
+          <a:lstStyle/>
+          <a:p>
+            <a:pPr algn="r"/>
+            <a:r>
+              <a:rPr sz="1100">
+                <a:solidFill>
+                  <a:srgbClr val="5A6577"/>
+                </a:solidFill>
+              </a:rPr>
+              <a:t>16</a:t>
+            </a:r>
+          </a:p>
+        </p:txBody>
+      </p:sp>
+      <p:sp>
+        <p:nvSpPr>
+          <p:cNvPr id="4" name="TextBox 3"/>
+          <p:cNvSpPr txBox="1"/>
+          <p:nvPr/>
+        </p:nvSpPr>
+        <p:spPr>
+          <a:xfrm>
+            <a:off x="502920" y="6446520"/>
+            <a:ext cx="5486400" cy="320040"/>
+          </a:xfrm>
+          <a:prstGeom prst="rect">
+            <a:avLst/>
+          </a:prstGeom>
+          <a:noFill/>
+        </p:spPr>
+        <p:txBody>
+          <a:bodyPr wrap="none">
+            <a:spAutoFit/>
+          </a:bodyPr>
+          <a:lstStyle/>
+          <a:p>
+            <a:r>
+              <a:rPr sz="1000" b="1">
+                <a:solidFill>
+                  <a:srgbClr val="0047BB"/>
+                </a:solidFill>
+              </a:rPr>
+              <a:t>FUTURE WORK</a:t>
+            </a:r>
+          </a:p>
+        </p:txBody>
+      </p:sp>
+      <p:pic>
+        <p:nvPicPr>
+          <p:cNvPr id="5" name="Picture 4" descr="f_plan.png"/>
+          <p:cNvPicPr>
+            <a:picLocks noChangeAspect="1"/>
+          </p:cNvPicPr>
+          <p:nvPr/>
+        </p:nvPicPr>
+        <p:blipFill>
+          <a:blip r:embed="rId2"/>
+          <a:stretch>
+            <a:fillRect/>
+          </a:stretch>
+        </p:blipFill>
+        <p:spPr>
+          <a:xfrm>
+            <a:off x="1351439" y="1783080"/>
+            <a:ext cx="9458640" cy="1522476"/>
+          </a:xfrm>
+          <a:prstGeom prst="rect">
+            <a:avLst/>
+          </a:prstGeom>
+        </p:spPr>
+      </p:pic>
+      <p:sp>
+        <p:nvSpPr>
+          <p:cNvPr id="6" name="TextBox 5"/>
+          <p:cNvSpPr txBox="1"/>
+          <p:nvPr/>
+        </p:nvSpPr>
+        <p:spPr>
+          <a:xfrm>
+            <a:off x="548640" y="3511296"/>
+            <a:ext cx="5486400" cy="2468880"/>
+          </a:xfrm>
+          <a:prstGeom prst="rect">
+            <a:avLst/>
+          </a:prstGeom>
+          <a:noFill/>
+        </p:spPr>
+        <p:txBody>
+          <a:bodyPr wrap="square">
+            <a:spAutoFit/>
+          </a:bodyPr>
+          <a:lstStyle/>
+          <a:p>
+            <a:pPr>
+              <a:spcAft>
+                <a:spcPts val="900"/>
+              </a:spcAft>
+            </a:pPr>
+            <a:r>
+              <a:rPr sz="1400">
+                <a:solidFill>
+                  <a:srgbClr val="0047BB"/>
+                </a:solidFill>
+              </a:rPr>
+              <a:t>▪  </a:t>
+            </a:r>
+            <a:r>
+              <a:rPr sz="1400" b="1">
+                <a:solidFill>
+                  <a:srgbClr val="1F2937"/>
+                </a:solidFill>
+              </a:rPr>
+              <a:t>Specimens.  </a:t>
+            </a:r>
+            <a:r>
+              <a:rPr sz="1400">
+                <a:solidFill>
+                  <a:srgbClr val="1F2937"/>
+                </a:solidFill>
+              </a:rPr>
+              <a:t>10 stainless-steel printed blades; dents (ball bearings), nicks (files), stains (paint).</a:t>
+            </a:r>
+          </a:p>
+          <a:p>
+            <a:pPr>
+              <a:spcAft>
+                <a:spcPts val="900"/>
+              </a:spcAft>
+            </a:pPr>
+            <a:r>
+              <a:rPr sz="1400">
+                <a:solidFill>
+                  <a:srgbClr val="0047BB"/>
+                </a:solidFill>
+              </a:rPr>
+              <a:t>▪  </a:t>
+            </a:r>
+            <a:r>
+              <a:rPr sz="1400" b="1">
+                <a:solidFill>
+                  <a:srgbClr val="1F2937"/>
+                </a:solidFill>
+              </a:rPr>
+              <a:t>Ground truth.  </a:t>
+            </a:r>
+            <a:r>
+              <a:rPr sz="1400">
+                <a:solidFill>
+                  <a:srgbClr val="1F2937"/>
+                </a:solidFill>
+              </a:rPr>
+              <a:t>Dial gauge and 3D scanner.</a:t>
+            </a:r>
+          </a:p>
+          <a:p>
+            <a:pPr>
+              <a:spcAft>
+                <a:spcPts val="900"/>
+              </a:spcAft>
+            </a:pPr>
+            <a:r>
+              <a:rPr sz="1400">
+                <a:solidFill>
+                  <a:srgbClr val="0047BB"/>
+                </a:solidFill>
+              </a:rPr>
+              <a:t>▪  </a:t>
+            </a:r>
+            <a:r>
+              <a:rPr sz="1400" b="1">
+                <a:solidFill>
+                  <a:srgbClr val="1F2937"/>
+                </a:solidFill>
+              </a:rPr>
+              <a:t>Capture.  </a:t>
+            </a:r>
+            <a:r>
+              <a:rPr sz="1400">
+                <a:solidFill>
+                  <a:srgbClr val="1F2937"/>
+                </a:solidFill>
+              </a:rPr>
+              <a:t>2–7 calibrated cameras, ArUco markers, fixed and grazing light.</a:t>
+            </a:r>
+          </a:p>
+        </p:txBody>
+      </p:sp>
+      <p:sp>
+        <p:nvSpPr>
+          <p:cNvPr id="7" name="TextBox 6"/>
+          <p:cNvSpPr txBox="1"/>
+          <p:nvPr/>
+        </p:nvSpPr>
+        <p:spPr>
+          <a:xfrm>
+            <a:off x="6309360" y="3511296"/>
+            <a:ext cx="5486400" cy="2468880"/>
+          </a:xfrm>
+          <a:prstGeom prst="rect">
+            <a:avLst/>
+          </a:prstGeom>
+          <a:noFill/>
+        </p:spPr>
+        <p:txBody>
+          <a:bodyPr wrap="square">
+            <a:spAutoFit/>
+          </a:bodyPr>
+          <a:lstStyle/>
+          <a:p>
+            <a:pPr>
+              <a:spcAft>
+                <a:spcPts val="900"/>
+              </a:spcAft>
+            </a:pPr>
+            <a:r>
+              <a:rPr sz="1400">
+                <a:solidFill>
+                  <a:srgbClr val="0047BB"/>
+                </a:solidFill>
+              </a:rPr>
+              <a:t>▪  </a:t>
+            </a:r>
+            <a:r>
+              <a:rPr sz="1400" b="1">
+                <a:solidFill>
+                  <a:srgbClr val="1F2937"/>
+                </a:solidFill>
+              </a:rPr>
+              <a:t>Method.  </a:t>
+            </a:r>
+            <a:r>
+              <a:rPr sz="1400">
+                <a:solidFill>
+                  <a:srgbClr val="1F2937"/>
+                </a:solidFill>
+              </a:rPr>
+              <a:t>Per-design and class-specific thresholds; grazing-light depth.</a:t>
+            </a:r>
+          </a:p>
+          <a:p>
+            <a:pPr>
+              <a:spcAft>
+                <a:spcPts val="900"/>
+              </a:spcAft>
+            </a:pPr>
+            <a:r>
+              <a:rPr sz="1400">
+                <a:solidFill>
+                  <a:srgbClr val="0047BB"/>
+                </a:solidFill>
+              </a:rPr>
+              <a:t>▪  </a:t>
+            </a:r>
+            <a:r>
+              <a:rPr sz="1400" b="1">
+                <a:solidFill>
+                  <a:srgbClr val="1F2937"/>
+                </a:solidFill>
+              </a:rPr>
+              <a:t>Baselines.  </a:t>
+            </a:r>
+            <a:r>
+              <a:rPr sz="1400">
+                <a:solidFill>
+                  <a:srgbClr val="1F2937"/>
+                </a:solidFill>
+              </a:rPr>
+              <a:t>PatchCore; VGGT + Sim(3) alignment.</a:t>
+            </a:r>
+          </a:p>
+          <a:p>
+            <a:pPr>
+              <a:spcAft>
+                <a:spcPts val="900"/>
+              </a:spcAft>
+            </a:pPr>
+            <a:r>
+              <a:rPr sz="1400">
+                <a:solidFill>
+                  <a:srgbClr val="0047BB"/>
+                </a:solidFill>
+              </a:rPr>
+              <a:t>▪  </a:t>
+            </a:r>
+            <a:r>
+              <a:rPr sz="1400" b="1">
+                <a:solidFill>
+                  <a:srgbClr val="1F2937"/>
+                </a:solidFill>
+              </a:rPr>
+              <a:t>Realism.  </a:t>
+            </a:r>
+            <a:r>
+              <a:rPr sz="1400">
+                <a:solidFill>
+                  <a:srgbClr val="1F2937"/>
+                </a:solidFill>
+              </a:rPr>
+              <a:t>Sensor noise, blur, material variation in the benchmark.</a:t>
+            </a:r>
+          </a:p>
+        </p:txBody>
+      </p:sp>
+    </p:spTree>
+  </p:cSld>
+  <p:clrMapOvr>
+    <a:masterClrMapping/>
+  </p:clrMapOvr>
+</p:sld>
+</file>
+
+<file path=ppt/slides/slide21.xml><?xml version="1.0" encoding="utf-8"?>
+<p:sld xmlns:a="http://schemas.openxmlformats.org/drawingml/2006/main" xmlns:p="http://schemas.openxmlformats.org/presentationml/2006/main" xmlns:r="http://schemas.openxmlformats.org/officeDocument/2006/relationships">
+  <p:cSld>
+    <p:spTree>
+      <p:nvGrpSpPr>
+        <p:cNvPr id="1" name=""/>
+        <p:cNvGrpSpPr/>
+        <p:nvPr/>
+      </p:nvGrpSpPr>
+      <p:grpSpPr/>
+      <p:sp>
+        <p:nvSpPr>
+          <p:cNvPr id="2" name="Title 1"/>
+          <p:cNvSpPr>
+            <a:spLocks noGrp="1"/>
+          </p:cNvSpPr>
+          <p:nvPr>
+            <p:ph type="title"/>
+          </p:nvPr>
+        </p:nvSpPr>
+        <p:spPr/>
+        <p:txBody>
+          <a:bodyPr/>
+          <a:lstStyle/>
+          <a:p>
+            <a:r>
+              <a:rPr sz="2400" b="1"/>
+              <a:t>Summary of contributions</a:t>
+            </a:r>
+          </a:p>
+        </p:txBody>
+      </p:sp>
+      <p:sp>
+        <p:nvSpPr>
+          <p:cNvPr id="3" name="TextBox 2"/>
+          <p:cNvSpPr txBox="1"/>
+          <p:nvPr/>
+        </p:nvSpPr>
+        <p:spPr>
+          <a:xfrm>
+            <a:off x="11155680" y="6446520"/>
+            <a:ext cx="822960" cy="320040"/>
+          </a:xfrm>
+          <a:prstGeom prst="rect">
+            <a:avLst/>
+          </a:prstGeom>
+          <a:noFill/>
+        </p:spPr>
+        <p:txBody>
+          <a:bodyPr wrap="none">
+            <a:spAutoFit/>
+          </a:bodyPr>
+          <a:lstStyle/>
+          <a:p>
+            <a:pPr algn="r"/>
+            <a:r>
+              <a:rPr sz="1100">
+                <a:solidFill>
+                  <a:srgbClr val="5A6577"/>
+                </a:solidFill>
+              </a:rPr>
+              <a:t>17</a:t>
+            </a:r>
+          </a:p>
+        </p:txBody>
+      </p:sp>
+      <p:sp>
+        <p:nvSpPr>
+          <p:cNvPr id="4" name="TextBox 3"/>
+          <p:cNvSpPr txBox="1"/>
+          <p:nvPr/>
+        </p:nvSpPr>
+        <p:spPr>
+          <a:xfrm>
+            <a:off x="502920" y="6446520"/>
+            <a:ext cx="5486400" cy="320040"/>
+          </a:xfrm>
+          <a:prstGeom prst="rect">
+            <a:avLst/>
+          </a:prstGeom>
+          <a:noFill/>
+        </p:spPr>
+        <p:txBody>
+          <a:bodyPr wrap="none">
+            <a:spAutoFit/>
+          </a:bodyPr>
+          <a:lstStyle/>
+          <a:p>
+            <a:r>
+              <a:rPr sz="1000" b="1">
+                <a:solidFill>
+                  <a:srgbClr val="0047BB"/>
+                </a:solidFill>
+              </a:rPr>
+              <a:t>SUMMARY</a:t>
+            </a:r>
+          </a:p>
+        </p:txBody>
+      </p:sp>
+      <p:sp>
+        <p:nvSpPr>
+          <p:cNvPr id="5" name="TextBox 4"/>
+          <p:cNvSpPr txBox="1"/>
+          <p:nvPr/>
+        </p:nvSpPr>
+        <p:spPr>
+          <a:xfrm>
+            <a:off x="548640" y="1865376"/>
+            <a:ext cx="11064240" cy="4114800"/>
+          </a:xfrm>
+          <a:prstGeom prst="rect">
+            <a:avLst/>
+          </a:prstGeom>
+          <a:noFill/>
+        </p:spPr>
+        <p:txBody>
+          <a:bodyPr wrap="square">
+            <a:spAutoFit/>
+          </a:bodyPr>
+          <a:lstStyle/>
+          <a:p>
+            <a:pPr>
+              <a:spcAft>
+                <a:spcPts val="900"/>
+              </a:spcAft>
+            </a:pPr>
+            <a:r>
+              <a:rPr sz="1500">
+                <a:solidFill>
+                  <a:srgbClr val="0047BB"/>
+                </a:solidFill>
+              </a:rPr>
+              <a:t>▪  </a:t>
+            </a:r>
+            <a:r>
+              <a:rPr sz="1500" b="1">
+                <a:solidFill>
+                  <a:srgbClr val="1F2937"/>
+                </a:solidFill>
+              </a:rPr>
+              <a:t>Formulation.  </a:t>
+            </a:r>
+            <a:r>
+              <a:rPr sz="1500">
+                <a:solidFill>
+                  <a:srgbClr val="1F2937"/>
+                </a:solidFill>
+              </a:rPr>
+              <a:t>CAD-referenced defect estimation as a calibrated test with abstention, under explicit capture constraints.</a:t>
+            </a:r>
+          </a:p>
+          <a:p>
+            <a:pPr>
+              <a:spcAft>
+                <a:spcPts val="900"/>
+              </a:spcAft>
+            </a:pPr>
+            <a:r>
+              <a:rPr sz="1500">
+                <a:solidFill>
+                  <a:srgbClr val="0047BB"/>
+                </a:solidFill>
+              </a:rPr>
+              <a:t>▪  </a:t>
+            </a:r>
+            <a:r>
+              <a:rPr sz="1500" b="1">
+                <a:solidFill>
+                  <a:srgbClr val="1F2937"/>
+                </a:solidFill>
+              </a:rPr>
+              <a:t>Method.  </a:t>
+            </a:r>
+            <a:r>
+              <a:rPr sz="1500">
+                <a:solidFill>
+                  <a:srgbClr val="1F2937"/>
+                </a:solidFill>
+              </a:rPr>
+              <a:t>Nuisance profiling, score-test proposals and differentiable rendering; 51% vs ≤ 19% at equal false alarms.</a:t>
+            </a:r>
+          </a:p>
+          <a:p>
+            <a:pPr>
+              <a:spcAft>
+                <a:spcPts val="900"/>
+              </a:spcAft>
+            </a:pPr>
+            <a:r>
+              <a:rPr sz="1500">
+                <a:solidFill>
+                  <a:srgbClr val="0047BB"/>
+                </a:solidFill>
+              </a:rPr>
+              <a:t>▪  </a:t>
+            </a:r>
+            <a:r>
+              <a:rPr sz="1500" b="1">
+                <a:solidFill>
+                  <a:srgbClr val="1F2937"/>
+                </a:solidFill>
+              </a:rPr>
+              <a:t>Calibration.  </a:t>
+            </a:r>
+            <a:r>
+              <a:rPr sz="1500">
+                <a:solidFill>
+                  <a:srgbClr val="1F2937"/>
+                </a:solidFill>
+              </a:rPr>
+              <a:t>Shown to be necessary: textbook tests give 32–96% false alarms.</a:t>
+            </a:r>
+          </a:p>
+          <a:p>
+            <a:pPr>
+              <a:spcAft>
+                <a:spcPts val="900"/>
+              </a:spcAft>
+            </a:pPr>
+            <a:r>
+              <a:rPr sz="1500">
+                <a:solidFill>
+                  <a:srgbClr val="0047BB"/>
+                </a:solidFill>
+              </a:rPr>
+              <a:t>▪  </a:t>
+            </a:r>
+            <a:r>
+              <a:rPr sz="1500" b="1">
+                <a:solidFill>
+                  <a:srgbClr val="1F2937"/>
+                </a:solidFill>
+              </a:rPr>
+              <a:t>Identifiability finding.  </a:t>
+            </a:r>
+            <a:r>
+              <a:rPr sz="1500">
+                <a:solidFill>
+                  <a:srgbClr val="1F2937"/>
+                </a:solidFill>
+              </a:rPr>
+              <a:t>Location transfers across designs; depth does not from two passive views.</a:t>
+            </a:r>
+          </a:p>
+          <a:p>
+            <a:pPr>
+              <a:spcAft>
+                <a:spcPts val="900"/>
+              </a:spcAft>
+            </a:pPr>
+            <a:r>
+              <a:rPr sz="1500">
+                <a:solidFill>
+                  <a:srgbClr val="0047BB"/>
+                </a:solidFill>
+              </a:rPr>
+              <a:t>▪  </a:t>
+            </a:r>
+            <a:r>
+              <a:rPr sz="1500" b="1">
+                <a:solidFill>
+                  <a:srgbClr val="1F2937"/>
+                </a:solidFill>
+              </a:rPr>
+              <a:t>Defect typing.  </a:t>
+            </a:r>
+            <a:r>
+              <a:rPr sz="1500">
+                <a:solidFill>
+                  <a:srgbClr val="1F2937"/>
+                </a:solidFill>
+              </a:rPr>
+              <a:t>Physical specialists and a judge: cracks 22/22, nicks 9/15 with explicit uncertainty.</a:t>
+            </a:r>
+          </a:p>
+          <a:p>
+            <a:pPr>
+              <a:spcAft>
+                <a:spcPts val="900"/>
+              </a:spcAft>
+            </a:pPr>
+            <a:r>
+              <a:rPr sz="1500">
+                <a:solidFill>
+                  <a:srgbClr val="0047BB"/>
+                </a:solidFill>
+              </a:rPr>
+              <a:t>▪  </a:t>
+            </a:r>
+            <a:r>
+              <a:rPr sz="1500" b="1">
+                <a:solidFill>
+                  <a:srgbClr val="1F2937"/>
+                </a:solidFill>
+              </a:rPr>
+              <a:t>Benchmark.  </a:t>
+            </a:r>
+            <a:r>
+              <a:rPr sz="1500">
+                <a:solidFill>
+                  <a:srgbClr val="1F2937"/>
+                </a:solidFill>
+              </a:rPr>
+              <a:t>1,352 rendered cases on public and industrial aero-engine blades.</a:t>
             </a:r>
           </a:p>
         </p:txBody>
@@ -12208,7 +16549,7 @@
                   <a:srgbClr val="FFFFFF"/>
                 </a:solidFill>
               </a:rPr>
-              <a:t>Results dashboard: afeefaaazam03.github.io/3D-Jetblade/visual_results.html</a:t>
+              <a:t>Dashboard: afeefaaazam03.github.io/3D-Jetblade/visual_results.html</a:t>
             </a:r>
           </a:p>
         </p:txBody>
@@ -12252,15 +16593,82 @@
           <a:lstStyle/>
           <a:p>
             <a:r>
-              <a:rPr sz="3000"/>
-              <a:t>Problem Formulation</a:t>
+              <a:rPr sz="2100" b="1"/>
+              <a:t>A dark region in an image has several physically different causes</a:t>
+            </a:r>
+          </a:p>
+        </p:txBody>
+      </p:sp>
+      <p:sp>
+        <p:nvSpPr>
+          <p:cNvPr id="3" name="TextBox 2"/>
+          <p:cNvSpPr txBox="1"/>
+          <p:nvPr/>
+        </p:nvSpPr>
+        <p:spPr>
+          <a:xfrm>
+            <a:off x="11155680" y="6446520"/>
+            <a:ext cx="822960" cy="320040"/>
+          </a:xfrm>
+          <a:prstGeom prst="rect">
+            <a:avLst/>
+          </a:prstGeom>
+          <a:noFill/>
+        </p:spPr>
+        <p:txBody>
+          <a:bodyPr wrap="none">
+            <a:spAutoFit/>
+          </a:bodyPr>
+          <a:lstStyle/>
+          <a:p>
+            <a:pPr algn="r"/>
+            <a:r>
+              <a:rPr sz="1100">
+                <a:solidFill>
+                  <a:srgbClr val="5A6577"/>
+                </a:solidFill>
+              </a:rPr>
+              <a:t>2</a:t>
+            </a:r>
+          </a:p>
+        </p:txBody>
+      </p:sp>
+      <p:sp>
+        <p:nvSpPr>
+          <p:cNvPr id="4" name="TextBox 3"/>
+          <p:cNvSpPr txBox="1"/>
+          <p:nvPr/>
+        </p:nvSpPr>
+        <p:spPr>
+          <a:xfrm>
+            <a:off x="502920" y="6446520"/>
+            <a:ext cx="5486400" cy="320040"/>
+          </a:xfrm>
+          <a:prstGeom prst="rect">
+            <a:avLst/>
+          </a:prstGeom>
+          <a:noFill/>
+        </p:spPr>
+        <p:txBody>
+          <a:bodyPr wrap="none">
+            <a:spAutoFit/>
+          </a:bodyPr>
+          <a:lstStyle/>
+          <a:p>
+            <a:r>
+              <a:rPr sz="1000" b="1">
+                <a:solidFill>
+                  <a:srgbClr val="0047BB"/>
+                </a:solidFill>
+              </a:rPr>
+              <a:t>MOTIVATION</a:t>
             </a:r>
           </a:p>
         </p:txBody>
       </p:sp>
       <p:pic>
         <p:nvPicPr>
-          <p:cNvPr id="3" name="Picture 2" descr="f_causes.png"/>
+          <p:cNvPr id="5" name="Picture 4" descr="f_causes.png"/>
           <p:cNvPicPr>
             <a:picLocks noChangeAspect="1"/>
           </p:cNvPicPr>
@@ -12274,8 +16682,8 @@
         </p:blipFill>
         <p:spPr>
           <a:xfrm>
-            <a:off x="1942446" y="1824228"/>
-            <a:ext cx="8276626" cy="1810512"/>
+            <a:off x="2036499" y="1783080"/>
+            <a:ext cx="8088521" cy="1769364"/>
           </a:xfrm>
           <a:prstGeom prst="rect">
             <a:avLst/>
@@ -12284,14 +16692,14 @@
       </p:pic>
       <p:sp>
         <p:nvSpPr>
-          <p:cNvPr id="4" name="TextBox 3"/>
+          <p:cNvPr id="6" name="TextBox 5"/>
           <p:cNvSpPr txBox="1"/>
           <p:nvPr/>
         </p:nvSpPr>
         <p:spPr>
           <a:xfrm>
-            <a:off x="548640" y="3840480"/>
-            <a:ext cx="11064240" cy="2386584"/>
+            <a:off x="548640" y="3717036"/>
+            <a:ext cx="11064240" cy="2139696"/>
           </a:xfrm>
           <a:prstGeom prst="rect">
             <a:avLst/>
@@ -12299,53 +16707,101 @@
           <a:noFill/>
         </p:spPr>
         <p:txBody>
-          <a:bodyPr wrap="square" anchor="t">
+          <a:bodyPr wrap="square">
             <a:spAutoFit/>
           </a:bodyPr>
           <a:lstStyle/>
           <a:p>
-            <a:pPr algn="l">
+            <a:pPr>
               <a:spcAft>
-                <a:spcPts val="800"/>
+                <a:spcPts val="900"/>
               </a:spcAft>
             </a:pPr>
             <a:r>
-              <a:rPr sz="1700" b="0">
+              <a:rPr sz="1500">
+                <a:solidFill>
+                  <a:srgbClr val="0047BB"/>
+                </a:solidFill>
+              </a:rPr>
+              <a:t>▪  </a:t>
+            </a:r>
+            <a:r>
+              <a:rPr sz="1500" b="1">
                 <a:solidFill>
                   <a:srgbClr val="1F2937"/>
                 </a:solidFill>
               </a:rPr>
-              <a:t>•  The challenge: a dent, a stain, a lighting change and a 1° camera error can produce nearly identical pixel changes</a:t>
-            </a:r>
-          </a:p>
-          <a:p>
-            <a:pPr algn="l">
+              <a:t>Signal scale.  </a:t>
+            </a:r>
+            <a:r>
+              <a:rPr sz="1500">
+                <a:solidFill>
+                  <a:srgbClr val="1F2937"/>
+                </a:solidFill>
+              </a:rPr>
+              <a:t>A 0.1 mm dent changes a few hundred pixels by a few grey levels; a 1° pose error or a 10% lighting change alters thousands.</a:t>
+            </a:r>
+          </a:p>
+          <a:p>
+            <a:pPr>
               <a:spcAft>
-                <a:spcPts val="800"/>
+                <a:spcPts val="900"/>
               </a:spcAft>
             </a:pPr>
             <a:r>
-              <a:rPr sz="1700" b="0">
+              <a:rPr sz="1500">
+                <a:solidFill>
+                  <a:srgbClr val="0047BB"/>
+                </a:solidFill>
+              </a:rPr>
+              <a:t>▪  </a:t>
+            </a:r>
+            <a:r>
+              <a:rPr sz="1500" b="1">
                 <a:solidFill>
                   <a:srgbClr val="1F2937"/>
                 </a:solidFill>
               </a:rPr>
-              <a:t>•  The flaw: methods that must always answer either invent damage when the signal is weak or miss small defects</a:t>
-            </a:r>
-          </a:p>
-          <a:p>
-            <a:pPr algn="l">
+              <a:t>Consequence.  </a:t>
+            </a:r>
+            <a:r>
+              <a:rPr sz="1500">
+                <a:solidFill>
+                  <a:srgbClr val="1F2937"/>
+                </a:solidFill>
+              </a:rPr>
+              <a:t>A detector that flags any unexplained change confuses appearance with geometry; one that must always answer reports damage the images do not support.</a:t>
+            </a:r>
+          </a:p>
+          <a:p>
+            <a:pPr>
               <a:spcAft>
-                <a:spcPts val="800"/>
+                <a:spcPts val="900"/>
               </a:spcAft>
             </a:pPr>
             <a:r>
-              <a:rPr sz="1700" b="0">
+              <a:rPr sz="1500">
+                <a:solidFill>
+                  <a:srgbClr val="0047BB"/>
+                </a:solidFill>
+              </a:rPr>
+              <a:t>▪  </a:t>
+            </a:r>
+            <a:r>
+              <a:rPr sz="1500" b="1">
                 <a:solidFill>
                   <a:srgbClr val="1F2937"/>
                 </a:solidFill>
               </a:rPr>
-              <a:t>•  The objective: treat it as an identifiability problem: report 3D damage only when the evidence clears a calibrated threshold; otherwise abstain</a:t>
+              <a:t>Requirement.  </a:t>
+            </a:r>
+            <a:r>
+              <a:rPr sz="1500">
+                <a:solidFill>
+                  <a:srgbClr val="1F2937"/>
+                </a:solidFill>
+              </a:rPr>
+              <a:t>Separate geometric change from pose, illumination and reflectance, and abstain when they cannot be separated.</a:t>
             </a:r>
           </a:p>
         </p:txBody>
@@ -12384,46 +16840,22 @@
           <a:lstStyle/>
           <a:p>
             <a:r>
-              <a:rPr sz="3000"/>
-              <a:t>Methodology: The Pipeline</a:t>
-            </a:r>
-          </a:p>
-        </p:txBody>
-      </p:sp>
-      <p:pic>
-        <p:nvPicPr>
-          <p:cNvPr id="3" name="Picture 2" descr="f_method3.png"/>
-          <p:cNvPicPr>
-            <a:picLocks noChangeAspect="1"/>
-          </p:cNvPicPr>
-          <p:nvPr/>
-        </p:nvPicPr>
-        <p:blipFill>
-          <a:blip r:embed="rId2"/>
-          <a:stretch>
-            <a:fillRect/>
-          </a:stretch>
-        </p:blipFill>
-        <p:spPr>
-          <a:xfrm>
-            <a:off x="2135930" y="1824228"/>
-            <a:ext cx="7889658" cy="1563624"/>
-          </a:xfrm>
-          <a:prstGeom prst="rect">
-            <a:avLst/>
-          </a:prstGeom>
-        </p:spPr>
-      </p:pic>
-      <p:sp>
-        <p:nvSpPr>
-          <p:cNvPr id="4" name="TextBox 3"/>
+              <a:rPr sz="2100" b="1"/>
+              <a:t>We pose defect estimation as a calibrated test that can abstain</a:t>
+            </a:r>
+          </a:p>
+        </p:txBody>
+      </p:sp>
+      <p:sp>
+        <p:nvSpPr>
+          <p:cNvPr id="3" name="TextBox 2"/>
           <p:cNvSpPr txBox="1"/>
           <p:nvPr/>
         </p:nvSpPr>
         <p:spPr>
           <a:xfrm>
-            <a:off x="548640" y="3552444"/>
-            <a:ext cx="5760720" cy="2798064"/>
+            <a:off x="11155680" y="6446520"/>
+            <a:ext cx="822960" cy="320040"/>
           </a:xfrm>
           <a:prstGeom prst="rect">
             <a:avLst/>
@@ -12431,121 +16863,33 @@
           <a:noFill/>
         </p:spPr>
         <p:txBody>
-          <a:bodyPr wrap="square" anchor="t">
+          <a:bodyPr wrap="none">
             <a:spAutoFit/>
           </a:bodyPr>
           <a:lstStyle/>
           <a:p>
-            <a:pPr algn="l">
-              <a:spcAft>
-                <a:spcPts val="800"/>
-              </a:spcAft>
-            </a:pPr>
-            <a:r>
-              <a:rPr sz="1300" b="0">
-                <a:solidFill>
-                  <a:srgbClr val="1F2937"/>
+            <a:pPr algn="r"/>
+            <a:r>
+              <a:rPr sz="1100">
+                <a:solidFill>
+                  <a:srgbClr val="5A6577"/>
                 </a:solidFill>
               </a:rPr>
-              <a:t>•  Input: healthy CAD mesh (STEP) + 2–7 calibrated RGB views</a:t>
-            </a:r>
-          </a:p>
-          <a:p>
-            <a:pPr algn="l">
-              <a:spcAft>
-                <a:spcPts val="800"/>
-              </a:spcAft>
-            </a:pPr>
-            <a:r>
-              <a:rPr sz="1300" b="0">
-                <a:solidFill>
-                  <a:srgbClr val="1F2937"/>
-                </a:solidFill>
-              </a:rPr>
-              <a:t>•  Nuisance fit: camera pose from silhouettes; light-linear neural shader; light gains, smooth brightness field, stain patch → L(no damage)</a:t>
-            </a:r>
-          </a:p>
-          <a:p>
-            <a:pPr algn="l">
-              <a:spcAft>
-                <a:spcPts val="800"/>
-              </a:spcAft>
-            </a:pPr>
-            <a:r>
-              <a:rPr sz="1300" b="0">
-                <a:solidFill>
-                  <a:srgbClr val="1F2937"/>
-                </a:solidFill>
-              </a:rPr>
-              <a:t>•  Proposals: Rao score test over the whole surface (one backward pass)</a:t>
-            </a:r>
-          </a:p>
-          <a:p>
-            <a:pPr algn="l">
-              <a:spcAft>
-                <a:spcPts val="800"/>
-              </a:spcAft>
-            </a:pPr>
-            <a:r>
-              <a:rPr sz="1300" b="0">
-                <a:solidFill>
-                  <a:srgbClr val="1F2937"/>
-                </a:solidFill>
-              </a:rPr>
-              <a:t>•  Dent fit: parametric 3D dent, differentiable rendering (nvdiffrast), Adam → L(damage)</a:t>
-            </a:r>
-          </a:p>
-          <a:p>
-            <a:pPr algn="l">
-              <a:spcAft>
-                <a:spcPts val="800"/>
-              </a:spcAft>
-            </a:pPr>
-            <a:r>
-              <a:rPr sz="1300" b="0">
-                <a:solidFill>
-                  <a:srgbClr val="1F2937"/>
-                </a:solidFill>
-              </a:rPr>
-              <a:t>•  Evidence test: gain = L(no damage) − L(damage) &gt; calibrated threshold</a:t>
-            </a:r>
-          </a:p>
-        </p:txBody>
-      </p:sp>
-      <p:pic>
-        <p:nvPicPr>
-          <p:cNvPr id="5" name="Picture 4" descr="f_example.png"/>
-          <p:cNvPicPr>
-            <a:picLocks noChangeAspect="1"/>
-          </p:cNvPicPr>
-          <p:nvPr/>
-        </p:nvPicPr>
-        <p:blipFill>
-          <a:blip r:embed="rId3"/>
-          <a:stretch>
-            <a:fillRect/>
-          </a:stretch>
-        </p:blipFill>
-        <p:spPr>
-          <a:xfrm>
-            <a:off x="6492240" y="4017073"/>
-            <a:ext cx="5303520" cy="1292733"/>
-          </a:xfrm>
-          <a:prstGeom prst="rect">
-            <a:avLst/>
-          </a:prstGeom>
-        </p:spPr>
-      </p:pic>
-      <p:sp>
-        <p:nvSpPr>
-          <p:cNvPr id="6" name="TextBox 5"/>
+              <a:t>3</a:t>
+            </a:r>
+          </a:p>
+        </p:txBody>
+      </p:sp>
+      <p:sp>
+        <p:nvSpPr>
+          <p:cNvPr id="4" name="TextBox 3"/>
           <p:cNvSpPr txBox="1"/>
           <p:nvPr/>
         </p:nvSpPr>
         <p:spPr>
           <a:xfrm>
-            <a:off x="6492240" y="5815584"/>
-            <a:ext cx="5303520" cy="411480"/>
+            <a:off x="502920" y="6446520"/>
+            <a:ext cx="5486400" cy="320040"/>
           </a:xfrm>
           <a:prstGeom prst="rect">
             <a:avLst/>
@@ -12553,23 +16897,474 @@
           <a:noFill/>
         </p:spPr>
         <p:txBody>
-          <a:bodyPr wrap="square" anchor="t">
+          <a:bodyPr wrap="none">
             <a:spAutoFit/>
           </a:bodyPr>
           <a:lstStyle/>
           <a:p>
-            <a:pPr algn="ctr">
+            <a:r>
+              <a:rPr sz="1000" b="1">
+                <a:solidFill>
+                  <a:srgbClr val="0047BB"/>
+                </a:solidFill>
+              </a:rPr>
+              <a:t>PROBLEM FORMULATION</a:t>
+            </a:r>
+          </a:p>
+        </p:txBody>
+      </p:sp>
+      <p:graphicFrame>
+        <p:nvGraphicFramePr>
+          <p:cNvPr id="5" name="Table 4"/>
+          <p:cNvGraphicFramePr>
+            <a:graphicFrameLocks noGrp="1"/>
+          </p:cNvGraphicFramePr>
+          <p:nvPr/>
+        </p:nvGraphicFramePr>
+        <p:xfrm>
+          <a:off x="548640" y="1824228"/>
+          <a:ext cx="5760720" cy="3200400"/>
+        </p:xfrm>
+        <a:graphic>
+          <a:graphicData uri="http://schemas.openxmlformats.org/drawingml/2006/table">
+            <a:tbl>
+              <a:tblPr firstRow="1" bandRow="1">
+                <a:tableStyleId>{5C22544A-7EE6-4342-B048-85BDC9FD1C3A}</a:tableStyleId>
+              </a:tblPr>
+              <a:tblGrid>
+                <a:gridCol w="1463040"/>
+                <a:gridCol w="4297680"/>
+              </a:tblGrid>
+              <a:tr h="457200">
+                <a:tc>
+                  <a:txBody>
+                    <a:bodyPr/>
+                    <a:lstStyle/>
+                    <a:p>
+                      <a:pPr algn="l"/>
+                    </a:p>
+                  </a:txBody>
+                  <a:tcPr marL="73152" marR="73152">
+                    <a:solidFill>
+                      <a:srgbClr val="0047BB"/>
+                    </a:solidFill>
+                  </a:tcPr>
+                </a:tc>
+                <a:tc>
+                  <a:txBody>
+                    <a:bodyPr/>
+                    <a:lstStyle/>
+                    <a:p>
+                      <a:pPr algn="ctr"/>
+                      <a:r>
+                        <a:rPr sz="1200" b="1">
+                          <a:solidFill>
+                            <a:srgbClr val="FFFFFF"/>
+                          </a:solidFill>
+                        </a:rPr>
+                        <a:t>Definition</a:t>
+                      </a:r>
+                    </a:p>
+                  </a:txBody>
+                  <a:tcPr marL="73152" marR="73152">
+                    <a:solidFill>
+                      <a:srgbClr val="0047BB"/>
+                    </a:solidFill>
+                  </a:tcPr>
+                </a:tc>
+              </a:tr>
+              <a:tr h="457200">
+                <a:tc>
+                  <a:txBody>
+                    <a:bodyPr/>
+                    <a:lstStyle/>
+                    <a:p>
+                      <a:pPr algn="l"/>
+                      <a:r>
+                        <a:rPr sz="1200" b="0">
+                          <a:solidFill>
+                            <a:srgbClr val="1F2937"/>
+                          </a:solidFill>
+                        </a:rPr>
+                        <a:t>Input</a:t>
+                      </a:r>
+                    </a:p>
+                  </a:txBody>
+                  <a:tcPr marL="73152" marR="73152">
+                    <a:solidFill>
+                      <a:srgbClr val="FFFFFF"/>
+                    </a:solidFill>
+                  </a:tcPr>
+                </a:tc>
+                <a:tc>
+                  <a:txBody>
+                    <a:bodyPr/>
+                    <a:lstStyle/>
+                    <a:p>
+                      <a:pPr algn="ctr"/>
+                      <a:r>
+                        <a:rPr sz="1200" b="0">
+                          <a:solidFill>
+                            <a:srgbClr val="1F2937"/>
+                          </a:solidFill>
+                        </a:rPr>
+                        <a:t>Healthy CAD mesh + K = 2–7 calibrated views</a:t>
+                      </a:r>
+                    </a:p>
+                  </a:txBody>
+                  <a:tcPr marL="73152" marR="73152">
+                    <a:solidFill>
+                      <a:srgbClr val="FFFFFF"/>
+                    </a:solidFill>
+                  </a:tcPr>
+                </a:tc>
+              </a:tr>
+              <a:tr h="457200">
+                <a:tc>
+                  <a:txBody>
+                    <a:bodyPr/>
+                    <a:lstStyle/>
+                    <a:p>
+                      <a:pPr algn="l"/>
+                      <a:r>
+                        <a:rPr sz="1200" b="0">
+                          <a:solidFill>
+                            <a:srgbClr val="1F2937"/>
+                          </a:solidFill>
+                        </a:rPr>
+                        <a:t>H0 (nuisance)</a:t>
+                      </a:r>
+                    </a:p>
+                  </a:txBody>
+                  <a:tcPr marL="73152" marR="73152">
+                    <a:solidFill>
+                      <a:srgbClr val="F2F5FA"/>
+                    </a:solidFill>
+                  </a:tcPr>
+                </a:tc>
+                <a:tc>
+                  <a:txBody>
+                    <a:bodyPr/>
+                    <a:lstStyle/>
+                    <a:p>
+                      <a:pPr algn="ctr"/>
+                      <a:r>
+                        <a:rPr sz="1200" b="0">
+                          <a:solidFill>
+                            <a:srgbClr val="1F2937"/>
+                          </a:solidFill>
+                        </a:rPr>
+                        <a:t>Per-view pose, light gains, smooth brightness field, local albedo patch</a:t>
+                      </a:r>
+                    </a:p>
+                  </a:txBody>
+                  <a:tcPr marL="73152" marR="73152">
+                    <a:solidFill>
+                      <a:srgbClr val="F2F5FA"/>
+                    </a:solidFill>
+                  </a:tcPr>
+                </a:tc>
+              </a:tr>
+              <a:tr h="457200">
+                <a:tc>
+                  <a:txBody>
+                    <a:bodyPr/>
+                    <a:lstStyle/>
+                    <a:p>
+                      <a:pPr algn="l"/>
+                      <a:r>
+                        <a:rPr sz="1200" b="0">
+                          <a:solidFill>
+                            <a:srgbClr val="1F2937"/>
+                          </a:solidFill>
+                        </a:rPr>
+                        <a:t>H1 (damage)</a:t>
+                      </a:r>
+                    </a:p>
+                  </a:txBody>
+                  <a:tcPr marL="73152" marR="73152">
+                    <a:solidFill>
+                      <a:srgbClr val="FFFFFF"/>
+                    </a:solidFill>
+                  </a:tcPr>
+                </a:tc>
+                <a:tc>
+                  <a:txBody>
+                    <a:bodyPr/>
+                    <a:lstStyle/>
+                    <a:p>
+                      <a:pPr algn="ctr"/>
+                      <a:r>
+                        <a:rPr sz="1200" b="0">
+                          <a:solidFill>
+                            <a:srgbClr val="1F2937"/>
+                          </a:solidFill>
+                        </a:rPr>
+                        <a:t>H0 + a continuous parametric surface displacement</a:t>
+                      </a:r>
+                    </a:p>
+                  </a:txBody>
+                  <a:tcPr marL="73152" marR="73152">
+                    <a:solidFill>
+                      <a:srgbClr val="FFFFFF"/>
+                    </a:solidFill>
+                  </a:tcPr>
+                </a:tc>
+              </a:tr>
+              <a:tr h="457200">
+                <a:tc>
+                  <a:txBody>
+                    <a:bodyPr/>
+                    <a:lstStyle/>
+                    <a:p>
+                      <a:pPr algn="l"/>
+                      <a:r>
+                        <a:rPr sz="1200" b="0">
+                          <a:solidFill>
+                            <a:srgbClr val="1F2937"/>
+                          </a:solidFill>
+                        </a:rPr>
+                        <a:t>Evidence</a:t>
+                      </a:r>
+                    </a:p>
+                  </a:txBody>
+                  <a:tcPr marL="73152" marR="73152">
+                    <a:solidFill>
+                      <a:srgbClr val="F2F5FA"/>
+                    </a:solidFill>
+                  </a:tcPr>
+                </a:tc>
+                <a:tc>
+                  <a:txBody>
+                    <a:bodyPr/>
+                    <a:lstStyle/>
+                    <a:p>
+                      <a:pPr algn="ctr"/>
+                      <a:r>
+                        <a:rPr sz="1200" b="0">
+                          <a:solidFill>
+                            <a:srgbClr val="1F2937"/>
+                          </a:solidFill>
+                        </a:rPr>
+                        <a:t>gain = L(H0) − L(H1), robust image loss</a:t>
+                      </a:r>
+                    </a:p>
+                  </a:txBody>
+                  <a:tcPr marL="73152" marR="73152">
+                    <a:solidFill>
+                      <a:srgbClr val="F2F5FA"/>
+                    </a:solidFill>
+                  </a:tcPr>
+                </a:tc>
+              </a:tr>
+              <a:tr h="457200">
+                <a:tc>
+                  <a:txBody>
+                    <a:bodyPr/>
+                    <a:lstStyle/>
+                    <a:p>
+                      <a:pPr algn="l"/>
+                      <a:r>
+                        <a:rPr sz="1200" b="0">
+                          <a:solidFill>
+                            <a:srgbClr val="1F2937"/>
+                          </a:solidFill>
+                        </a:rPr>
+                        <a:t>Decision</a:t>
+                      </a:r>
+                    </a:p>
+                  </a:txBody>
+                  <a:tcPr marL="73152" marR="73152">
+                    <a:solidFill>
+                      <a:srgbClr val="FFFFFF"/>
+                    </a:solidFill>
+                  </a:tcPr>
+                </a:tc>
+                <a:tc>
+                  <a:txBody>
+                    <a:bodyPr/>
+                    <a:lstStyle/>
+                    <a:p>
+                      <a:pPr algn="ctr"/>
+                      <a:r>
+                        <a:rPr sz="1200" b="0">
+                          <a:solidFill>
+                            <a:srgbClr val="1F2937"/>
+                          </a:solidFill>
+                        </a:rPr>
+                        <a:t>Report if gain &gt; τ, else abstain</a:t>
+                      </a:r>
+                    </a:p>
+                  </a:txBody>
+                  <a:tcPr marL="73152" marR="73152">
+                    <a:solidFill>
+                      <a:srgbClr val="FFFFFF"/>
+                    </a:solidFill>
+                  </a:tcPr>
+                </a:tc>
+              </a:tr>
+              <a:tr h="457200">
+                <a:tc>
+                  <a:txBody>
+                    <a:bodyPr/>
+                    <a:lstStyle/>
+                    <a:p>
+                      <a:pPr algn="l"/>
+                      <a:r>
+                        <a:rPr sz="1200" b="0">
+                          <a:solidFill>
+                            <a:srgbClr val="1F2937"/>
+                          </a:solidFill>
+                        </a:rPr>
+                        <a:t>Calibration</a:t>
+                      </a:r>
+                    </a:p>
+                  </a:txBody>
+                  <a:tcPr marL="73152" marR="73152">
+                    <a:solidFill>
+                      <a:srgbClr val="F2F5FA"/>
+                    </a:solidFill>
+                  </a:tcPr>
+                </a:tc>
+                <a:tc>
+                  <a:txBody>
+                    <a:bodyPr/>
+                    <a:lstStyle/>
+                    <a:p>
+                      <a:pPr algn="ctr"/>
+                      <a:r>
+                        <a:rPr sz="1200" b="0">
+                          <a:solidFill>
+                            <a:srgbClr val="1F2937"/>
+                          </a:solidFill>
+                        </a:rPr>
+                        <a:t>τ = split-conformal quantile on healthy + stained blades (α = 5%)</a:t>
+                      </a:r>
+                    </a:p>
+                  </a:txBody>
+                  <a:tcPr marL="73152" marR="73152">
+                    <a:solidFill>
+                      <a:srgbClr val="F2F5FA"/>
+                    </a:solidFill>
+                  </a:tcPr>
+                </a:tc>
+              </a:tr>
+            </a:tbl>
+          </a:graphicData>
+        </a:graphic>
+      </p:graphicFrame>
+      <p:sp>
+        <p:nvSpPr>
+          <p:cNvPr id="6" name="TextBox 5"/>
+          <p:cNvSpPr txBox="1"/>
+          <p:nvPr/>
+        </p:nvSpPr>
+        <p:spPr>
+          <a:xfrm>
+            <a:off x="6629400" y="1865376"/>
+            <a:ext cx="5120640" cy="4032504"/>
+          </a:xfrm>
+          <a:prstGeom prst="rect">
+            <a:avLst/>
+          </a:prstGeom>
+          <a:noFill/>
+        </p:spPr>
+        <p:txBody>
+          <a:bodyPr wrap="square">
+            <a:spAutoFit/>
+          </a:bodyPr>
+          <a:lstStyle/>
+          <a:p>
+            <a:pPr>
               <a:spcAft>
-                <a:spcPts val="200"/>
+                <a:spcPts val="900"/>
               </a:spcAft>
             </a:pPr>
             <a:r>
-              <a:rPr sz="1200" b="0">
-                <a:solidFill>
-                  <a:srgbClr val="5A6577"/>
+              <a:rPr sz="1400">
+                <a:solidFill>
+                  <a:srgbClr val="0047BB"/>
                 </a:solidFill>
               </a:rPr>
-              <a:t>Real output: found 0.35 mm, true 0.36 mm</a:t>
+              <a:t>▪  </a:t>
+            </a:r>
+            <a:r>
+              <a:rPr sz="1400" b="1">
+                <a:solidFill>
+                  <a:srgbClr val="1F2937"/>
+                </a:solidFill>
+              </a:rPr>
+              <a:t>Constraints.  </a:t>
+            </a:r>
+            <a:r>
+              <a:rPr sz="1400">
+                <a:solidFill>
+                  <a:srgbClr val="1F2937"/>
+                </a:solidFill>
+              </a:rPr>
+              <a:t>Calibrated rig, fixed light positions, appearance change only through the brightness field and a local patch. Without such constraints, nuisance can explain any change.</a:t>
+            </a:r>
+          </a:p>
+          <a:p>
+            <a:pPr>
+              <a:spcAft>
+                <a:spcPts val="900"/>
+              </a:spcAft>
+            </a:pPr>
+            <a:r>
+              <a:rPr sz="1400">
+                <a:solidFill>
+                  <a:srgbClr val="0047BB"/>
+                </a:solidFill>
+              </a:rPr>
+              <a:t>▪  </a:t>
+            </a:r>
+            <a:r>
+              <a:rPr sz="1400" b="1">
+                <a:solidFill>
+                  <a:srgbClr val="1F2937"/>
+                </a:solidFill>
+              </a:rPr>
+              <a:t>Output.  </a:t>
+            </a:r>
+            <a:r>
+              <a:rPr sz="1400">
+                <a:solidFill>
+                  <a:srgbClr val="1F2937"/>
+                </a:solidFill>
+              </a:rPr>
+              <a:t>A per-vertex displacement (location, depth) when supported; otherwise “not supported by these views”.</a:t>
+            </a:r>
+          </a:p>
+          <a:p>
+            <a:pPr>
+              <a:spcAft>
+                <a:spcPts val="900"/>
+              </a:spcAft>
+            </a:pPr>
+            <a:r>
+              <a:rPr sz="1400">
+                <a:solidFill>
+                  <a:srgbClr val="0047BB"/>
+                </a:solidFill>
+              </a:rPr>
+              <a:t>▪  </a:t>
+            </a:r>
+            <a:r>
+              <a:rPr sz="1400" b="1">
+                <a:solidFill>
+                  <a:srgbClr val="1F2937"/>
+                </a:solidFill>
+              </a:rPr>
+              <a:t>Guarantee.  </a:t>
+            </a:r>
+            <a:r>
+              <a:rPr sz="1400">
+                <a:solidFill>
+                  <a:srgbClr val="1F2937"/>
+                </a:solidFill>
+              </a:rPr>
+              <a:t>False-change rate controlled on negatives exchangeable with the calibration set.</a:t>
             </a:r>
           </a:p>
         </p:txBody>
@@ -12608,46 +17403,22 @@
           <a:lstStyle/>
           <a:p>
             <a:r>
-              <a:rPr sz="2400"/>
-              <a:t>Multi-Class Classification: Specialists and Judge</a:t>
-            </a:r>
-          </a:p>
-        </p:txBody>
-      </p:sp>
-      <p:pic>
-        <p:nvPicPr>
-          <p:cNvPr id="3" name="Picture 2" descr="f_judge.png"/>
-          <p:cNvPicPr>
-            <a:picLocks noChangeAspect="1"/>
-          </p:cNvPicPr>
-          <p:nvPr/>
-        </p:nvPicPr>
-        <p:blipFill>
-          <a:blip r:embed="rId2"/>
-          <a:stretch>
-            <a:fillRect/>
-          </a:stretch>
-        </p:blipFill>
-        <p:spPr>
-          <a:xfrm>
-            <a:off x="1151513" y="1824228"/>
-            <a:ext cx="9858493" cy="2221992"/>
-          </a:xfrm>
-          <a:prstGeom prst="rect">
-            <a:avLst/>
-          </a:prstGeom>
-        </p:spPr>
-      </p:pic>
-      <p:sp>
-        <p:nvSpPr>
-          <p:cNvPr id="4" name="TextBox 3"/>
+              <a:rPr sz="2100" b="1"/>
+              <a:t>Prior work either localises anomalies in 2D or reconstructs a twin; none abstains</a:t>
+            </a:r>
+          </a:p>
+        </p:txBody>
+      </p:sp>
+      <p:sp>
+        <p:nvSpPr>
+          <p:cNvPr id="3" name="TextBox 2"/>
           <p:cNvSpPr txBox="1"/>
           <p:nvPr/>
         </p:nvSpPr>
         <p:spPr>
           <a:xfrm>
-            <a:off x="548640" y="4210812"/>
-            <a:ext cx="5852160" cy="2139696"/>
+            <a:off x="11155680" y="6446520"/>
+            <a:ext cx="822960" cy="320040"/>
           </a:xfrm>
           <a:prstGeom prst="rect">
             <a:avLst/>
@@ -12655,153 +17426,911 @@
           <a:noFill/>
         </p:spPr>
         <p:txBody>
-          <a:bodyPr wrap="square" anchor="t">
+          <a:bodyPr wrap="none">
             <a:spAutoFit/>
           </a:bodyPr>
           <a:lstStyle/>
           <a:p>
-            <a:pPr algn="l">
+            <a:pPr algn="r"/>
+            <a:r>
+              <a:rPr sz="1100">
+                <a:solidFill>
+                  <a:srgbClr val="5A6577"/>
+                </a:solidFill>
+              </a:rPr>
+              <a:t>4</a:t>
+            </a:r>
+          </a:p>
+        </p:txBody>
+      </p:sp>
+      <p:sp>
+        <p:nvSpPr>
+          <p:cNvPr id="4" name="TextBox 3"/>
+          <p:cNvSpPr txBox="1"/>
+          <p:nvPr/>
+        </p:nvSpPr>
+        <p:spPr>
+          <a:xfrm>
+            <a:off x="502920" y="6446520"/>
+            <a:ext cx="5486400" cy="320040"/>
+          </a:xfrm>
+          <a:prstGeom prst="rect">
+            <a:avLst/>
+          </a:prstGeom>
+          <a:noFill/>
+        </p:spPr>
+        <p:txBody>
+          <a:bodyPr wrap="none">
+            <a:spAutoFit/>
+          </a:bodyPr>
+          <a:lstStyle/>
+          <a:p>
+            <a:r>
+              <a:rPr sz="1000" b="1">
+                <a:solidFill>
+                  <a:srgbClr val="0047BB"/>
+                </a:solidFill>
+              </a:rPr>
+              <a:t>RELATED WORK</a:t>
+            </a:r>
+          </a:p>
+        </p:txBody>
+      </p:sp>
+      <p:graphicFrame>
+        <p:nvGraphicFramePr>
+          <p:cNvPr id="5" name="Table 4"/>
+          <p:cNvGraphicFramePr>
+            <a:graphicFrameLocks noGrp="1"/>
+          </p:cNvGraphicFramePr>
+          <p:nvPr/>
+        </p:nvGraphicFramePr>
+        <p:xfrm>
+          <a:off x="548640" y="1865376"/>
+          <a:ext cx="11064240" cy="3200400"/>
+        </p:xfrm>
+        <a:graphic>
+          <a:graphicData uri="http://schemas.openxmlformats.org/drawingml/2006/table">
+            <a:tbl>
+              <a:tblPr firstRow="1" bandRow="1">
+                <a:tableStyleId>{5C22544A-7EE6-4342-B048-85BDC9FD1C3A}</a:tableStyleId>
+              </a:tblPr>
+              <a:tblGrid>
+                <a:gridCol w="2651760"/>
+                <a:gridCol w="3840480"/>
+                <a:gridCol w="2103120"/>
+                <a:gridCol w="1280160"/>
+                <a:gridCol w="1188720"/>
+              </a:tblGrid>
+              <a:tr h="457200">
+                <a:tc>
+                  <a:txBody>
+                    <a:bodyPr/>
+                    <a:lstStyle/>
+                    <a:p>
+                      <a:pPr algn="l"/>
+                      <a:r>
+                        <a:rPr sz="1200" b="1">
+                          <a:solidFill>
+                            <a:srgbClr val="FFFFFF"/>
+                          </a:solidFill>
+                        </a:rPr>
+                        <a:t>Line of work</a:t>
+                      </a:r>
+                    </a:p>
+                  </a:txBody>
+                  <a:tcPr marL="73152" marR="73152">
+                    <a:solidFill>
+                      <a:srgbClr val="0047BB"/>
+                    </a:solidFill>
+                  </a:tcPr>
+                </a:tc>
+                <a:tc>
+                  <a:txBody>
+                    <a:bodyPr/>
+                    <a:lstStyle/>
+                    <a:p>
+                      <a:pPr algn="ctr"/>
+                      <a:r>
+                        <a:rPr sz="1200" b="1">
+                          <a:solidFill>
+                            <a:srgbClr val="FFFFFF"/>
+                          </a:solidFill>
+                        </a:rPr>
+                        <a:t>Representative</a:t>
+                      </a:r>
+                    </a:p>
+                  </a:txBody>
+                  <a:tcPr marL="73152" marR="73152">
+                    <a:solidFill>
+                      <a:srgbClr val="0047BB"/>
+                    </a:solidFill>
+                  </a:tcPr>
+                </a:tc>
+                <a:tc>
+                  <a:txBody>
+                    <a:bodyPr/>
+                    <a:lstStyle/>
+                    <a:p>
+                      <a:pPr algn="ctr"/>
+                      <a:r>
+                        <a:rPr sz="1200" b="1">
+                          <a:solidFill>
+                            <a:srgbClr val="FFFFFF"/>
+                          </a:solidFill>
+                        </a:rPr>
+                        <a:t>Output</a:t>
+                      </a:r>
+                    </a:p>
+                  </a:txBody>
+                  <a:tcPr marL="73152" marR="73152">
+                    <a:solidFill>
+                      <a:srgbClr val="0047BB"/>
+                    </a:solidFill>
+                  </a:tcPr>
+                </a:tc>
+                <a:tc>
+                  <a:txBody>
+                    <a:bodyPr/>
+                    <a:lstStyle/>
+                    <a:p>
+                      <a:pPr algn="ctr"/>
+                      <a:r>
+                        <a:rPr sz="1200" b="1">
+                          <a:solidFill>
+                            <a:srgbClr val="FFFFFF"/>
+                          </a:solidFill>
+                        </a:rPr>
+                        <a:t>3D change (mm)</a:t>
+                      </a:r>
+                    </a:p>
+                  </a:txBody>
+                  <a:tcPr marL="73152" marR="73152">
+                    <a:solidFill>
+                      <a:srgbClr val="0047BB"/>
+                    </a:solidFill>
+                  </a:tcPr>
+                </a:tc>
+                <a:tc>
+                  <a:txBody>
+                    <a:bodyPr/>
+                    <a:lstStyle/>
+                    <a:p>
+                      <a:pPr algn="ctr"/>
+                      <a:r>
+                        <a:rPr sz="1200" b="1">
+                          <a:solidFill>
+                            <a:srgbClr val="FFFFFF"/>
+                          </a:solidFill>
+                        </a:rPr>
+                        <a:t>Abstains</a:t>
+                      </a:r>
+                    </a:p>
+                  </a:txBody>
+                  <a:tcPr marL="73152" marR="73152">
+                    <a:solidFill>
+                      <a:srgbClr val="0047BB"/>
+                    </a:solidFill>
+                  </a:tcPr>
+                </a:tc>
+              </a:tr>
+              <a:tr h="457200">
+                <a:tc>
+                  <a:txBody>
+                    <a:bodyPr/>
+                    <a:lstStyle/>
+                    <a:p>
+                      <a:pPr algn="l"/>
+                      <a:r>
+                        <a:rPr sz="1200" b="0">
+                          <a:solidFill>
+                            <a:srgbClr val="1F2937"/>
+                          </a:solidFill>
+                        </a:rPr>
+                        <a:t>Pose/illumination-agnostic AD</a:t>
+                      </a:r>
+                    </a:p>
+                  </a:txBody>
+                  <a:tcPr marL="73152" marR="73152">
+                    <a:solidFill>
+                      <a:srgbClr val="FFFFFF"/>
+                    </a:solidFill>
+                  </a:tcPr>
+                </a:tc>
+                <a:tc>
+                  <a:txBody>
+                    <a:bodyPr/>
+                    <a:lstStyle/>
+                    <a:p>
+                      <a:pPr algn="ctr"/>
+                      <a:r>
+                        <a:rPr sz="1200" b="0">
+                          <a:solidFill>
+                            <a:srgbClr val="1F2937"/>
+                          </a:solidFill>
+                        </a:rPr>
+                        <a:t>PAD (NeurIPS 23), SplatPose (24), PIAD (CVPR 25)</a:t>
+                      </a:r>
+                    </a:p>
+                  </a:txBody>
+                  <a:tcPr marL="73152" marR="73152">
+                    <a:solidFill>
+                      <a:srgbClr val="FFFFFF"/>
+                    </a:solidFill>
+                  </a:tcPr>
+                </a:tc>
+                <a:tc>
+                  <a:txBody>
+                    <a:bodyPr/>
+                    <a:lstStyle/>
+                    <a:p>
+                      <a:pPr algn="ctr"/>
+                      <a:r>
+                        <a:rPr sz="1200" b="0">
+                          <a:solidFill>
+                            <a:srgbClr val="1F2937"/>
+                          </a:solidFill>
+                        </a:rPr>
+                        <a:t>2D anomaly map</a:t>
+                      </a:r>
+                    </a:p>
+                  </a:txBody>
+                  <a:tcPr marL="73152" marR="73152">
+                    <a:solidFill>
+                      <a:srgbClr val="FFFFFF"/>
+                    </a:solidFill>
+                  </a:tcPr>
+                </a:tc>
+                <a:tc>
+                  <a:txBody>
+                    <a:bodyPr/>
+                    <a:lstStyle/>
+                    <a:p>
+                      <a:pPr algn="ctr"/>
+                      <a:r>
+                        <a:rPr sz="1200" b="0">
+                          <a:solidFill>
+                            <a:srgbClr val="1F2937"/>
+                          </a:solidFill>
+                        </a:rPr>
+                        <a:t>✗</a:t>
+                      </a:r>
+                    </a:p>
+                  </a:txBody>
+                  <a:tcPr marL="73152" marR="73152">
+                    <a:solidFill>
+                      <a:srgbClr val="FFFFFF"/>
+                    </a:solidFill>
+                  </a:tcPr>
+                </a:tc>
+                <a:tc>
+                  <a:txBody>
+                    <a:bodyPr/>
+                    <a:lstStyle/>
+                    <a:p>
+                      <a:pPr algn="ctr"/>
+                      <a:r>
+                        <a:rPr sz="1200" b="0">
+                          <a:solidFill>
+                            <a:srgbClr val="1F2937"/>
+                          </a:solidFill>
+                        </a:rPr>
+                        <a:t>✗</a:t>
+                      </a:r>
+                    </a:p>
+                  </a:txBody>
+                  <a:tcPr marL="73152" marR="73152">
+                    <a:solidFill>
+                      <a:srgbClr val="FFFFFF"/>
+                    </a:solidFill>
+                  </a:tcPr>
+                </a:tc>
+              </a:tr>
+              <a:tr h="457200">
+                <a:tc>
+                  <a:txBody>
+                    <a:bodyPr/>
+                    <a:lstStyle/>
+                    <a:p>
+                      <a:pPr algn="l"/>
+                      <a:r>
+                        <a:rPr sz="1200" b="0">
+                          <a:solidFill>
+                            <a:srgbClr val="1F2937"/>
+                          </a:solidFill>
+                        </a:rPr>
+                        <a:t>Reference/CAD-based AD</a:t>
+                      </a:r>
+                    </a:p>
+                  </a:txBody>
+                  <a:tcPr marL="73152" marR="73152">
+                    <a:solidFill>
+                      <a:srgbClr val="F2F5FA"/>
+                    </a:solidFill>
+                  </a:tcPr>
+                </a:tc>
+                <a:tc>
+                  <a:txBody>
+                    <a:bodyPr/>
+                    <a:lstStyle/>
+                    <a:p>
+                      <a:pPr algn="ctr"/>
+                      <a:r>
+                        <a:rPr sz="1200" b="0">
+                          <a:solidFill>
+                            <a:srgbClr val="1F2937"/>
+                          </a:solidFill>
+                        </a:rPr>
+                        <a:t>Looking 3D (CVPR 24)</a:t>
+                      </a:r>
+                    </a:p>
+                  </a:txBody>
+                  <a:tcPr marL="73152" marR="73152">
+                    <a:solidFill>
+                      <a:srgbClr val="F2F5FA"/>
+                    </a:solidFill>
+                  </a:tcPr>
+                </a:tc>
+                <a:tc>
+                  <a:txBody>
+                    <a:bodyPr/>
+                    <a:lstStyle/>
+                    <a:p>
+                      <a:pPr algn="ctr"/>
+                      <a:r>
+                        <a:rPr sz="1200" b="0">
+                          <a:solidFill>
+                            <a:srgbClr val="1F2937"/>
+                          </a:solidFill>
+                        </a:rPr>
+                        <a:t>Class, box, mask</a:t>
+                      </a:r>
+                    </a:p>
+                  </a:txBody>
+                  <a:tcPr marL="73152" marR="73152">
+                    <a:solidFill>
+                      <a:srgbClr val="F2F5FA"/>
+                    </a:solidFill>
+                  </a:tcPr>
+                </a:tc>
+                <a:tc>
+                  <a:txBody>
+                    <a:bodyPr/>
+                    <a:lstStyle/>
+                    <a:p>
+                      <a:pPr algn="ctr"/>
+                      <a:r>
+                        <a:rPr sz="1200" b="0">
+                          <a:solidFill>
+                            <a:srgbClr val="1F2937"/>
+                          </a:solidFill>
+                        </a:rPr>
+                        <a:t>✗</a:t>
+                      </a:r>
+                    </a:p>
+                  </a:txBody>
+                  <a:tcPr marL="73152" marR="73152">
+                    <a:solidFill>
+                      <a:srgbClr val="F2F5FA"/>
+                    </a:solidFill>
+                  </a:tcPr>
+                </a:tc>
+                <a:tc>
+                  <a:txBody>
+                    <a:bodyPr/>
+                    <a:lstStyle/>
+                    <a:p>
+                      <a:pPr algn="ctr"/>
+                      <a:r>
+                        <a:rPr sz="1200" b="0">
+                          <a:solidFill>
+                            <a:srgbClr val="1F2937"/>
+                          </a:solidFill>
+                        </a:rPr>
+                        <a:t>✗</a:t>
+                      </a:r>
+                    </a:p>
+                  </a:txBody>
+                  <a:tcPr marL="73152" marR="73152">
+                    <a:solidFill>
+                      <a:srgbClr val="F2F5FA"/>
+                    </a:solidFill>
+                  </a:tcPr>
+                </a:tc>
+              </a:tr>
+              <a:tr h="457200">
+                <a:tc>
+                  <a:txBody>
+                    <a:bodyPr/>
+                    <a:lstStyle/>
+                    <a:p>
+                      <a:pPr algn="l"/>
+                      <a:r>
+                        <a:rPr sz="1200" b="0">
+                          <a:solidFill>
+                            <a:srgbClr val="1F2937"/>
+                          </a:solidFill>
+                        </a:rPr>
+                        <a:t>CAD-prior reconstruction</a:t>
+                      </a:r>
+                    </a:p>
+                  </a:txBody>
+                  <a:tcPr marL="73152" marR="73152">
+                    <a:solidFill>
+                      <a:srgbClr val="FFFFFF"/>
+                    </a:solidFill>
+                  </a:tcPr>
+                </a:tc>
+                <a:tc>
+                  <a:txBody>
+                    <a:bodyPr/>
+                    <a:lstStyle/>
+                    <a:p>
+                      <a:pPr algn="ctr"/>
+                      <a:r>
+                        <a:rPr sz="1200" b="0">
+                          <a:solidFill>
+                            <a:srgbClr val="1F2937"/>
+                          </a:solidFill>
+                        </a:rPr>
+                        <a:t>CAD-NeRF (24), CADSplat (26)</a:t>
+                      </a:r>
+                    </a:p>
+                  </a:txBody>
+                  <a:tcPr marL="73152" marR="73152">
+                    <a:solidFill>
+                      <a:srgbClr val="FFFFFF"/>
+                    </a:solidFill>
+                  </a:tcPr>
+                </a:tc>
+                <a:tc>
+                  <a:txBody>
+                    <a:bodyPr/>
+                    <a:lstStyle/>
+                    <a:p>
+                      <a:pPr algn="ctr"/>
+                      <a:r>
+                        <a:rPr sz="1200" b="0">
+                          <a:solidFill>
+                            <a:srgbClr val="1F2937"/>
+                          </a:solidFill>
+                        </a:rPr>
+                        <a:t>Digital twin</a:t>
+                      </a:r>
+                    </a:p>
+                  </a:txBody>
+                  <a:tcPr marL="73152" marR="73152">
+                    <a:solidFill>
+                      <a:srgbClr val="FFFFFF"/>
+                    </a:solidFill>
+                  </a:tcPr>
+                </a:tc>
+                <a:tc>
+                  <a:txBody>
+                    <a:bodyPr/>
+                    <a:lstStyle/>
+                    <a:p>
+                      <a:pPr algn="ctr"/>
+                      <a:r>
+                        <a:rPr sz="1200" b="0">
+                          <a:solidFill>
+                            <a:srgbClr val="1F2937"/>
+                          </a:solidFill>
+                        </a:rPr>
+                        <a:t>✗</a:t>
+                      </a:r>
+                    </a:p>
+                  </a:txBody>
+                  <a:tcPr marL="73152" marR="73152">
+                    <a:solidFill>
+                      <a:srgbClr val="FFFFFF"/>
+                    </a:solidFill>
+                  </a:tcPr>
+                </a:tc>
+                <a:tc>
+                  <a:txBody>
+                    <a:bodyPr/>
+                    <a:lstStyle/>
+                    <a:p>
+                      <a:pPr algn="ctr"/>
+                      <a:r>
+                        <a:rPr sz="1200" b="0">
+                          <a:solidFill>
+                            <a:srgbClr val="1F2937"/>
+                          </a:solidFill>
+                        </a:rPr>
+                        <a:t>✗</a:t>
+                      </a:r>
+                    </a:p>
+                  </a:txBody>
+                  <a:tcPr marL="73152" marR="73152">
+                    <a:solidFill>
+                      <a:srgbClr val="FFFFFF"/>
+                    </a:solidFill>
+                  </a:tcPr>
+                </a:tc>
+              </a:tr>
+              <a:tr h="457200">
+                <a:tc>
+                  <a:txBody>
+                    <a:bodyPr/>
+                    <a:lstStyle/>
+                    <a:p>
+                      <a:pPr algn="l"/>
+                      <a:r>
+                        <a:rPr sz="1200" b="0">
+                          <a:solidFill>
+                            <a:srgbClr val="1F2937"/>
+                          </a:solidFill>
+                        </a:rPr>
+                        <a:t>Blade defect datasets</a:t>
+                      </a:r>
+                    </a:p>
+                  </a:txBody>
+                  <a:tcPr marL="73152" marR="73152">
+                    <a:solidFill>
+                      <a:srgbClr val="F2F5FA"/>
+                    </a:solidFill>
+                  </a:tcPr>
+                </a:tc>
+                <a:tc>
+                  <a:txBody>
+                    <a:bodyPr/>
+                    <a:lstStyle/>
+                    <a:p>
+                      <a:pPr algn="ctr"/>
+                      <a:r>
+                        <a:rPr sz="1200" b="0">
+                          <a:solidFill>
+                            <a:srgbClr val="1F2937"/>
+                          </a:solidFill>
+                        </a:rPr>
+                        <a:t>BladeSynth (Sci. Data 25)</a:t>
+                      </a:r>
+                    </a:p>
+                  </a:txBody>
+                  <a:tcPr marL="73152" marR="73152">
+                    <a:solidFill>
+                      <a:srgbClr val="F2F5FA"/>
+                    </a:solidFill>
+                  </a:tcPr>
+                </a:tc>
+                <a:tc>
+                  <a:txBody>
+                    <a:bodyPr/>
+                    <a:lstStyle/>
+                    <a:p>
+                      <a:pPr algn="ctr"/>
+                      <a:r>
+                        <a:rPr sz="1200" b="0">
+                          <a:solidFill>
+                            <a:srgbClr val="1F2937"/>
+                          </a:solidFill>
+                        </a:rPr>
+                        <a:t>2D detection</a:t>
+                      </a:r>
+                    </a:p>
+                  </a:txBody>
+                  <a:tcPr marL="73152" marR="73152">
+                    <a:solidFill>
+                      <a:srgbClr val="F2F5FA"/>
+                    </a:solidFill>
+                  </a:tcPr>
+                </a:tc>
+                <a:tc>
+                  <a:txBody>
+                    <a:bodyPr/>
+                    <a:lstStyle/>
+                    <a:p>
+                      <a:pPr algn="ctr"/>
+                      <a:r>
+                        <a:rPr sz="1200" b="0">
+                          <a:solidFill>
+                            <a:srgbClr val="1F2937"/>
+                          </a:solidFill>
+                        </a:rPr>
+                        <a:t>✗</a:t>
+                      </a:r>
+                    </a:p>
+                  </a:txBody>
+                  <a:tcPr marL="73152" marR="73152">
+                    <a:solidFill>
+                      <a:srgbClr val="F2F5FA"/>
+                    </a:solidFill>
+                  </a:tcPr>
+                </a:tc>
+                <a:tc>
+                  <a:txBody>
+                    <a:bodyPr/>
+                    <a:lstStyle/>
+                    <a:p>
+                      <a:pPr algn="ctr"/>
+                      <a:r>
+                        <a:rPr sz="1200" b="0">
+                          <a:solidFill>
+                            <a:srgbClr val="1F2937"/>
+                          </a:solidFill>
+                        </a:rPr>
+                        <a:t>✗</a:t>
+                      </a:r>
+                    </a:p>
+                  </a:txBody>
+                  <a:tcPr marL="73152" marR="73152">
+                    <a:solidFill>
+                      <a:srgbClr val="F2F5FA"/>
+                    </a:solidFill>
+                  </a:tcPr>
+                </a:tc>
+              </a:tr>
+              <a:tr h="457200">
+                <a:tc>
+                  <a:txBody>
+                    <a:bodyPr/>
+                    <a:lstStyle/>
+                    <a:p>
+                      <a:pPr algn="l"/>
+                      <a:r>
+                        <a:rPr sz="1200" b="0">
+                          <a:solidFill>
+                            <a:srgbClr val="1F2937"/>
+                          </a:solidFill>
+                        </a:rPr>
+                        <a:t>3D AD benchmarks</a:t>
+                      </a:r>
+                    </a:p>
+                  </a:txBody>
+                  <a:tcPr marL="73152" marR="73152">
+                    <a:solidFill>
+                      <a:srgbClr val="FFFFFF"/>
+                    </a:solidFill>
+                  </a:tcPr>
+                </a:tc>
+                <a:tc>
+                  <a:txBody>
+                    <a:bodyPr/>
+                    <a:lstStyle/>
+                    <a:p>
+                      <a:pPr algn="ctr"/>
+                      <a:r>
+                        <a:rPr sz="1200" b="0">
+                          <a:solidFill>
+                            <a:srgbClr val="1F2937"/>
+                          </a:solidFill>
+                        </a:rPr>
+                        <a:t>MVTec 3D-AD, Real3D-AD, SiM3D</a:t>
+                      </a:r>
+                    </a:p>
+                  </a:txBody>
+                  <a:tcPr marL="73152" marR="73152">
+                    <a:solidFill>
+                      <a:srgbClr val="FFFFFF"/>
+                    </a:solidFill>
+                  </a:tcPr>
+                </a:tc>
+                <a:tc>
+                  <a:txBody>
+                    <a:bodyPr/>
+                    <a:lstStyle/>
+                    <a:p>
+                      <a:pPr algn="ctr"/>
+                      <a:r>
+                        <a:rPr sz="1200" b="0">
+                          <a:solidFill>
+                            <a:srgbClr val="1F2937"/>
+                          </a:solidFill>
+                        </a:rPr>
+                        <a:t>Anomaly score</a:t>
+                      </a:r>
+                    </a:p>
+                  </a:txBody>
+                  <a:tcPr marL="73152" marR="73152">
+                    <a:solidFill>
+                      <a:srgbClr val="FFFFFF"/>
+                    </a:solidFill>
+                  </a:tcPr>
+                </a:tc>
+                <a:tc>
+                  <a:txBody>
+                    <a:bodyPr/>
+                    <a:lstStyle/>
+                    <a:p>
+                      <a:pPr algn="ctr"/>
+                      <a:r>
+                        <a:rPr sz="1200" b="0">
+                          <a:solidFill>
+                            <a:srgbClr val="1F2937"/>
+                          </a:solidFill>
+                        </a:rPr>
+                        <a:t>✗</a:t>
+                      </a:r>
+                    </a:p>
+                  </a:txBody>
+                  <a:tcPr marL="73152" marR="73152">
+                    <a:solidFill>
+                      <a:srgbClr val="FFFFFF"/>
+                    </a:solidFill>
+                  </a:tcPr>
+                </a:tc>
+                <a:tc>
+                  <a:txBody>
+                    <a:bodyPr/>
+                    <a:lstStyle/>
+                    <a:p>
+                      <a:pPr algn="ctr"/>
+                      <a:r>
+                        <a:rPr sz="1200" b="0">
+                          <a:solidFill>
+                            <a:srgbClr val="1F2937"/>
+                          </a:solidFill>
+                        </a:rPr>
+                        <a:t>✗</a:t>
+                      </a:r>
+                    </a:p>
+                  </a:txBody>
+                  <a:tcPr marL="73152" marR="73152">
+                    <a:solidFill>
+                      <a:srgbClr val="FFFFFF"/>
+                    </a:solidFill>
+                  </a:tcPr>
+                </a:tc>
+              </a:tr>
+              <a:tr h="457200">
+                <a:tc>
+                  <a:txBody>
+                    <a:bodyPr/>
+                    <a:lstStyle/>
+                    <a:p>
+                      <a:pPr algn="l"/>
+                      <a:r>
+                        <a:rPr sz="1200" b="1">
+                          <a:solidFill>
+                            <a:srgbClr val="0047BB"/>
+                          </a:solidFill>
+                        </a:rPr>
+                        <a:t>This work</a:t>
+                      </a:r>
+                    </a:p>
+                  </a:txBody>
+                  <a:tcPr marL="73152" marR="73152">
+                    <a:solidFill>
+                      <a:srgbClr val="E3ECFA"/>
+                    </a:solidFill>
+                  </a:tcPr>
+                </a:tc>
+                <a:tc>
+                  <a:txBody>
+                    <a:bodyPr/>
+                    <a:lstStyle/>
+                    <a:p>
+                      <a:pPr algn="ctr"/>
+                      <a:r>
+                        <a:rPr sz="1200" b="1">
+                          <a:solidFill>
+                            <a:srgbClr val="0047BB"/>
+                          </a:solidFill>
+                        </a:rPr>
+                        <a:t>Render-and-test with calibration</a:t>
+                      </a:r>
+                    </a:p>
+                  </a:txBody>
+                  <a:tcPr marL="73152" marR="73152">
+                    <a:solidFill>
+                      <a:srgbClr val="E3ECFA"/>
+                    </a:solidFill>
+                  </a:tcPr>
+                </a:tc>
+                <a:tc>
+                  <a:txBody>
+                    <a:bodyPr/>
+                    <a:lstStyle/>
+                    <a:p>
+                      <a:pPr algn="ctr"/>
+                      <a:r>
+                        <a:rPr sz="1200" b="1">
+                          <a:solidFill>
+                            <a:srgbClr val="0047BB"/>
+                          </a:solidFill>
+                        </a:rPr>
+                        <a:t>3D displacement or abstain</a:t>
+                      </a:r>
+                    </a:p>
+                  </a:txBody>
+                  <a:tcPr marL="73152" marR="73152">
+                    <a:solidFill>
+                      <a:srgbClr val="E3ECFA"/>
+                    </a:solidFill>
+                  </a:tcPr>
+                </a:tc>
+                <a:tc>
+                  <a:txBody>
+                    <a:bodyPr/>
+                    <a:lstStyle/>
+                    <a:p>
+                      <a:pPr algn="ctr"/>
+                      <a:r>
+                        <a:rPr sz="1200" b="1">
+                          <a:solidFill>
+                            <a:srgbClr val="0047BB"/>
+                          </a:solidFill>
+                        </a:rPr>
+                        <a:t>✓</a:t>
+                      </a:r>
+                    </a:p>
+                  </a:txBody>
+                  <a:tcPr marL="73152" marR="73152">
+                    <a:solidFill>
+                      <a:srgbClr val="E3ECFA"/>
+                    </a:solidFill>
+                  </a:tcPr>
+                </a:tc>
+                <a:tc>
+                  <a:txBody>
+                    <a:bodyPr/>
+                    <a:lstStyle/>
+                    <a:p>
+                      <a:pPr algn="ctr"/>
+                      <a:r>
+                        <a:rPr sz="1200" b="1">
+                          <a:solidFill>
+                            <a:srgbClr val="0047BB"/>
+                          </a:solidFill>
+                        </a:rPr>
+                        <a:t>✓</a:t>
+                      </a:r>
+                    </a:p>
+                  </a:txBody>
+                  <a:tcPr marL="73152" marR="73152">
+                    <a:solidFill>
+                      <a:srgbClr val="E3ECFA"/>
+                    </a:solidFill>
+                  </a:tcPr>
+                </a:tc>
+              </a:tr>
+            </a:tbl>
+          </a:graphicData>
+        </a:graphic>
+      </p:graphicFrame>
+      <p:sp>
+        <p:nvSpPr>
+          <p:cNvPr id="6" name="TextBox 5"/>
+          <p:cNvSpPr txBox="1"/>
+          <p:nvPr/>
+        </p:nvSpPr>
+        <p:spPr>
+          <a:xfrm>
+            <a:off x="548640" y="5033772"/>
+            <a:ext cx="11064240" cy="905256"/>
+          </a:xfrm>
+          <a:prstGeom prst="rect">
+            <a:avLst/>
+          </a:prstGeom>
+          <a:noFill/>
+        </p:spPr>
+        <p:txBody>
+          <a:bodyPr wrap="square">
+            <a:spAutoFit/>
+          </a:bodyPr>
+          <a:lstStyle/>
+          <a:p>
+            <a:pPr>
               <a:spcAft>
-                <a:spcPts val="800"/>
+                <a:spcPts val="900"/>
               </a:spcAft>
             </a:pPr>
             <a:r>
-              <a:rPr sz="1500" b="0">
+              <a:rPr sz="1300">
+                <a:solidFill>
+                  <a:srgbClr val="0047BB"/>
+                </a:solidFill>
+              </a:rPr>
+              <a:t>▪  </a:t>
+            </a:r>
+            <a:r>
+              <a:rPr sz="1300">
                 <a:solidFill>
                   <a:srgbClr val="1F2937"/>
                 </a:solidFill>
               </a:rPr>
-              <a:t>•  Dent: smooth parametric profile (optional rim)</a:t>
-            </a:r>
-          </a:p>
-          <a:p>
-            <a:pPr algn="l">
-              <a:spcAft>
-                <a:spcPts val="800"/>
-              </a:spcAft>
-            </a:pPr>
-            <a:r>
-              <a:rPr sz="1500" b="0">
-                <a:solidFill>
-                  <a:srgbClr val="1F2937"/>
-                </a:solidFill>
-              </a:rPr>
-              <a:t>•  Nick: soft-edged ellipsoid carved from the surface</a:t>
-            </a:r>
-          </a:p>
-          <a:p>
-            <a:pPr algn="l">
-              <a:spcAft>
-                <a:spcPts val="800"/>
-              </a:spcAft>
-            </a:pPr>
-            <a:r>
-              <a:rPr sz="1500" b="0">
-                <a:solidFill>
-                  <a:srgbClr val="1F2937"/>
-                </a:solidFill>
-              </a:rPr>
-              <a:t>•  Crack: thin dark line + tiny groove along a fitted curved path</a:t>
-            </a:r>
-          </a:p>
-          <a:p>
-            <a:pPr algn="l">
-              <a:spcAft>
-                <a:spcPts val="800"/>
-              </a:spcAft>
-            </a:pPr>
-            <a:r>
-              <a:rPr sz="1500" b="0">
-                <a:solidFill>
-                  <a:srgbClr val="1F2937"/>
-                </a:solidFill>
-              </a:rPr>
-              <a:t>•  Stain: colour-only patch</a:t>
-            </a:r>
-          </a:p>
-        </p:txBody>
-      </p:sp>
-      <p:sp>
-        <p:nvSpPr>
-          <p:cNvPr id="5" name="Rounded Rectangle 4"/>
-          <p:cNvSpPr/>
-          <p:nvPr/>
-        </p:nvSpPr>
-        <p:spPr>
-          <a:xfrm>
-            <a:off x="6675120" y="4251960"/>
-            <a:ext cx="5029200" cy="1892807"/>
-          </a:xfrm>
-          <a:prstGeom prst="roundRect">
-            <a:avLst/>
-          </a:prstGeom>
-          <a:solidFill>
-            <a:srgbClr val="F2F5FA"/>
-          </a:solidFill>
-          <a:ln>
-            <a:noFill/>
-          </a:ln>
-          <a:effectLst/>
-        </p:spPr>
-        <p:style>
-          <a:lnRef idx="1">
-            <a:schemeClr val="accent1"/>
-          </a:lnRef>
-          <a:fillRef idx="3">
-            <a:schemeClr val="accent1"/>
-          </a:fillRef>
-          <a:effectRef idx="2">
-            <a:schemeClr val="accent1"/>
-          </a:effectRef>
-          <a:fontRef idx="minor">
-            <a:schemeClr val="lt1"/>
-          </a:fontRef>
-        </p:style>
-        <p:txBody>
-          <a:bodyPr rtlCol="0" anchor="ctr" wrap="square"/>
-          <a:lstStyle/>
-          <a:p>
-            <a:pPr algn="ctr"/>
-            <a:r>
-              <a:rPr sz="1500" b="1">
-                <a:solidFill>
-                  <a:srgbClr val="1F2937"/>
-                </a:solidFill>
-              </a:rPr>
-              <a:t>Judge: lowest rendering loss wins</a:t>
-            </a:r>
-          </a:p>
-          <a:p>
-            <a:pPr algn="ctr"/>
-            <a:r>
-              <a:rPr sz="1300" b="0">
-                <a:solidFill>
-                  <a:srgbClr val="1F2937"/>
-                </a:solidFill>
-              </a:rPr>
-              <a:t>"Type uncertain" if the runner-up is within the detection threshold</a:t>
-            </a:r>
-          </a:p>
-          <a:p>
-            <a:pPr algn="ctr"/>
-            <a:r>
-              <a:rPr sz="1300" b="0">
-                <a:solidFill>
-                  <a:srgbClr val="1F2937"/>
-                </a:solidFill>
-              </a:rPr>
-              <a:t>Labels only damage already detected: adds no false alarms</a:t>
-            </a:r>
-          </a:p>
-          <a:p>
-            <a:pPr algn="ctr"/>
-            <a:r>
-              <a:rPr sz="1300" b="0">
-                <a:solidFill>
-                  <a:srgbClr val="1F2937"/>
-                </a:solidFill>
-              </a:rPr>
-              <a:t>Idea adapted from MedGuards (multi-agent checking)</a:t>
+              <a:t>Building blocks: differentiable rasterisation (nvdiffrast), score and likelihood-ratio tests, split-conformal calibration.</a:t>
             </a:r>
           </a:p>
         </p:txBody>
@@ -12840,15 +18369,82 @@
           <a:lstStyle/>
           <a:p>
             <a:r>
-              <a:rPr sz="2400"/>
-              <a:t>Identifiability: Why Depth Is the Hard Part</a:t>
+              <a:rPr sz="2100" b="1"/>
+              <a:t>Method: nuisance profiling, score-test proposals and a calibrated decision</a:t>
+            </a:r>
+          </a:p>
+        </p:txBody>
+      </p:sp>
+      <p:sp>
+        <p:nvSpPr>
+          <p:cNvPr id="3" name="TextBox 2"/>
+          <p:cNvSpPr txBox="1"/>
+          <p:nvPr/>
+        </p:nvSpPr>
+        <p:spPr>
+          <a:xfrm>
+            <a:off x="11155680" y="6446520"/>
+            <a:ext cx="822960" cy="320040"/>
+          </a:xfrm>
+          <a:prstGeom prst="rect">
+            <a:avLst/>
+          </a:prstGeom>
+          <a:noFill/>
+        </p:spPr>
+        <p:txBody>
+          <a:bodyPr wrap="none">
+            <a:spAutoFit/>
+          </a:bodyPr>
+          <a:lstStyle/>
+          <a:p>
+            <a:pPr algn="r"/>
+            <a:r>
+              <a:rPr sz="1100">
+                <a:solidFill>
+                  <a:srgbClr val="5A6577"/>
+                </a:solidFill>
+              </a:rPr>
+              <a:t>5</a:t>
+            </a:r>
+          </a:p>
+        </p:txBody>
+      </p:sp>
+      <p:sp>
+        <p:nvSpPr>
+          <p:cNvPr id="4" name="TextBox 3"/>
+          <p:cNvSpPr txBox="1"/>
+          <p:nvPr/>
+        </p:nvSpPr>
+        <p:spPr>
+          <a:xfrm>
+            <a:off x="502920" y="6446520"/>
+            <a:ext cx="5486400" cy="320040"/>
+          </a:xfrm>
+          <a:prstGeom prst="rect">
+            <a:avLst/>
+          </a:prstGeom>
+          <a:noFill/>
+        </p:spPr>
+        <p:txBody>
+          <a:bodyPr wrap="none">
+            <a:spAutoFit/>
+          </a:bodyPr>
+          <a:lstStyle/>
+          <a:p>
+            <a:r>
+              <a:rPr sz="1000" b="1">
+                <a:solidFill>
+                  <a:srgbClr val="0047BB"/>
+                </a:solidFill>
+              </a:rPr>
+              <a:t>METHOD</a:t>
             </a:r>
           </a:p>
         </p:txBody>
       </p:sp>
       <p:pic>
         <p:nvPicPr>
-          <p:cNvPr id="3" name="Picture 2" descr="cad6_1006_67.jpg"/>
+          <p:cNvPr id="5" name="Picture 4" descr="g_arch.png"/>
           <p:cNvPicPr>
             <a:picLocks noChangeAspect="1"/>
           </p:cNvPicPr>
@@ -12862,8 +18458,8 @@
         </p:blipFill>
         <p:spPr>
           <a:xfrm>
-            <a:off x="620648" y="1865376"/>
-            <a:ext cx="5708142" cy="1810512"/>
+            <a:off x="1023664" y="1783080"/>
+            <a:ext cx="10114191" cy="3086100"/>
           </a:xfrm>
           <a:prstGeom prst="rect">
             <a:avLst/>
@@ -12872,14 +18468,14 @@
       </p:pic>
       <p:sp>
         <p:nvSpPr>
-          <p:cNvPr id="4" name="TextBox 3"/>
+          <p:cNvPr id="6" name="TextBox 5"/>
           <p:cNvSpPr txBox="1"/>
           <p:nvPr/>
         </p:nvSpPr>
         <p:spPr>
           <a:xfrm>
-            <a:off x="457200" y="3758184"/>
-            <a:ext cx="6035040" cy="411480"/>
+            <a:off x="548640" y="5033772"/>
+            <a:ext cx="11064240" cy="987552"/>
           </a:xfrm>
           <a:prstGeom prst="rect">
             <a:avLst/>
@@ -12887,183 +18483,39 @@
           <a:noFill/>
         </p:spPr>
         <p:txBody>
-          <a:bodyPr wrap="square" anchor="t">
+          <a:bodyPr wrap="square">
             <a:spAutoFit/>
           </a:bodyPr>
           <a:lstStyle/>
           <a:p>
-            <a:pPr algn="ctr">
+            <a:pPr>
               <a:spcAft>
-                <a:spcPts val="200"/>
+                <a:spcPts val="900"/>
               </a:spcAft>
             </a:pPr>
             <a:r>
-              <a:rPr sz="1300" b="0">
-                <a:solidFill>
-                  <a:srgbClr val="5A6577"/>
+              <a:rPr sz="1300">
+                <a:solidFill>
+                  <a:srgbClr val="0047BB"/>
                 </a:solidFill>
               </a:rPr>
-              <a:t>Unseen blade: found in the right place; true 0.64 mm, measured 0.06 mm</a:t>
-            </a:r>
-          </a:p>
-        </p:txBody>
-      </p:sp>
-      <p:sp>
-        <p:nvSpPr>
-          <p:cNvPr id="5" name="TextBox 4"/>
-          <p:cNvSpPr txBox="1"/>
-          <p:nvPr/>
-        </p:nvSpPr>
-        <p:spPr>
-          <a:xfrm>
-            <a:off x="6675120" y="1947672"/>
-            <a:ext cx="5120640" cy="3785615"/>
-          </a:xfrm>
-          <a:prstGeom prst="rect">
-            <a:avLst/>
-          </a:prstGeom>
-          <a:noFill/>
-        </p:spPr>
-        <p:txBody>
-          <a:bodyPr wrap="square" anchor="t">
-            <a:spAutoFit/>
-          </a:bodyPr>
-          <a:lstStyle/>
-          <a:p>
-            <a:pPr algn="l">
-              <a:spcAft>
-                <a:spcPts val="800"/>
-              </a:spcAft>
-            </a:pPr>
-            <a:r>
-              <a:rPr sz="1500" b="0">
+              <a:t>▪  </a:t>
+            </a:r>
+            <a:r>
+              <a:rPr sz="1300" b="1">
                 <a:solidFill>
                   <a:srgbClr val="1F2937"/>
                 </a:solidFill>
               </a:rPr>
-              <a:t>•  Two passive views: sharp dents of very different depth give nearly identical pixels</a:t>
-            </a:r>
-          </a:p>
-          <a:p>
-            <a:pPr algn="l">
-              <a:spcAft>
-                <a:spcPts val="800"/>
-              </a:spcAft>
-            </a:pPr>
-            <a:r>
-              <a:rPr sz="1500" b="0">
+              <a:t>Design choices.  </a:t>
+            </a:r>
+            <a:r>
+              <a:rPr sz="1300">
                 <a:solidFill>
                   <a:srgbClr val="1F2937"/>
                 </a:solidFill>
               </a:rPr>
-              <a:t>•  On new designs, found dents are measured at a median 60% of true depth</a:t>
-            </a:r>
-          </a:p>
-          <a:p>
-            <a:pPr algn="l">
-              <a:spcAft>
-                <a:spcPts val="800"/>
-              </a:spcAft>
-            </a:pPr>
-            <a:r>
-              <a:rPr sz="1500" b="0">
-                <a:solidFill>
-                  <a:srgbClr val="1F2937"/>
-                </a:solidFill>
-              </a:rPr>
-              <a:t>•  Not fixed by better search, deeper restarts, 4 views, or profile-likelihood depth intervals (36/109 contain the truth)</a:t>
-            </a:r>
-          </a:p>
-          <a:p>
-            <a:pPr algn="l">
-              <a:spcAft>
-                <a:spcPts val="800"/>
-              </a:spcAft>
-            </a:pPr>
-            <a:r>
-              <a:rPr sz="1500" b="0">
-                <a:solidFill>
-                  <a:srgbClr val="1F2937"/>
-                </a:solidFill>
-              </a:rPr>
-              <a:t>•  So: location is reported; depth is an open limitation, not a guaranteed bound</a:t>
-            </a:r>
-          </a:p>
-        </p:txBody>
-      </p:sp>
-      <p:pic>
-        <p:nvPicPr>
-          <p:cNvPr id="6" name="Picture 5" descr="s16_map.png"/>
-          <p:cNvPicPr>
-            <a:picLocks noChangeAspect="1"/>
-          </p:cNvPicPr>
-          <p:nvPr/>
-        </p:nvPicPr>
-        <p:blipFill>
-          <a:blip r:embed="rId3"/>
-          <a:stretch>
-            <a:fillRect/>
-          </a:stretch>
-        </p:blipFill>
-        <p:spPr>
-          <a:xfrm>
-            <a:off x="980040" y="4251960"/>
-            <a:ext cx="2063278" cy="2139696"/>
-          </a:xfrm>
-          <a:prstGeom prst="rect">
-            <a:avLst/>
-          </a:prstGeom>
-        </p:spPr>
-      </p:pic>
-      <p:sp>
-        <p:nvSpPr>
-          <p:cNvPr id="7" name="TextBox 6"/>
-          <p:cNvSpPr txBox="1"/>
-          <p:nvPr/>
-        </p:nvSpPr>
-        <p:spPr>
-          <a:xfrm>
-            <a:off x="3291840" y="4416552"/>
-            <a:ext cx="3291840" cy="1810512"/>
-          </a:xfrm>
-          <a:prstGeom prst="rect">
-            <a:avLst/>
-          </a:prstGeom>
-          <a:noFill/>
-        </p:spPr>
-        <p:txBody>
-          <a:bodyPr wrap="square" anchor="t">
-            <a:spAutoFit/>
-          </a:bodyPr>
-          <a:lstStyle/>
-          <a:p>
-            <a:pPr algn="l">
-              <a:spcAft>
-                <a:spcPts val="800"/>
-              </a:spcAft>
-            </a:pPr>
-            <a:r>
-              <a:rPr sz="1300" b="0">
-                <a:solidFill>
-                  <a:srgbClr val="1F2937"/>
-                </a:solidFill>
-              </a:rPr>
-              <a:t>•  Detectability prediction (per dent): AUROC 0.90–0.95</a:t>
-            </a:r>
-          </a:p>
-          <a:p>
-            <a:pPr algn="l">
-              <a:spcAft>
-                <a:spcPts val="800"/>
-              </a:spcAft>
-            </a:pPr>
-            <a:r>
-              <a:rPr sz="1300" b="0">
-                <a:solidFill>
-                  <a:srgbClr val="1F2937"/>
-                </a:solidFill>
-              </a:rPr>
-              <a:t>•  Per-point maps are optimistic below 0.2 mm: an upper bound</a:t>
+              <a:t>pose from silhouettes (lighting-independent); evidence on interior, non-grazing pixels; dent and stain searched symmetrically so a stain cannot hide a dent.</a:t>
             </a:r>
           </a:p>
         </p:txBody>
